--- a/ppt/Grade09/G9_S123_Magnetism_2.pptx
+++ b/ppt/Grade09/G9_S123_Magnetism_2.pptx
@@ -40,6 +40,7 @@
     <p:sldId id="288" r:id="rId40"/>
     <p:sldId id="289" r:id="rId41"/>
     <p:sldId id="290" r:id="rId42"/>
+    <p:sldId id="291" r:id="rId43"/>
   </p:sldIdLst>
   <p:sldSz cx="12191695" cy="6858000" type="screen4x3"/>
   <p:notesSz cx="6858000" cy="9144000"/>
@@ -561,6 +562,76 @@
 </p:notes>
 </file>
 
+<file path=ppt/notesSlides/notesSlide10.xml><?xml version="1.0" encoding="utf-8"?>
+<p:notes xmlns:a="http://schemas.openxmlformats.org/drawingml/2006/main" xmlns:p="http://schemas.openxmlformats.org/presentationml/2006/main" xmlns:r="http://schemas.openxmlformats.org/officeDocument/2006/relationships">
+  <p:cSld>
+    <p:spTree>
+      <p:nvGrpSpPr>
+        <p:cNvPr id="1" name=""/>
+        <p:cNvGrpSpPr/>
+        <p:nvPr/>
+      </p:nvGrpSpPr>
+      <p:grpSpPr>
+        <a:xfrm>
+          <a:off x="0" y="0"/>
+          <a:ext cx="0" cy="0"/>
+          <a:chOff x="0" y="0"/>
+          <a:chExt cx="0" cy="0"/>
+        </a:xfrm>
+      </p:grpSpPr>
+      <p:sp>
+        <p:nvSpPr>
+          <p:cNvPr id="2" name="Slide Image Placeholder 1"/>
+          <p:cNvSpPr>
+            <a:spLocks noGrp="1"/>
+          </p:cNvSpPr>
+          <p:nvPr>
+            <p:ph type="sldImg" idx="2"/>
+          </p:nvPr>
+        </p:nvSpPr>
+        <p:spPr/>
+      </p:sp>
+      <p:sp>
+        <p:nvSpPr>
+          <p:cNvPr id="3" name="Notes Placeholder 2"/>
+          <p:cNvSpPr>
+            <a:spLocks noGrp="1"/>
+          </p:cNvSpPr>
+          <p:nvPr>
+            <p:ph type="body" idx="3" sz="quarter"/>
+          </p:nvPr>
+        </p:nvSpPr>
+        <p:spPr/>
+        <p:txBody>
+          <a:bodyPr/>
+          <a:lstStyle/>
+          <a:p>
+            <a:r>
+              <a:t>Rapid recap; neutral points and the electromagnet advantages are the key points.</a:t>
+            </a:r>
+          </a:p>
+        </p:txBody>
+      </p:sp>
+      <p:sp>
+        <p:nvSpPr>
+          <p:cNvPr id="4" name="Slide Number Placeholder 3"/>
+          <p:cNvSpPr>
+            <a:spLocks noGrp="1"/>
+          </p:cNvSpPr>
+          <p:nvPr>
+            <p:ph type="sldNum" idx="5" sz="quarter"/>
+          </p:nvPr>
+        </p:nvSpPr>
+        <p:spPr/>
+      </p:sp>
+    </p:spTree>
+  </p:cSld>
+  <p:clrMapOvr>
+    <a:masterClrMapping/>
+  </p:clrMapOvr>
+</p:notes>
+</file>
+
 <file path=ppt/notesSlides/notesSlide2.xml><?xml version="1.0" encoding="utf-8"?>
 <p:notes xmlns:a="http://schemas.openxmlformats.org/drawingml/2006/main" xmlns:p="http://schemas.openxmlformats.org/presentationml/2006/main" xmlns:r="http://schemas.openxmlformats.org/officeDocument/2006/relationships">
   <p:cSld>
@@ -1096,7 +1167,7 @@
           <a:lstStyle/>
           <a:p>
             <a:r>
-              <a:t>Rapid recap; neutral points and the electromagnet advantages are the key points.</a:t>
+              <a:t>Care of magnets: avoid heat/shock; store in pairs with soft-iron keepers across unlike poles to preserve magnetism.</a:t>
             </a:r>
           </a:p>
         </p:txBody>
@@ -17069,7 +17140,7 @@
                 </a:solidFill>
                 <a:latin typeface="Arial"/>
               </a:rPr>
-              <a:t>WRAP UP</a:t>
+              <a:t>CARE OF MAGNETS</a:t>
             </a:r>
           </a:p>
         </p:txBody>
@@ -17104,7 +17175,7 @@
                 </a:solidFill>
                 <a:latin typeface="Calibri"/>
               </a:rPr>
-              <a:t>Quick Recap</a:t>
+              <a:t>Storing and Caring for Permanent Magnets</a:t>
             </a:r>
           </a:p>
         </p:txBody>
@@ -17117,12 +17188,12 @@
         </p:nvSpPr>
         <p:spPr>
           <a:xfrm>
-            <a:off x="640080" y="1828800"/>
-            <a:ext cx="10881360" cy="4114800"/>
+            <a:off x="640080" y="1920240"/>
+            <a:ext cx="5212080" cy="1600200"/>
           </a:xfrm>
           <a:prstGeom prst="roundRect">
             <a:avLst>
-              <a:gd name="adj" fmla="val 3000"/>
+              <a:gd name="adj" fmla="val 5000"/>
             </a:avLst>
           </a:prstGeom>
           <a:solidFill>
@@ -17163,14 +17234,84 @@
       </p:sp>
       <p:sp>
         <p:nvSpPr>
-          <p:cNvPr id="7" name="TextBox 6"/>
-          <p:cNvSpPr txBox="1"/>
-          <p:nvPr/>
-        </p:nvSpPr>
-        <p:spPr>
-          <a:xfrm>
-            <a:off x="1005840" y="2148840"/>
-            <a:ext cx="10058400" cy="3657600"/>
+          <p:cNvPr id="7" name="Rounded Rectangle 6"/>
+          <p:cNvSpPr/>
+          <p:nvPr/>
+        </p:nvSpPr>
+        <p:spPr>
+          <a:xfrm>
+            <a:off x="960119" y="2212848"/>
+            <a:ext cx="502920" cy="502920"/>
+          </a:xfrm>
+          <a:prstGeom prst="roundRect">
+            <a:avLst>
+              <a:gd name="adj" fmla="val 30000"/>
+            </a:avLst>
+          </a:prstGeom>
+          <a:solidFill>
+            <a:srgbClr val="0A9396"/>
+          </a:solidFill>
+          <a:ln>
+            <a:noFill/>
+          </a:ln>
+          <a:effectLst/>
+        </p:spPr>
+        <p:style>
+          <a:lnRef idx="1">
+            <a:schemeClr val="accent1"/>
+          </a:lnRef>
+          <a:fillRef idx="3">
+            <a:schemeClr val="accent1"/>
+          </a:fillRef>
+          <a:effectRef idx="2">
+            <a:schemeClr val="accent1"/>
+          </a:effectRef>
+          <a:fontRef idx="minor">
+            <a:schemeClr val="lt1"/>
+          </a:fontRef>
+        </p:style>
+        <p:txBody>
+          <a:bodyPr rtlCol="0" anchor="ctr"/>
+          <a:lstStyle/>
+          <a:p>
+            <a:pPr algn="ctr"/>
+          </a:p>
+        </p:txBody>
+      </p:sp>
+      <p:pic>
+        <p:nvPicPr>
+          <p:cNvPr id="8" name="Picture 7" descr="spark_FFFFFF.png"/>
+          <p:cNvPicPr>
+            <a:picLocks noChangeAspect="1"/>
+          </p:cNvPicPr>
+          <p:nvPr/>
+        </p:nvPicPr>
+        <p:blipFill>
+          <a:blip r:embed="rId2"/>
+          <a:stretch>
+            <a:fillRect/>
+          </a:stretch>
+        </p:blipFill>
+        <p:spPr>
+          <a:xfrm>
+            <a:off x="1070762" y="2323490"/>
+            <a:ext cx="281635" cy="281635"/>
+          </a:xfrm>
+          <a:prstGeom prst="rect">
+            <a:avLst/>
+          </a:prstGeom>
+        </p:spPr>
+      </p:pic>
+      <p:sp>
+        <p:nvSpPr>
+          <p:cNvPr id="9" name="TextBox 8"/>
+          <p:cNvSpPr txBox="1"/>
+          <p:nvPr/>
+        </p:nvSpPr>
+        <p:spPr>
+          <a:xfrm>
+            <a:off x="1645920" y="2176272"/>
+            <a:ext cx="3931920" cy="457200"/>
           </a:xfrm>
           <a:prstGeom prst="rect">
             <a:avLst/>
@@ -17183,225 +17324,626 @@
           </a:bodyPr>
           <a:lstStyle/>
           <a:p>
-            <a:pPr algn="l">
-              <a:lnSpc>
-                <a:spcPct val="105000"/>
-              </a:lnSpc>
-              <a:spcAft>
-                <a:spcPts val="1200"/>
-              </a:spcAft>
-            </a:pPr>
-            <a:r>
-              <a:rPr sz="1600" b="1" i="0">
-                <a:solidFill>
-                  <a:srgbClr val="2A9D8F"/>
-                </a:solidFill>
-                <a:latin typeface="Calibri"/>
-              </a:rPr>
-              <a:t>✓  </a:t>
-            </a:r>
-            <a:r>
-              <a:rPr sz="1600" b="1" i="0">
+            <a:pPr algn="l"/>
+            <a:r>
+              <a:rPr sz="1700" b="1" i="0">
                 <a:solidFill>
                   <a:srgbClr val="1D2433"/>
                 </a:solidFill>
                 <a:latin typeface="Calibri"/>
               </a:rPr>
-              <a:t>Plotting  —  </a:t>
-            </a:r>
-            <a:r>
-              <a:rPr sz="1500" b="0" i="0">
+              <a:t>They weaken</a:t>
+            </a:r>
+          </a:p>
+        </p:txBody>
+      </p:sp>
+      <p:sp>
+        <p:nvSpPr>
+          <p:cNvPr id="10" name="TextBox 9"/>
+          <p:cNvSpPr txBox="1"/>
+          <p:nvPr/>
+        </p:nvSpPr>
+        <p:spPr>
+          <a:xfrm>
+            <a:off x="1645920" y="2670048"/>
+            <a:ext cx="3931920" cy="685800"/>
+          </a:xfrm>
+          <a:prstGeom prst="rect">
+            <a:avLst/>
+          </a:prstGeom>
+          <a:noFill/>
+        </p:spPr>
+        <p:txBody>
+          <a:bodyPr wrap="square" anchor="t" lIns="0" rIns="0" tIns="0" bIns="0">
+            <a:spAutoFit/>
+          </a:bodyPr>
+          <a:lstStyle/>
+          <a:p>
+            <a:pPr algn="l"/>
+            <a:r>
+              <a:rPr sz="1350" b="0" i="0">
                 <a:solidFill>
                   <a:srgbClr val="6B7280"/>
                 </a:solidFill>
                 <a:latin typeface="Calibri"/>
               </a:rPr>
-              <a:t>use a plotting compass to trace field lines</a:t>
-            </a:r>
-          </a:p>
-          <a:p>
-            <a:pPr algn="l">
-              <a:lnSpc>
-                <a:spcPct val="105000"/>
-              </a:lnSpc>
-              <a:spcAft>
-                <a:spcPts val="1200"/>
-              </a:spcAft>
-            </a:pPr>
-            <a:r>
-              <a:rPr sz="1600" b="1" i="0">
-                <a:solidFill>
-                  <a:srgbClr val="2A9D8F"/>
-                </a:solidFill>
-                <a:latin typeface="Calibri"/>
-              </a:rPr>
-              <a:t>✓  </a:t>
-            </a:r>
-            <a:r>
-              <a:rPr sz="1600" b="1" i="0">
+              <a:t>Rough handling, heating, hammering and stray fields gradually weaken a magnet.</a:t>
+            </a:r>
+          </a:p>
+        </p:txBody>
+      </p:sp>
+      <p:sp>
+        <p:nvSpPr>
+          <p:cNvPr id="11" name="Rounded Rectangle 10"/>
+          <p:cNvSpPr/>
+          <p:nvPr/>
+        </p:nvSpPr>
+        <p:spPr>
+          <a:xfrm>
+            <a:off x="6217920" y="1920240"/>
+            <a:ext cx="5212080" cy="1600200"/>
+          </a:xfrm>
+          <a:prstGeom prst="roundRect">
+            <a:avLst>
+              <a:gd name="adj" fmla="val 5000"/>
+            </a:avLst>
+          </a:prstGeom>
+          <a:solidFill>
+            <a:srgbClr val="FFFFFF"/>
+          </a:solidFill>
+          <a:ln>
+            <a:noFill/>
+          </a:ln>
+          <a:effectLst>
+            <a:outerShdw blurRad="88900" dist="38100" dir="5400000" rotWithShape="0" algn="bl">
+              <a:srgbClr val="000000">
+                <a:alpha val="16000"/>
+              </a:srgbClr>
+            </a:outerShdw>
+          </a:effectLst>
+        </p:spPr>
+        <p:style>
+          <a:lnRef idx="1">
+            <a:schemeClr val="accent1"/>
+          </a:lnRef>
+          <a:fillRef idx="3">
+            <a:schemeClr val="accent1"/>
+          </a:fillRef>
+          <a:effectRef idx="2">
+            <a:schemeClr val="accent1"/>
+          </a:effectRef>
+          <a:fontRef idx="minor">
+            <a:schemeClr val="lt1"/>
+          </a:fontRef>
+        </p:style>
+        <p:txBody>
+          <a:bodyPr rtlCol="0" anchor="ctr"/>
+          <a:lstStyle/>
+          <a:p>
+            <a:pPr algn="ctr"/>
+          </a:p>
+        </p:txBody>
+      </p:sp>
+      <p:sp>
+        <p:nvSpPr>
+          <p:cNvPr id="12" name="Rounded Rectangle 11"/>
+          <p:cNvSpPr/>
+          <p:nvPr/>
+        </p:nvSpPr>
+        <p:spPr>
+          <a:xfrm>
+            <a:off x="6537960" y="2212848"/>
+            <a:ext cx="502920" cy="502920"/>
+          </a:xfrm>
+          <a:prstGeom prst="roundRect">
+            <a:avLst>
+              <a:gd name="adj" fmla="val 30000"/>
+            </a:avLst>
+          </a:prstGeom>
+          <a:solidFill>
+            <a:srgbClr val="F4801A"/>
+          </a:solidFill>
+          <a:ln>
+            <a:noFill/>
+          </a:ln>
+          <a:effectLst/>
+        </p:spPr>
+        <p:style>
+          <a:lnRef idx="1">
+            <a:schemeClr val="accent1"/>
+          </a:lnRef>
+          <a:fillRef idx="3">
+            <a:schemeClr val="accent1"/>
+          </a:fillRef>
+          <a:effectRef idx="2">
+            <a:schemeClr val="accent1"/>
+          </a:effectRef>
+          <a:fontRef idx="minor">
+            <a:schemeClr val="lt1"/>
+          </a:fontRef>
+        </p:style>
+        <p:txBody>
+          <a:bodyPr rtlCol="0" anchor="ctr"/>
+          <a:lstStyle/>
+          <a:p>
+            <a:pPr algn="ctr"/>
+          </a:p>
+        </p:txBody>
+      </p:sp>
+      <p:pic>
+        <p:nvPicPr>
+          <p:cNvPr id="13" name="Picture 12" descr="target_FFFFFF.png"/>
+          <p:cNvPicPr>
+            <a:picLocks noChangeAspect="1"/>
+          </p:cNvPicPr>
+          <p:nvPr/>
+        </p:nvPicPr>
+        <p:blipFill>
+          <a:blip r:embed="rId3"/>
+          <a:stretch>
+            <a:fillRect/>
+          </a:stretch>
+        </p:blipFill>
+        <p:spPr>
+          <a:xfrm>
+            <a:off x="6648602" y="2323490"/>
+            <a:ext cx="281635" cy="281635"/>
+          </a:xfrm>
+          <a:prstGeom prst="rect">
+            <a:avLst/>
+          </a:prstGeom>
+        </p:spPr>
+      </p:pic>
+      <p:sp>
+        <p:nvSpPr>
+          <p:cNvPr id="14" name="TextBox 13"/>
+          <p:cNvSpPr txBox="1"/>
+          <p:nvPr/>
+        </p:nvSpPr>
+        <p:spPr>
+          <a:xfrm>
+            <a:off x="7223760" y="2176272"/>
+            <a:ext cx="3931920" cy="457200"/>
+          </a:xfrm>
+          <a:prstGeom prst="rect">
+            <a:avLst/>
+          </a:prstGeom>
+          <a:noFill/>
+        </p:spPr>
+        <p:txBody>
+          <a:bodyPr wrap="square" anchor="t" lIns="0" rIns="0" tIns="0" bIns="0">
+            <a:spAutoFit/>
+          </a:bodyPr>
+          <a:lstStyle/>
+          <a:p>
+            <a:pPr algn="l"/>
+            <a:r>
+              <a:rPr sz="1700" b="1" i="0">
                 <a:solidFill>
                   <a:srgbClr val="1D2433"/>
                 </a:solidFill>
                 <a:latin typeface="Calibri"/>
               </a:rPr>
-              <a:t>Bar magnet field  —  </a:t>
-            </a:r>
-            <a:r>
-              <a:rPr sz="1500" b="0" i="0">
+              <a:t>Use keepers</a:t>
+            </a:r>
+          </a:p>
+        </p:txBody>
+      </p:sp>
+      <p:sp>
+        <p:nvSpPr>
+          <p:cNvPr id="15" name="TextBox 14"/>
+          <p:cNvSpPr txBox="1"/>
+          <p:nvPr/>
+        </p:nvSpPr>
+        <p:spPr>
+          <a:xfrm>
+            <a:off x="7223760" y="2670048"/>
+            <a:ext cx="3931920" cy="685800"/>
+          </a:xfrm>
+          <a:prstGeom prst="rect">
+            <a:avLst/>
+          </a:prstGeom>
+          <a:noFill/>
+        </p:spPr>
+        <p:txBody>
+          <a:bodyPr wrap="square" anchor="t" lIns="0" rIns="0" tIns="0" bIns="0">
+            <a:spAutoFit/>
+          </a:bodyPr>
+          <a:lstStyle/>
+          <a:p>
+            <a:pPr algn="l"/>
+            <a:r>
+              <a:rPr sz="1350" b="0" i="0">
                 <a:solidFill>
                   <a:srgbClr val="6B7280"/>
                 </a:solidFill>
                 <a:latin typeface="Calibri"/>
               </a:rPr>
-              <a:t>non-uniform: curved, unevenly spaced lines</a:t>
-            </a:r>
-          </a:p>
-          <a:p>
-            <a:pPr algn="l">
-              <a:lnSpc>
-                <a:spcPct val="105000"/>
-              </a:lnSpc>
-              <a:spcAft>
-                <a:spcPts val="1200"/>
-              </a:spcAft>
-            </a:pPr>
-            <a:r>
-              <a:rPr sz="1600" b="1" i="0">
-                <a:solidFill>
-                  <a:srgbClr val="2A9D8F"/>
-                </a:solidFill>
-                <a:latin typeface="Calibri"/>
-              </a:rPr>
-              <a:t>✓  </a:t>
-            </a:r>
-            <a:r>
-              <a:rPr sz="1600" b="1" i="0">
+              <a:t>Store bar magnets in pairs with soft-iron 'keepers' across their ends.</a:t>
+            </a:r>
+          </a:p>
+        </p:txBody>
+      </p:sp>
+      <p:sp>
+        <p:nvSpPr>
+          <p:cNvPr id="16" name="Rounded Rectangle 15"/>
+          <p:cNvSpPr/>
+          <p:nvPr/>
+        </p:nvSpPr>
+        <p:spPr>
+          <a:xfrm>
+            <a:off x="640080" y="3749039"/>
+            <a:ext cx="5212080" cy="1600200"/>
+          </a:xfrm>
+          <a:prstGeom prst="roundRect">
+            <a:avLst>
+              <a:gd name="adj" fmla="val 5000"/>
+            </a:avLst>
+          </a:prstGeom>
+          <a:solidFill>
+            <a:srgbClr val="FFFFFF"/>
+          </a:solidFill>
+          <a:ln>
+            <a:noFill/>
+          </a:ln>
+          <a:effectLst>
+            <a:outerShdw blurRad="88900" dist="38100" dir="5400000" rotWithShape="0" algn="bl">
+              <a:srgbClr val="000000">
+                <a:alpha val="16000"/>
+              </a:srgbClr>
+            </a:outerShdw>
+          </a:effectLst>
+        </p:spPr>
+        <p:style>
+          <a:lnRef idx="1">
+            <a:schemeClr val="accent1"/>
+          </a:lnRef>
+          <a:fillRef idx="3">
+            <a:schemeClr val="accent1"/>
+          </a:fillRef>
+          <a:effectRef idx="2">
+            <a:schemeClr val="accent1"/>
+          </a:effectRef>
+          <a:fontRef idx="minor">
+            <a:schemeClr val="lt1"/>
+          </a:fontRef>
+        </p:style>
+        <p:txBody>
+          <a:bodyPr rtlCol="0" anchor="ctr"/>
+          <a:lstStyle/>
+          <a:p>
+            <a:pPr algn="ctr"/>
+          </a:p>
+        </p:txBody>
+      </p:sp>
+      <p:sp>
+        <p:nvSpPr>
+          <p:cNvPr id="17" name="Rounded Rectangle 16"/>
+          <p:cNvSpPr/>
+          <p:nvPr/>
+        </p:nvSpPr>
+        <p:spPr>
+          <a:xfrm>
+            <a:off x="960119" y="4041648"/>
+            <a:ext cx="502920" cy="502920"/>
+          </a:xfrm>
+          <a:prstGeom prst="roundRect">
+            <a:avLst>
+              <a:gd name="adj" fmla="val 30000"/>
+            </a:avLst>
+          </a:prstGeom>
+          <a:solidFill>
+            <a:srgbClr val="6A4C93"/>
+          </a:solidFill>
+          <a:ln>
+            <a:noFill/>
+          </a:ln>
+          <a:effectLst/>
+        </p:spPr>
+        <p:style>
+          <a:lnRef idx="1">
+            <a:schemeClr val="accent1"/>
+          </a:lnRef>
+          <a:fillRef idx="3">
+            <a:schemeClr val="accent1"/>
+          </a:fillRef>
+          <a:effectRef idx="2">
+            <a:schemeClr val="accent1"/>
+          </a:effectRef>
+          <a:fontRef idx="minor">
+            <a:schemeClr val="lt1"/>
+          </a:fontRef>
+        </p:style>
+        <p:txBody>
+          <a:bodyPr rtlCol="0" anchor="ctr"/>
+          <a:lstStyle/>
+          <a:p>
+            <a:pPr algn="ctr"/>
+          </a:p>
+        </p:txBody>
+      </p:sp>
+      <p:pic>
+        <p:nvPicPr>
+          <p:cNvPr id="18" name="Picture 17" descr="magnet_FFFFFF.png"/>
+          <p:cNvPicPr>
+            <a:picLocks noChangeAspect="1"/>
+          </p:cNvPicPr>
+          <p:nvPr/>
+        </p:nvPicPr>
+        <p:blipFill>
+          <a:blip r:embed="rId4"/>
+          <a:stretch>
+            <a:fillRect/>
+          </a:stretch>
+        </p:blipFill>
+        <p:spPr>
+          <a:xfrm>
+            <a:off x="1070762" y="4152290"/>
+            <a:ext cx="281635" cy="281635"/>
+          </a:xfrm>
+          <a:prstGeom prst="rect">
+            <a:avLst/>
+          </a:prstGeom>
+        </p:spPr>
+      </p:pic>
+      <p:sp>
+        <p:nvSpPr>
+          <p:cNvPr id="19" name="TextBox 18"/>
+          <p:cNvSpPr txBox="1"/>
+          <p:nvPr/>
+        </p:nvSpPr>
+        <p:spPr>
+          <a:xfrm>
+            <a:off x="1645920" y="4005072"/>
+            <a:ext cx="3931920" cy="457200"/>
+          </a:xfrm>
+          <a:prstGeom prst="rect">
+            <a:avLst/>
+          </a:prstGeom>
+          <a:noFill/>
+        </p:spPr>
+        <p:txBody>
+          <a:bodyPr wrap="square" anchor="t" lIns="0" rIns="0" tIns="0" bIns="0">
+            <a:spAutoFit/>
+          </a:bodyPr>
+          <a:lstStyle/>
+          <a:p>
+            <a:pPr algn="l"/>
+            <a:r>
+              <a:rPr sz="1700" b="1" i="0">
                 <a:solidFill>
                   <a:srgbClr val="1D2433"/>
                 </a:solidFill>
                 <a:latin typeface="Calibri"/>
               </a:rPr>
-              <a:t>Neutral point  —  </a:t>
-            </a:r>
-            <a:r>
-              <a:rPr sz="1500" b="0" i="0">
+              <a:t>Unlike poles together</a:t>
+            </a:r>
+          </a:p>
+        </p:txBody>
+      </p:sp>
+      <p:sp>
+        <p:nvSpPr>
+          <p:cNvPr id="20" name="TextBox 19"/>
+          <p:cNvSpPr txBox="1"/>
+          <p:nvPr/>
+        </p:nvSpPr>
+        <p:spPr>
+          <a:xfrm>
+            <a:off x="1645920" y="4498848"/>
+            <a:ext cx="3931920" cy="685800"/>
+          </a:xfrm>
+          <a:prstGeom prst="rect">
+            <a:avLst/>
+          </a:prstGeom>
+          <a:noFill/>
+        </p:spPr>
+        <p:txBody>
+          <a:bodyPr wrap="square" anchor="t" lIns="0" rIns="0" tIns="0" bIns="0">
+            <a:spAutoFit/>
+          </a:bodyPr>
+          <a:lstStyle/>
+          <a:p>
+            <a:pPr algn="l"/>
+            <a:r>
+              <a:rPr sz="1350" b="0" i="0">
                 <a:solidFill>
                   <a:srgbClr val="6B7280"/>
                 </a:solidFill>
                 <a:latin typeface="Calibri"/>
               </a:rPr>
-              <a:t>magnet's field cancels Earth's; net field zero</a:t>
-            </a:r>
-          </a:p>
-          <a:p>
-            <a:pPr algn="l">
-              <a:lnSpc>
-                <a:spcPct val="105000"/>
-              </a:lnSpc>
-              <a:spcAft>
-                <a:spcPts val="1200"/>
-              </a:spcAft>
-            </a:pPr>
-            <a:r>
-              <a:rPr sz="1600" b="1" i="0">
-                <a:solidFill>
-                  <a:srgbClr val="2A9D8F"/>
-                </a:solidFill>
-                <a:latin typeface="Calibri"/>
-              </a:rPr>
-              <a:t>✓  </a:t>
-            </a:r>
-            <a:r>
-              <a:rPr sz="1600" b="1" i="0">
+              <a:t>Lay the pair with unlike poles adjacent, joined by the keepers.</a:t>
+            </a:r>
+          </a:p>
+        </p:txBody>
+      </p:sp>
+      <p:sp>
+        <p:nvSpPr>
+          <p:cNvPr id="21" name="Rounded Rectangle 20"/>
+          <p:cNvSpPr/>
+          <p:nvPr/>
+        </p:nvSpPr>
+        <p:spPr>
+          <a:xfrm>
+            <a:off x="6217920" y="3749039"/>
+            <a:ext cx="5212080" cy="1600200"/>
+          </a:xfrm>
+          <a:prstGeom prst="roundRect">
+            <a:avLst>
+              <a:gd name="adj" fmla="val 5000"/>
+            </a:avLst>
+          </a:prstGeom>
+          <a:solidFill>
+            <a:srgbClr val="FFFFFF"/>
+          </a:solidFill>
+          <a:ln>
+            <a:noFill/>
+          </a:ln>
+          <a:effectLst>
+            <a:outerShdw blurRad="88900" dist="38100" dir="5400000" rotWithShape="0" algn="bl">
+              <a:srgbClr val="000000">
+                <a:alpha val="16000"/>
+              </a:srgbClr>
+            </a:outerShdw>
+          </a:effectLst>
+        </p:spPr>
+        <p:style>
+          <a:lnRef idx="1">
+            <a:schemeClr val="accent1"/>
+          </a:lnRef>
+          <a:fillRef idx="3">
+            <a:schemeClr val="accent1"/>
+          </a:fillRef>
+          <a:effectRef idx="2">
+            <a:schemeClr val="accent1"/>
+          </a:effectRef>
+          <a:fontRef idx="minor">
+            <a:schemeClr val="lt1"/>
+          </a:fontRef>
+        </p:style>
+        <p:txBody>
+          <a:bodyPr rtlCol="0" anchor="ctr"/>
+          <a:lstStyle/>
+          <a:p>
+            <a:pPr algn="ctr"/>
+          </a:p>
+        </p:txBody>
+      </p:sp>
+      <p:sp>
+        <p:nvSpPr>
+          <p:cNvPr id="22" name="Rounded Rectangle 21"/>
+          <p:cNvSpPr/>
+          <p:nvPr/>
+        </p:nvSpPr>
+        <p:spPr>
+          <a:xfrm>
+            <a:off x="6537960" y="4041648"/>
+            <a:ext cx="502920" cy="502920"/>
+          </a:xfrm>
+          <a:prstGeom prst="roundRect">
+            <a:avLst>
+              <a:gd name="adj" fmla="val 30000"/>
+            </a:avLst>
+          </a:prstGeom>
+          <a:solidFill>
+            <a:srgbClr val="E63946"/>
+          </a:solidFill>
+          <a:ln>
+            <a:noFill/>
+          </a:ln>
+          <a:effectLst/>
+        </p:spPr>
+        <p:style>
+          <a:lnRef idx="1">
+            <a:schemeClr val="accent1"/>
+          </a:lnRef>
+          <a:fillRef idx="3">
+            <a:schemeClr val="accent1"/>
+          </a:fillRef>
+          <a:effectRef idx="2">
+            <a:schemeClr val="accent1"/>
+          </a:effectRef>
+          <a:fontRef idx="minor">
+            <a:schemeClr val="lt1"/>
+          </a:fontRef>
+        </p:style>
+        <p:txBody>
+          <a:bodyPr rtlCol="0" anchor="ctr"/>
+          <a:lstStyle/>
+          <a:p>
+            <a:pPr algn="ctr"/>
+          </a:p>
+        </p:txBody>
+      </p:sp>
+      <p:pic>
+        <p:nvPicPr>
+          <p:cNvPr id="23" name="Picture 22" descr="spark_FFFFFF.png"/>
+          <p:cNvPicPr>
+            <a:picLocks noChangeAspect="1"/>
+          </p:cNvPicPr>
+          <p:nvPr/>
+        </p:nvPicPr>
+        <p:blipFill>
+          <a:blip r:embed="rId2"/>
+          <a:stretch>
+            <a:fillRect/>
+          </a:stretch>
+        </p:blipFill>
+        <p:spPr>
+          <a:xfrm>
+            <a:off x="6648602" y="4152290"/>
+            <a:ext cx="281635" cy="281635"/>
+          </a:xfrm>
+          <a:prstGeom prst="rect">
+            <a:avLst/>
+          </a:prstGeom>
+        </p:spPr>
+      </p:pic>
+      <p:sp>
+        <p:nvSpPr>
+          <p:cNvPr id="24" name="TextBox 23"/>
+          <p:cNvSpPr txBox="1"/>
+          <p:nvPr/>
+        </p:nvSpPr>
+        <p:spPr>
+          <a:xfrm>
+            <a:off x="7223760" y="4005072"/>
+            <a:ext cx="3931920" cy="457200"/>
+          </a:xfrm>
+          <a:prstGeom prst="rect">
+            <a:avLst/>
+          </a:prstGeom>
+          <a:noFill/>
+        </p:spPr>
+        <p:txBody>
+          <a:bodyPr wrap="square" anchor="t" lIns="0" rIns="0" tIns="0" bIns="0">
+            <a:spAutoFit/>
+          </a:bodyPr>
+          <a:lstStyle/>
+          <a:p>
+            <a:pPr algn="l"/>
+            <a:r>
+              <a:rPr sz="1700" b="1" i="0">
                 <a:solidFill>
                   <a:srgbClr val="1D2433"/>
                 </a:solidFill>
                 <a:latin typeface="Calibri"/>
               </a:rPr>
-              <a:t>Electromagnet  —  </a:t>
-            </a:r>
-            <a:r>
-              <a:rPr sz="1500" b="0" i="0">
+              <a:t>Why it helps</a:t>
+            </a:r>
+          </a:p>
+        </p:txBody>
+      </p:sp>
+      <p:sp>
+        <p:nvSpPr>
+          <p:cNvPr id="25" name="TextBox 24"/>
+          <p:cNvSpPr txBox="1"/>
+          <p:nvPr/>
+        </p:nvSpPr>
+        <p:spPr>
+          <a:xfrm>
+            <a:off x="7223760" y="4498848"/>
+            <a:ext cx="3931920" cy="685800"/>
+          </a:xfrm>
+          <a:prstGeom prst="rect">
+            <a:avLst/>
+          </a:prstGeom>
+          <a:noFill/>
+        </p:spPr>
+        <p:txBody>
+          <a:bodyPr wrap="square" anchor="t" lIns="0" rIns="0" tIns="0" bIns="0">
+            <a:spAutoFit/>
+          </a:bodyPr>
+          <a:lstStyle/>
+          <a:p>
+            <a:pPr algn="l"/>
+            <a:r>
+              <a:rPr sz="1350" b="0" i="0">
                 <a:solidFill>
                   <a:srgbClr val="6B7280"/>
                 </a:solidFill>
                 <a:latin typeface="Calibri"/>
               </a:rPr>
-              <a:t>solenoid + soft-iron core; switchable</a:t>
-            </a:r>
-          </a:p>
-          <a:p>
-            <a:pPr algn="l">
-              <a:lnSpc>
-                <a:spcPct val="105000"/>
-              </a:lnSpc>
-              <a:spcAft>
-                <a:spcPts val="1200"/>
-              </a:spcAft>
-            </a:pPr>
-            <a:r>
-              <a:rPr sz="1600" b="1" i="0">
-                <a:solidFill>
-                  <a:srgbClr val="2A9D8F"/>
-                </a:solidFill>
-                <a:latin typeface="Calibri"/>
-              </a:rPr>
-              <a:t>✓  </a:t>
-            </a:r>
-            <a:r>
-              <a:rPr sz="1600" b="1" i="0">
-                <a:solidFill>
-                  <a:srgbClr val="1D2433"/>
-                </a:solidFill>
-                <a:latin typeface="Calibri"/>
-              </a:rPr>
-              <a:t>Vs permanent  —  </a:t>
-            </a:r>
-            <a:r>
-              <a:rPr sz="1500" b="0" i="0">
-                <a:solidFill>
-                  <a:srgbClr val="6B7280"/>
-                </a:solidFill>
-                <a:latin typeface="Calibri"/>
-              </a:rPr>
-              <a:t>switchable, adjustable, reversible, very strong</a:t>
-            </a:r>
-          </a:p>
-          <a:p>
-            <a:pPr algn="l">
-              <a:lnSpc>
-                <a:spcPct val="105000"/>
-              </a:lnSpc>
-              <a:spcAft>
-                <a:spcPts val="1200"/>
-              </a:spcAft>
-            </a:pPr>
-            <a:r>
-              <a:rPr sz="1600" b="1" i="0">
-                <a:solidFill>
-                  <a:srgbClr val="2A9D8F"/>
-                </a:solidFill>
-                <a:latin typeface="Calibri"/>
-              </a:rPr>
-              <a:t>✓  </a:t>
-            </a:r>
-            <a:r>
-              <a:rPr sz="1600" b="1" i="0">
-                <a:solidFill>
-                  <a:srgbClr val="1D2433"/>
-                </a:solidFill>
-                <a:latin typeface="Calibri"/>
-              </a:rPr>
-              <a:t>Uses  —  </a:t>
-            </a:r>
-            <a:r>
-              <a:rPr sz="1500" b="0" i="0">
-                <a:solidFill>
-                  <a:srgbClr val="6B7280"/>
-                </a:solidFill>
-                <a:latin typeface="Calibri"/>
-              </a:rPr>
-              <a:t>cranes, electric bell, relays, motors, loudspeakers</a:t>
+              <a:t>The keepers form closed loops for the field, keeping the molecular magnets aligned.</a:t>
             </a:r>
           </a:p>
         </p:txBody>
@@ -17415,6 +17957,487 @@
 </file>
 
 <file path=ppt/slides/slide24.xml><?xml version="1.0" encoding="utf-8"?>
+<p:sld xmlns:a="http://schemas.openxmlformats.org/drawingml/2006/main" xmlns:p="http://schemas.openxmlformats.org/presentationml/2006/main" xmlns:r="http://schemas.openxmlformats.org/officeDocument/2006/relationships">
+  <p:cSld>
+    <p:bg>
+      <p:bgPr>
+        <a:solidFill>
+          <a:srgbClr val="F4F6F8"/>
+        </a:solidFill>
+        <a:effectLst/>
+      </p:bgPr>
+    </p:bg>
+    <p:spTree>
+      <p:nvGrpSpPr>
+        <p:cNvPr id="1" name=""/>
+        <p:cNvGrpSpPr/>
+        <p:nvPr/>
+      </p:nvGrpSpPr>
+      <p:grpSpPr/>
+      <p:sp>
+        <p:nvSpPr>
+          <p:cNvPr id="2" name="Oval 1"/>
+          <p:cNvSpPr/>
+          <p:nvPr/>
+        </p:nvSpPr>
+        <p:spPr>
+          <a:xfrm>
+            <a:off x="10927080" y="365760"/>
+            <a:ext cx="868680" cy="868680"/>
+          </a:xfrm>
+          <a:prstGeom prst="ellipse">
+            <a:avLst/>
+          </a:prstGeom>
+          <a:noFill/>
+          <a:ln w="15875">
+            <a:solidFill>
+              <a:srgbClr val="DDE2E8"/>
+            </a:solidFill>
+          </a:ln>
+          <a:effectLst/>
+        </p:spPr>
+        <p:style>
+          <a:lnRef idx="1">
+            <a:schemeClr val="accent1"/>
+          </a:lnRef>
+          <a:fillRef idx="3">
+            <a:schemeClr val="accent1"/>
+          </a:fillRef>
+          <a:effectRef idx="2">
+            <a:schemeClr val="accent1"/>
+          </a:effectRef>
+          <a:fontRef idx="minor">
+            <a:schemeClr val="lt1"/>
+          </a:fontRef>
+        </p:style>
+        <p:txBody>
+          <a:bodyPr rtlCol="0" anchor="ctr"/>
+          <a:lstStyle/>
+          <a:p>
+            <a:pPr algn="ctr"/>
+          </a:p>
+        </p:txBody>
+      </p:sp>
+      <p:sp>
+        <p:nvSpPr>
+          <p:cNvPr id="3" name="Rectangle 2"/>
+          <p:cNvSpPr/>
+          <p:nvPr/>
+        </p:nvSpPr>
+        <p:spPr>
+          <a:xfrm>
+            <a:off x="548640" y="502920"/>
+            <a:ext cx="256032" cy="256032"/>
+          </a:xfrm>
+          <a:prstGeom prst="rect">
+            <a:avLst/>
+          </a:prstGeom>
+          <a:solidFill>
+            <a:srgbClr val="6A4C93"/>
+          </a:solidFill>
+          <a:ln>
+            <a:noFill/>
+          </a:ln>
+          <a:effectLst/>
+        </p:spPr>
+        <p:style>
+          <a:lnRef idx="1">
+            <a:schemeClr val="accent1"/>
+          </a:lnRef>
+          <a:fillRef idx="3">
+            <a:schemeClr val="accent1"/>
+          </a:fillRef>
+          <a:effectRef idx="2">
+            <a:schemeClr val="accent1"/>
+          </a:effectRef>
+          <a:fontRef idx="minor">
+            <a:schemeClr val="lt1"/>
+          </a:fontRef>
+        </p:style>
+        <p:txBody>
+          <a:bodyPr rtlCol="0" anchor="ctr"/>
+          <a:lstStyle/>
+          <a:p>
+            <a:pPr algn="ctr"/>
+          </a:p>
+        </p:txBody>
+      </p:sp>
+      <p:sp>
+        <p:nvSpPr>
+          <p:cNvPr id="4" name="TextBox 3"/>
+          <p:cNvSpPr txBox="1"/>
+          <p:nvPr/>
+        </p:nvSpPr>
+        <p:spPr>
+          <a:xfrm>
+            <a:off x="914400" y="457200"/>
+            <a:ext cx="9509760" cy="320040"/>
+          </a:xfrm>
+          <a:prstGeom prst="rect">
+            <a:avLst/>
+          </a:prstGeom>
+          <a:noFill/>
+        </p:spPr>
+        <p:txBody>
+          <a:bodyPr wrap="square" anchor="t" lIns="0" rIns="0" tIns="0" bIns="0">
+            <a:spAutoFit/>
+          </a:bodyPr>
+          <a:lstStyle/>
+          <a:p>
+            <a:pPr algn="l"/>
+            <a:r>
+              <a:rPr sz="1300" b="1" i="0">
+                <a:solidFill>
+                  <a:srgbClr val="6A4C93"/>
+                </a:solidFill>
+                <a:latin typeface="Arial"/>
+              </a:rPr>
+              <a:t>WRAP UP</a:t>
+            </a:r>
+          </a:p>
+        </p:txBody>
+      </p:sp>
+      <p:sp>
+        <p:nvSpPr>
+          <p:cNvPr id="5" name="TextBox 4"/>
+          <p:cNvSpPr txBox="1"/>
+          <p:nvPr/>
+        </p:nvSpPr>
+        <p:spPr>
+          <a:xfrm>
+            <a:off x="548640" y="777240"/>
+            <a:ext cx="9966960" cy="822960"/>
+          </a:xfrm>
+          <a:prstGeom prst="rect">
+            <a:avLst/>
+          </a:prstGeom>
+          <a:noFill/>
+        </p:spPr>
+        <p:txBody>
+          <a:bodyPr wrap="square" anchor="t" lIns="0" rIns="0" tIns="0" bIns="0">
+            <a:spAutoFit/>
+          </a:bodyPr>
+          <a:lstStyle/>
+          <a:p>
+            <a:pPr algn="l"/>
+            <a:r>
+              <a:rPr sz="3000" b="1" i="0">
+                <a:solidFill>
+                  <a:srgbClr val="1D2433"/>
+                </a:solidFill>
+                <a:latin typeface="Calibri"/>
+              </a:rPr>
+              <a:t>Quick Recap</a:t>
+            </a:r>
+          </a:p>
+        </p:txBody>
+      </p:sp>
+      <p:sp>
+        <p:nvSpPr>
+          <p:cNvPr id="6" name="Rounded Rectangle 5"/>
+          <p:cNvSpPr/>
+          <p:nvPr/>
+        </p:nvSpPr>
+        <p:spPr>
+          <a:xfrm>
+            <a:off x="640080" y="1828800"/>
+            <a:ext cx="10881360" cy="4114800"/>
+          </a:xfrm>
+          <a:prstGeom prst="roundRect">
+            <a:avLst>
+              <a:gd name="adj" fmla="val 3000"/>
+            </a:avLst>
+          </a:prstGeom>
+          <a:solidFill>
+            <a:srgbClr val="FFFFFF"/>
+          </a:solidFill>
+          <a:ln>
+            <a:noFill/>
+          </a:ln>
+          <a:effectLst>
+            <a:outerShdw blurRad="88900" dist="38100" dir="5400000" rotWithShape="0" algn="bl">
+              <a:srgbClr val="000000">
+                <a:alpha val="16000"/>
+              </a:srgbClr>
+            </a:outerShdw>
+          </a:effectLst>
+        </p:spPr>
+        <p:style>
+          <a:lnRef idx="1">
+            <a:schemeClr val="accent1"/>
+          </a:lnRef>
+          <a:fillRef idx="3">
+            <a:schemeClr val="accent1"/>
+          </a:fillRef>
+          <a:effectRef idx="2">
+            <a:schemeClr val="accent1"/>
+          </a:effectRef>
+          <a:fontRef idx="minor">
+            <a:schemeClr val="lt1"/>
+          </a:fontRef>
+        </p:style>
+        <p:txBody>
+          <a:bodyPr rtlCol="0" anchor="ctr"/>
+          <a:lstStyle/>
+          <a:p>
+            <a:pPr algn="ctr"/>
+          </a:p>
+        </p:txBody>
+      </p:sp>
+      <p:sp>
+        <p:nvSpPr>
+          <p:cNvPr id="7" name="TextBox 6"/>
+          <p:cNvSpPr txBox="1"/>
+          <p:nvPr/>
+        </p:nvSpPr>
+        <p:spPr>
+          <a:xfrm>
+            <a:off x="1005840" y="2148840"/>
+            <a:ext cx="10058400" cy="3657600"/>
+          </a:xfrm>
+          <a:prstGeom prst="rect">
+            <a:avLst/>
+          </a:prstGeom>
+          <a:noFill/>
+        </p:spPr>
+        <p:txBody>
+          <a:bodyPr wrap="square" anchor="t" lIns="0" rIns="0" tIns="0" bIns="0">
+            <a:spAutoFit/>
+          </a:bodyPr>
+          <a:lstStyle/>
+          <a:p>
+            <a:pPr algn="l">
+              <a:lnSpc>
+                <a:spcPct val="105000"/>
+              </a:lnSpc>
+              <a:spcAft>
+                <a:spcPts val="1200"/>
+              </a:spcAft>
+            </a:pPr>
+            <a:r>
+              <a:rPr sz="1600" b="1" i="0">
+                <a:solidFill>
+                  <a:srgbClr val="2A9D8F"/>
+                </a:solidFill>
+                <a:latin typeface="Calibri"/>
+              </a:rPr>
+              <a:t>✓  </a:t>
+            </a:r>
+            <a:r>
+              <a:rPr sz="1600" b="1" i="0">
+                <a:solidFill>
+                  <a:srgbClr val="1D2433"/>
+                </a:solidFill>
+                <a:latin typeface="Calibri"/>
+              </a:rPr>
+              <a:t>Plotting  —  </a:t>
+            </a:r>
+            <a:r>
+              <a:rPr sz="1500" b="0" i="0">
+                <a:solidFill>
+                  <a:srgbClr val="6B7280"/>
+                </a:solidFill>
+                <a:latin typeface="Calibri"/>
+              </a:rPr>
+              <a:t>use a plotting compass to trace field lines</a:t>
+            </a:r>
+          </a:p>
+          <a:p>
+            <a:pPr algn="l">
+              <a:lnSpc>
+                <a:spcPct val="105000"/>
+              </a:lnSpc>
+              <a:spcAft>
+                <a:spcPts val="1200"/>
+              </a:spcAft>
+            </a:pPr>
+            <a:r>
+              <a:rPr sz="1600" b="1" i="0">
+                <a:solidFill>
+                  <a:srgbClr val="2A9D8F"/>
+                </a:solidFill>
+                <a:latin typeface="Calibri"/>
+              </a:rPr>
+              <a:t>✓  </a:t>
+            </a:r>
+            <a:r>
+              <a:rPr sz="1600" b="1" i="0">
+                <a:solidFill>
+                  <a:srgbClr val="1D2433"/>
+                </a:solidFill>
+                <a:latin typeface="Calibri"/>
+              </a:rPr>
+              <a:t>Bar magnet field  —  </a:t>
+            </a:r>
+            <a:r>
+              <a:rPr sz="1500" b="0" i="0">
+                <a:solidFill>
+                  <a:srgbClr val="6B7280"/>
+                </a:solidFill>
+                <a:latin typeface="Calibri"/>
+              </a:rPr>
+              <a:t>non-uniform: curved, unevenly spaced lines</a:t>
+            </a:r>
+          </a:p>
+          <a:p>
+            <a:pPr algn="l">
+              <a:lnSpc>
+                <a:spcPct val="105000"/>
+              </a:lnSpc>
+              <a:spcAft>
+                <a:spcPts val="1200"/>
+              </a:spcAft>
+            </a:pPr>
+            <a:r>
+              <a:rPr sz="1600" b="1" i="0">
+                <a:solidFill>
+                  <a:srgbClr val="2A9D8F"/>
+                </a:solidFill>
+                <a:latin typeface="Calibri"/>
+              </a:rPr>
+              <a:t>✓  </a:t>
+            </a:r>
+            <a:r>
+              <a:rPr sz="1600" b="1" i="0">
+                <a:solidFill>
+                  <a:srgbClr val="1D2433"/>
+                </a:solidFill>
+                <a:latin typeface="Calibri"/>
+              </a:rPr>
+              <a:t>Neutral point  —  </a:t>
+            </a:r>
+            <a:r>
+              <a:rPr sz="1500" b="0" i="0">
+                <a:solidFill>
+                  <a:srgbClr val="6B7280"/>
+                </a:solidFill>
+                <a:latin typeface="Calibri"/>
+              </a:rPr>
+              <a:t>magnet's field cancels Earth's; net field zero</a:t>
+            </a:r>
+          </a:p>
+          <a:p>
+            <a:pPr algn="l">
+              <a:lnSpc>
+                <a:spcPct val="105000"/>
+              </a:lnSpc>
+              <a:spcAft>
+                <a:spcPts val="1200"/>
+              </a:spcAft>
+            </a:pPr>
+            <a:r>
+              <a:rPr sz="1600" b="1" i="0">
+                <a:solidFill>
+                  <a:srgbClr val="2A9D8F"/>
+                </a:solidFill>
+                <a:latin typeface="Calibri"/>
+              </a:rPr>
+              <a:t>✓  </a:t>
+            </a:r>
+            <a:r>
+              <a:rPr sz="1600" b="1" i="0">
+                <a:solidFill>
+                  <a:srgbClr val="1D2433"/>
+                </a:solidFill>
+                <a:latin typeface="Calibri"/>
+              </a:rPr>
+              <a:t>Electromagnet  —  </a:t>
+            </a:r>
+            <a:r>
+              <a:rPr sz="1500" b="0" i="0">
+                <a:solidFill>
+                  <a:srgbClr val="6B7280"/>
+                </a:solidFill>
+                <a:latin typeface="Calibri"/>
+              </a:rPr>
+              <a:t>solenoid + soft-iron core; switchable</a:t>
+            </a:r>
+          </a:p>
+          <a:p>
+            <a:pPr algn="l">
+              <a:lnSpc>
+                <a:spcPct val="105000"/>
+              </a:lnSpc>
+              <a:spcAft>
+                <a:spcPts val="1200"/>
+              </a:spcAft>
+            </a:pPr>
+            <a:r>
+              <a:rPr sz="1600" b="1" i="0">
+                <a:solidFill>
+                  <a:srgbClr val="2A9D8F"/>
+                </a:solidFill>
+                <a:latin typeface="Calibri"/>
+              </a:rPr>
+              <a:t>✓  </a:t>
+            </a:r>
+            <a:r>
+              <a:rPr sz="1600" b="1" i="0">
+                <a:solidFill>
+                  <a:srgbClr val="1D2433"/>
+                </a:solidFill>
+                <a:latin typeface="Calibri"/>
+              </a:rPr>
+              <a:t>Vs permanent  —  </a:t>
+            </a:r>
+            <a:r>
+              <a:rPr sz="1500" b="0" i="0">
+                <a:solidFill>
+                  <a:srgbClr val="6B7280"/>
+                </a:solidFill>
+                <a:latin typeface="Calibri"/>
+              </a:rPr>
+              <a:t>switchable, adjustable, reversible, very strong</a:t>
+            </a:r>
+          </a:p>
+          <a:p>
+            <a:pPr algn="l">
+              <a:lnSpc>
+                <a:spcPct val="105000"/>
+              </a:lnSpc>
+              <a:spcAft>
+                <a:spcPts val="1200"/>
+              </a:spcAft>
+            </a:pPr>
+            <a:r>
+              <a:rPr sz="1600" b="1" i="0">
+                <a:solidFill>
+                  <a:srgbClr val="2A9D8F"/>
+                </a:solidFill>
+                <a:latin typeface="Calibri"/>
+              </a:rPr>
+              <a:t>✓  </a:t>
+            </a:r>
+            <a:r>
+              <a:rPr sz="1600" b="1" i="0">
+                <a:solidFill>
+                  <a:srgbClr val="1D2433"/>
+                </a:solidFill>
+                <a:latin typeface="Calibri"/>
+              </a:rPr>
+              <a:t>Uses  —  </a:t>
+            </a:r>
+            <a:r>
+              <a:rPr sz="1500" b="0" i="0">
+                <a:solidFill>
+                  <a:srgbClr val="6B7280"/>
+                </a:solidFill>
+                <a:latin typeface="Calibri"/>
+              </a:rPr>
+              <a:t>cranes, electric bell, relays, motors, loudspeakers</a:t>
+            </a:r>
+          </a:p>
+        </p:txBody>
+      </p:sp>
+    </p:spTree>
+  </p:cSld>
+  <p:clrMapOvr>
+    <a:masterClrMapping/>
+  </p:clrMapOvr>
+</p:sld>
+</file>
+
+<file path=ppt/slides/slide25.xml><?xml version="1.0" encoding="utf-8"?>
 <p:sld xmlns:a="http://schemas.openxmlformats.org/drawingml/2006/main" xmlns:p="http://schemas.openxmlformats.org/presentationml/2006/main" xmlns:r="http://schemas.openxmlformats.org/officeDocument/2006/relationships">
   <p:cSld>
     <p:bg>
@@ -17577,917 +18600,6 @@
                 <a:latin typeface="Calibri"/>
               </a:rPr>
               <a:t>5 questions  •  think before the answer reveals on the next slide</a:t>
-            </a:r>
-          </a:p>
-        </p:txBody>
-      </p:sp>
-    </p:spTree>
-  </p:cSld>
-  <p:clrMapOvr>
-    <a:masterClrMapping/>
-  </p:clrMapOvr>
-</p:sld>
-</file>
-
-<file path=ppt/slides/slide25.xml><?xml version="1.0" encoding="utf-8"?>
-<p:sld xmlns:a="http://schemas.openxmlformats.org/drawingml/2006/main" xmlns:p="http://schemas.openxmlformats.org/presentationml/2006/main" xmlns:r="http://schemas.openxmlformats.org/officeDocument/2006/relationships">
-  <p:cSld>
-    <p:bg>
-      <p:bgPr>
-        <a:solidFill>
-          <a:srgbClr val="F4F6F8"/>
-        </a:solidFill>
-        <a:effectLst/>
-      </p:bgPr>
-    </p:bg>
-    <p:spTree>
-      <p:nvGrpSpPr>
-        <p:cNvPr id="1" name=""/>
-        <p:cNvGrpSpPr/>
-        <p:nvPr/>
-      </p:nvGrpSpPr>
-      <p:grpSpPr/>
-      <p:sp>
-        <p:nvSpPr>
-          <p:cNvPr id="2" name="Oval 1"/>
-          <p:cNvSpPr/>
-          <p:nvPr/>
-        </p:nvSpPr>
-        <p:spPr>
-          <a:xfrm>
-            <a:off x="10927080" y="365760"/>
-            <a:ext cx="868680" cy="868680"/>
-          </a:xfrm>
-          <a:prstGeom prst="ellipse">
-            <a:avLst/>
-          </a:prstGeom>
-          <a:noFill/>
-          <a:ln w="15875">
-            <a:solidFill>
-              <a:srgbClr val="DDE2E8"/>
-            </a:solidFill>
-          </a:ln>
-          <a:effectLst/>
-        </p:spPr>
-        <p:style>
-          <a:lnRef idx="1">
-            <a:schemeClr val="accent1"/>
-          </a:lnRef>
-          <a:fillRef idx="3">
-            <a:schemeClr val="accent1"/>
-          </a:fillRef>
-          <a:effectRef idx="2">
-            <a:schemeClr val="accent1"/>
-          </a:effectRef>
-          <a:fontRef idx="minor">
-            <a:schemeClr val="lt1"/>
-          </a:fontRef>
-        </p:style>
-        <p:txBody>
-          <a:bodyPr rtlCol="0" anchor="ctr"/>
-          <a:lstStyle/>
-          <a:p>
-            <a:pPr algn="ctr"/>
-          </a:p>
-        </p:txBody>
-      </p:sp>
-      <p:sp>
-        <p:nvSpPr>
-          <p:cNvPr id="3" name="Rectangle 2"/>
-          <p:cNvSpPr/>
-          <p:nvPr/>
-        </p:nvSpPr>
-        <p:spPr>
-          <a:xfrm>
-            <a:off x="548640" y="502920"/>
-            <a:ext cx="256032" cy="256032"/>
-          </a:xfrm>
-          <a:prstGeom prst="rect">
-            <a:avLst/>
-          </a:prstGeom>
-          <a:solidFill>
-            <a:srgbClr val="6A4C93"/>
-          </a:solidFill>
-          <a:ln>
-            <a:noFill/>
-          </a:ln>
-          <a:effectLst/>
-        </p:spPr>
-        <p:style>
-          <a:lnRef idx="1">
-            <a:schemeClr val="accent1"/>
-          </a:lnRef>
-          <a:fillRef idx="3">
-            <a:schemeClr val="accent1"/>
-          </a:fillRef>
-          <a:effectRef idx="2">
-            <a:schemeClr val="accent1"/>
-          </a:effectRef>
-          <a:fontRef idx="minor">
-            <a:schemeClr val="lt1"/>
-          </a:fontRef>
-        </p:style>
-        <p:txBody>
-          <a:bodyPr rtlCol="0" anchor="ctr"/>
-          <a:lstStyle/>
-          <a:p>
-            <a:pPr algn="ctr"/>
-          </a:p>
-        </p:txBody>
-      </p:sp>
-      <p:sp>
-        <p:nvSpPr>
-          <p:cNvPr id="4" name="TextBox 3"/>
-          <p:cNvSpPr txBox="1"/>
-          <p:nvPr/>
-        </p:nvSpPr>
-        <p:spPr>
-          <a:xfrm>
-            <a:off x="914400" y="457200"/>
-            <a:ext cx="9509760" cy="320040"/>
-          </a:xfrm>
-          <a:prstGeom prst="rect">
-            <a:avLst/>
-          </a:prstGeom>
-          <a:noFill/>
-        </p:spPr>
-        <p:txBody>
-          <a:bodyPr wrap="square" anchor="t" lIns="0" rIns="0" tIns="0" bIns="0">
-            <a:spAutoFit/>
-          </a:bodyPr>
-          <a:lstStyle/>
-          <a:p>
-            <a:pPr algn="l"/>
-            <a:r>
-              <a:rPr sz="1300" b="1" i="0">
-                <a:solidFill>
-                  <a:srgbClr val="6A4C93"/>
-                </a:solidFill>
-                <a:latin typeface="Arial"/>
-              </a:rPr>
-              <a:t>QUIZ QUESTION</a:t>
-            </a:r>
-          </a:p>
-        </p:txBody>
-      </p:sp>
-      <p:sp>
-        <p:nvSpPr>
-          <p:cNvPr id="5" name="TextBox 4"/>
-          <p:cNvSpPr txBox="1"/>
-          <p:nvPr/>
-        </p:nvSpPr>
-        <p:spPr>
-          <a:xfrm>
-            <a:off x="548640" y="777240"/>
-            <a:ext cx="9966960" cy="822960"/>
-          </a:xfrm>
-          <a:prstGeom prst="rect">
-            <a:avLst/>
-          </a:prstGeom>
-          <a:noFill/>
-        </p:spPr>
-        <p:txBody>
-          <a:bodyPr wrap="square" anchor="t" lIns="0" rIns="0" tIns="0" bIns="0">
-            <a:spAutoFit/>
-          </a:bodyPr>
-          <a:lstStyle/>
-          <a:p>
-            <a:pPr algn="l"/>
-            <a:r>
-              <a:rPr sz="3000" b="1" i="0">
-                <a:solidFill>
-                  <a:srgbClr val="1D2433"/>
-                </a:solidFill>
-                <a:latin typeface="Calibri"/>
-              </a:rPr>
-              <a:t>Q1 — Why Soft Iron?</a:t>
-            </a:r>
-          </a:p>
-        </p:txBody>
-      </p:sp>
-      <p:sp>
-        <p:nvSpPr>
-          <p:cNvPr id="6" name="Rounded Rectangle 5"/>
-          <p:cNvSpPr/>
-          <p:nvPr/>
-        </p:nvSpPr>
-        <p:spPr>
-          <a:xfrm>
-            <a:off x="640080" y="1783080"/>
-            <a:ext cx="10881360" cy="1325880"/>
-          </a:xfrm>
-          <a:prstGeom prst="roundRect">
-            <a:avLst>
-              <a:gd name="adj" fmla="val 4000"/>
-            </a:avLst>
-          </a:prstGeom>
-          <a:solidFill>
-            <a:srgbClr val="FFFFFF"/>
-          </a:solidFill>
-          <a:ln>
-            <a:noFill/>
-          </a:ln>
-          <a:effectLst>
-            <a:outerShdw blurRad="88900" dist="38100" dir="5400000" rotWithShape="0" algn="bl">
-              <a:srgbClr val="000000">
-                <a:alpha val="16000"/>
-              </a:srgbClr>
-            </a:outerShdw>
-          </a:effectLst>
-        </p:spPr>
-        <p:style>
-          <a:lnRef idx="1">
-            <a:schemeClr val="accent1"/>
-          </a:lnRef>
-          <a:fillRef idx="3">
-            <a:schemeClr val="accent1"/>
-          </a:fillRef>
-          <a:effectRef idx="2">
-            <a:schemeClr val="accent1"/>
-          </a:effectRef>
-          <a:fontRef idx="minor">
-            <a:schemeClr val="lt1"/>
-          </a:fontRef>
-        </p:style>
-        <p:txBody>
-          <a:bodyPr rtlCol="0" anchor="ctr"/>
-          <a:lstStyle/>
-          <a:p>
-            <a:pPr algn="ctr"/>
-          </a:p>
-        </p:txBody>
-      </p:sp>
-      <p:sp>
-        <p:nvSpPr>
-          <p:cNvPr id="7" name="TextBox 6"/>
-          <p:cNvSpPr txBox="1"/>
-          <p:nvPr/>
-        </p:nvSpPr>
-        <p:spPr>
-          <a:xfrm>
-            <a:off x="1005840" y="1783080"/>
-            <a:ext cx="10149840" cy="1325880"/>
-          </a:xfrm>
-          <a:prstGeom prst="rect">
-            <a:avLst/>
-          </a:prstGeom>
-          <a:noFill/>
-        </p:spPr>
-        <p:txBody>
-          <a:bodyPr wrap="square" anchor="ctr" lIns="0" rIns="0" tIns="0" bIns="0">
-            <a:spAutoFit/>
-          </a:bodyPr>
-          <a:lstStyle/>
-          <a:p>
-            <a:pPr algn="l"/>
-            <a:r>
-              <a:rPr sz="1800" b="1" i="0">
-                <a:solidFill>
-                  <a:srgbClr val="1D2433"/>
-                </a:solidFill>
-                <a:latin typeface="Calibri"/>
-              </a:rPr>
-              <a:t>An electromagnet's core is made of soft iron rather than steel because soft iron:</a:t>
-            </a:r>
-          </a:p>
-        </p:txBody>
-      </p:sp>
-      <p:sp>
-        <p:nvSpPr>
-          <p:cNvPr id="8" name="Rounded Rectangle 7"/>
-          <p:cNvSpPr/>
-          <p:nvPr/>
-        </p:nvSpPr>
-        <p:spPr>
-          <a:xfrm>
-            <a:off x="640080" y="3337560"/>
-            <a:ext cx="5349240" cy="868680"/>
-          </a:xfrm>
-          <a:prstGeom prst="roundRect">
-            <a:avLst>
-              <a:gd name="adj" fmla="val 12000"/>
-            </a:avLst>
-          </a:prstGeom>
-          <a:solidFill>
-            <a:srgbClr val="EAF1F4"/>
-          </a:solidFill>
-          <a:ln>
-            <a:noFill/>
-          </a:ln>
-          <a:effectLst/>
-        </p:spPr>
-        <p:style>
-          <a:lnRef idx="1">
-            <a:schemeClr val="accent1"/>
-          </a:lnRef>
-          <a:fillRef idx="3">
-            <a:schemeClr val="accent1"/>
-          </a:fillRef>
-          <a:effectRef idx="2">
-            <a:schemeClr val="accent1"/>
-          </a:effectRef>
-          <a:fontRef idx="minor">
-            <a:schemeClr val="lt1"/>
-          </a:fontRef>
-        </p:style>
-        <p:txBody>
-          <a:bodyPr rtlCol="0" anchor="ctr"/>
-          <a:lstStyle/>
-          <a:p>
-            <a:pPr algn="ctr"/>
-          </a:p>
-        </p:txBody>
-      </p:sp>
-      <p:sp>
-        <p:nvSpPr>
-          <p:cNvPr id="9" name="Oval 8"/>
-          <p:cNvSpPr/>
-          <p:nvPr/>
-        </p:nvSpPr>
-        <p:spPr>
-          <a:xfrm>
-            <a:off x="914400" y="3566160"/>
-            <a:ext cx="411480" cy="411480"/>
-          </a:xfrm>
-          <a:prstGeom prst="ellipse">
-            <a:avLst/>
-          </a:prstGeom>
-          <a:solidFill>
-            <a:srgbClr val="6A4C93"/>
-          </a:solidFill>
-          <a:ln>
-            <a:noFill/>
-          </a:ln>
-          <a:effectLst/>
-        </p:spPr>
-        <p:style>
-          <a:lnRef idx="1">
-            <a:schemeClr val="accent1"/>
-          </a:lnRef>
-          <a:fillRef idx="3">
-            <a:schemeClr val="accent1"/>
-          </a:fillRef>
-          <a:effectRef idx="2">
-            <a:schemeClr val="accent1"/>
-          </a:effectRef>
-          <a:fontRef idx="minor">
-            <a:schemeClr val="lt1"/>
-          </a:fontRef>
-        </p:style>
-        <p:txBody>
-          <a:bodyPr rtlCol="0" anchor="ctr"/>
-          <a:lstStyle/>
-          <a:p>
-            <a:pPr algn="ctr"/>
-          </a:p>
-        </p:txBody>
-      </p:sp>
-      <p:sp>
-        <p:nvSpPr>
-          <p:cNvPr id="10" name="TextBox 9"/>
-          <p:cNvSpPr txBox="1"/>
-          <p:nvPr/>
-        </p:nvSpPr>
-        <p:spPr>
-          <a:xfrm>
-            <a:off x="914400" y="3566160"/>
-            <a:ext cx="411480" cy="411480"/>
-          </a:xfrm>
-          <a:prstGeom prst="rect">
-            <a:avLst/>
-          </a:prstGeom>
-          <a:noFill/>
-        </p:spPr>
-        <p:txBody>
-          <a:bodyPr wrap="square" anchor="ctr" lIns="0" rIns="0" tIns="0" bIns="0">
-            <a:spAutoFit/>
-          </a:bodyPr>
-          <a:lstStyle/>
-          <a:p>
-            <a:pPr algn="ctr"/>
-            <a:r>
-              <a:rPr sz="1400" b="1" i="0">
-                <a:solidFill>
-                  <a:srgbClr val="FFFFFF"/>
-                </a:solidFill>
-                <a:latin typeface="Calibri"/>
-              </a:rPr>
-              <a:t>A</a:t>
-            </a:r>
-          </a:p>
-        </p:txBody>
-      </p:sp>
-      <p:sp>
-        <p:nvSpPr>
-          <p:cNvPr id="11" name="TextBox 10"/>
-          <p:cNvSpPr txBox="1"/>
-          <p:nvPr/>
-        </p:nvSpPr>
-        <p:spPr>
-          <a:xfrm>
-            <a:off x="1508760" y="3337560"/>
-            <a:ext cx="4297680" cy="868680"/>
-          </a:xfrm>
-          <a:prstGeom prst="rect">
-            <a:avLst/>
-          </a:prstGeom>
-          <a:noFill/>
-        </p:spPr>
-        <p:txBody>
-          <a:bodyPr wrap="square" anchor="ctr" lIns="0" rIns="0" tIns="0" bIns="0">
-            <a:spAutoFit/>
-          </a:bodyPr>
-          <a:lstStyle/>
-          <a:p>
-            <a:pPr algn="l"/>
-            <a:r>
-              <a:rPr sz="1450" b="0" i="0">
-                <a:solidFill>
-                  <a:srgbClr val="1D2433"/>
-                </a:solidFill>
-                <a:latin typeface="Calibri"/>
-              </a:rPr>
-              <a:t>Stays magnetic permanently</a:t>
-            </a:r>
-          </a:p>
-        </p:txBody>
-      </p:sp>
-      <p:sp>
-        <p:nvSpPr>
-          <p:cNvPr id="12" name="Rounded Rectangle 11"/>
-          <p:cNvSpPr/>
-          <p:nvPr/>
-        </p:nvSpPr>
-        <p:spPr>
-          <a:xfrm>
-            <a:off x="6172200" y="3337560"/>
-            <a:ext cx="5349240" cy="868680"/>
-          </a:xfrm>
-          <a:prstGeom prst="roundRect">
-            <a:avLst>
-              <a:gd name="adj" fmla="val 12000"/>
-            </a:avLst>
-          </a:prstGeom>
-          <a:solidFill>
-            <a:srgbClr val="EAF1F4"/>
-          </a:solidFill>
-          <a:ln>
-            <a:noFill/>
-          </a:ln>
-          <a:effectLst/>
-        </p:spPr>
-        <p:style>
-          <a:lnRef idx="1">
-            <a:schemeClr val="accent1"/>
-          </a:lnRef>
-          <a:fillRef idx="3">
-            <a:schemeClr val="accent1"/>
-          </a:fillRef>
-          <a:effectRef idx="2">
-            <a:schemeClr val="accent1"/>
-          </a:effectRef>
-          <a:fontRef idx="minor">
-            <a:schemeClr val="lt1"/>
-          </a:fontRef>
-        </p:style>
-        <p:txBody>
-          <a:bodyPr rtlCol="0" anchor="ctr"/>
-          <a:lstStyle/>
-          <a:p>
-            <a:pPr algn="ctr"/>
-          </a:p>
-        </p:txBody>
-      </p:sp>
-      <p:sp>
-        <p:nvSpPr>
-          <p:cNvPr id="13" name="Oval 12"/>
-          <p:cNvSpPr/>
-          <p:nvPr/>
-        </p:nvSpPr>
-        <p:spPr>
-          <a:xfrm>
-            <a:off x="6446520" y="3566160"/>
-            <a:ext cx="411480" cy="411480"/>
-          </a:xfrm>
-          <a:prstGeom prst="ellipse">
-            <a:avLst/>
-          </a:prstGeom>
-          <a:solidFill>
-            <a:srgbClr val="6A4C93"/>
-          </a:solidFill>
-          <a:ln>
-            <a:noFill/>
-          </a:ln>
-          <a:effectLst/>
-        </p:spPr>
-        <p:style>
-          <a:lnRef idx="1">
-            <a:schemeClr val="accent1"/>
-          </a:lnRef>
-          <a:fillRef idx="3">
-            <a:schemeClr val="accent1"/>
-          </a:fillRef>
-          <a:effectRef idx="2">
-            <a:schemeClr val="accent1"/>
-          </a:effectRef>
-          <a:fontRef idx="minor">
-            <a:schemeClr val="lt1"/>
-          </a:fontRef>
-        </p:style>
-        <p:txBody>
-          <a:bodyPr rtlCol="0" anchor="ctr"/>
-          <a:lstStyle/>
-          <a:p>
-            <a:pPr algn="ctr"/>
-          </a:p>
-        </p:txBody>
-      </p:sp>
-      <p:sp>
-        <p:nvSpPr>
-          <p:cNvPr id="14" name="TextBox 13"/>
-          <p:cNvSpPr txBox="1"/>
-          <p:nvPr/>
-        </p:nvSpPr>
-        <p:spPr>
-          <a:xfrm>
-            <a:off x="6446520" y="3566160"/>
-            <a:ext cx="411480" cy="411480"/>
-          </a:xfrm>
-          <a:prstGeom prst="rect">
-            <a:avLst/>
-          </a:prstGeom>
-          <a:noFill/>
-        </p:spPr>
-        <p:txBody>
-          <a:bodyPr wrap="square" anchor="ctr" lIns="0" rIns="0" tIns="0" bIns="0">
-            <a:spAutoFit/>
-          </a:bodyPr>
-          <a:lstStyle/>
-          <a:p>
-            <a:pPr algn="ctr"/>
-            <a:r>
-              <a:rPr sz="1400" b="1" i="0">
-                <a:solidFill>
-                  <a:srgbClr val="FFFFFF"/>
-                </a:solidFill>
-                <a:latin typeface="Calibri"/>
-              </a:rPr>
-              <a:t>B</a:t>
-            </a:r>
-          </a:p>
-        </p:txBody>
-      </p:sp>
-      <p:sp>
-        <p:nvSpPr>
-          <p:cNvPr id="15" name="TextBox 14"/>
-          <p:cNvSpPr txBox="1"/>
-          <p:nvPr/>
-        </p:nvSpPr>
-        <p:spPr>
-          <a:xfrm>
-            <a:off x="7040880" y="3337560"/>
-            <a:ext cx="4297680" cy="868680"/>
-          </a:xfrm>
-          <a:prstGeom prst="rect">
-            <a:avLst/>
-          </a:prstGeom>
-          <a:noFill/>
-        </p:spPr>
-        <p:txBody>
-          <a:bodyPr wrap="square" anchor="ctr" lIns="0" rIns="0" tIns="0" bIns="0">
-            <a:spAutoFit/>
-          </a:bodyPr>
-          <a:lstStyle/>
-          <a:p>
-            <a:pPr algn="l"/>
-            <a:r>
-              <a:rPr sz="1450" b="0" i="0">
-                <a:solidFill>
-                  <a:srgbClr val="1D2433"/>
-                </a:solidFill>
-                <a:latin typeface="Calibri"/>
-              </a:rPr>
-              <a:t>Loses its magnetism as soon as the current stops</a:t>
-            </a:r>
-          </a:p>
-        </p:txBody>
-      </p:sp>
-      <p:sp>
-        <p:nvSpPr>
-          <p:cNvPr id="16" name="Rounded Rectangle 15"/>
-          <p:cNvSpPr/>
-          <p:nvPr/>
-        </p:nvSpPr>
-        <p:spPr>
-          <a:xfrm>
-            <a:off x="640080" y="4370831"/>
-            <a:ext cx="5349240" cy="868680"/>
-          </a:xfrm>
-          <a:prstGeom prst="roundRect">
-            <a:avLst>
-              <a:gd name="adj" fmla="val 12000"/>
-            </a:avLst>
-          </a:prstGeom>
-          <a:solidFill>
-            <a:srgbClr val="EAF1F4"/>
-          </a:solidFill>
-          <a:ln>
-            <a:noFill/>
-          </a:ln>
-          <a:effectLst/>
-        </p:spPr>
-        <p:style>
-          <a:lnRef idx="1">
-            <a:schemeClr val="accent1"/>
-          </a:lnRef>
-          <a:fillRef idx="3">
-            <a:schemeClr val="accent1"/>
-          </a:fillRef>
-          <a:effectRef idx="2">
-            <a:schemeClr val="accent1"/>
-          </a:effectRef>
-          <a:fontRef idx="minor">
-            <a:schemeClr val="lt1"/>
-          </a:fontRef>
-        </p:style>
-        <p:txBody>
-          <a:bodyPr rtlCol="0" anchor="ctr"/>
-          <a:lstStyle/>
-          <a:p>
-            <a:pPr algn="ctr"/>
-          </a:p>
-        </p:txBody>
-      </p:sp>
-      <p:sp>
-        <p:nvSpPr>
-          <p:cNvPr id="17" name="Oval 16"/>
-          <p:cNvSpPr/>
-          <p:nvPr/>
-        </p:nvSpPr>
-        <p:spPr>
-          <a:xfrm>
-            <a:off x="914400" y="4599431"/>
-            <a:ext cx="411480" cy="411480"/>
-          </a:xfrm>
-          <a:prstGeom prst="ellipse">
-            <a:avLst/>
-          </a:prstGeom>
-          <a:solidFill>
-            <a:srgbClr val="6A4C93"/>
-          </a:solidFill>
-          <a:ln>
-            <a:noFill/>
-          </a:ln>
-          <a:effectLst/>
-        </p:spPr>
-        <p:style>
-          <a:lnRef idx="1">
-            <a:schemeClr val="accent1"/>
-          </a:lnRef>
-          <a:fillRef idx="3">
-            <a:schemeClr val="accent1"/>
-          </a:fillRef>
-          <a:effectRef idx="2">
-            <a:schemeClr val="accent1"/>
-          </a:effectRef>
-          <a:fontRef idx="minor">
-            <a:schemeClr val="lt1"/>
-          </a:fontRef>
-        </p:style>
-        <p:txBody>
-          <a:bodyPr rtlCol="0" anchor="ctr"/>
-          <a:lstStyle/>
-          <a:p>
-            <a:pPr algn="ctr"/>
-          </a:p>
-        </p:txBody>
-      </p:sp>
-      <p:sp>
-        <p:nvSpPr>
-          <p:cNvPr id="18" name="TextBox 17"/>
-          <p:cNvSpPr txBox="1"/>
-          <p:nvPr/>
-        </p:nvSpPr>
-        <p:spPr>
-          <a:xfrm>
-            <a:off x="914400" y="4599431"/>
-            <a:ext cx="411480" cy="411480"/>
-          </a:xfrm>
-          <a:prstGeom prst="rect">
-            <a:avLst/>
-          </a:prstGeom>
-          <a:noFill/>
-        </p:spPr>
-        <p:txBody>
-          <a:bodyPr wrap="square" anchor="ctr" lIns="0" rIns="0" tIns="0" bIns="0">
-            <a:spAutoFit/>
-          </a:bodyPr>
-          <a:lstStyle/>
-          <a:p>
-            <a:pPr algn="ctr"/>
-            <a:r>
-              <a:rPr sz="1400" b="1" i="0">
-                <a:solidFill>
-                  <a:srgbClr val="FFFFFF"/>
-                </a:solidFill>
-                <a:latin typeface="Calibri"/>
-              </a:rPr>
-              <a:t>C</a:t>
-            </a:r>
-          </a:p>
-        </p:txBody>
-      </p:sp>
-      <p:sp>
-        <p:nvSpPr>
-          <p:cNvPr id="19" name="TextBox 18"/>
-          <p:cNvSpPr txBox="1"/>
-          <p:nvPr/>
-        </p:nvSpPr>
-        <p:spPr>
-          <a:xfrm>
-            <a:off x="1508760" y="4370831"/>
-            <a:ext cx="4297680" cy="868680"/>
-          </a:xfrm>
-          <a:prstGeom prst="rect">
-            <a:avLst/>
-          </a:prstGeom>
-          <a:noFill/>
-        </p:spPr>
-        <p:txBody>
-          <a:bodyPr wrap="square" anchor="ctr" lIns="0" rIns="0" tIns="0" bIns="0">
-            <a:spAutoFit/>
-          </a:bodyPr>
-          <a:lstStyle/>
-          <a:p>
-            <a:pPr algn="l"/>
-            <a:r>
-              <a:rPr sz="1450" b="0" i="0">
-                <a:solidFill>
-                  <a:srgbClr val="1D2433"/>
-                </a:solidFill>
-                <a:latin typeface="Calibri"/>
-              </a:rPr>
-              <a:t>Conducts electricity better</a:t>
-            </a:r>
-          </a:p>
-        </p:txBody>
-      </p:sp>
-      <p:sp>
-        <p:nvSpPr>
-          <p:cNvPr id="20" name="Rounded Rectangle 19"/>
-          <p:cNvSpPr/>
-          <p:nvPr/>
-        </p:nvSpPr>
-        <p:spPr>
-          <a:xfrm>
-            <a:off x="6172200" y="4370831"/>
-            <a:ext cx="5349240" cy="868680"/>
-          </a:xfrm>
-          <a:prstGeom prst="roundRect">
-            <a:avLst>
-              <a:gd name="adj" fmla="val 12000"/>
-            </a:avLst>
-          </a:prstGeom>
-          <a:solidFill>
-            <a:srgbClr val="EAF1F4"/>
-          </a:solidFill>
-          <a:ln>
-            <a:noFill/>
-          </a:ln>
-          <a:effectLst/>
-        </p:spPr>
-        <p:style>
-          <a:lnRef idx="1">
-            <a:schemeClr val="accent1"/>
-          </a:lnRef>
-          <a:fillRef idx="3">
-            <a:schemeClr val="accent1"/>
-          </a:fillRef>
-          <a:effectRef idx="2">
-            <a:schemeClr val="accent1"/>
-          </a:effectRef>
-          <a:fontRef idx="minor">
-            <a:schemeClr val="lt1"/>
-          </a:fontRef>
-        </p:style>
-        <p:txBody>
-          <a:bodyPr rtlCol="0" anchor="ctr"/>
-          <a:lstStyle/>
-          <a:p>
-            <a:pPr algn="ctr"/>
-          </a:p>
-        </p:txBody>
-      </p:sp>
-      <p:sp>
-        <p:nvSpPr>
-          <p:cNvPr id="21" name="Oval 20"/>
-          <p:cNvSpPr/>
-          <p:nvPr/>
-        </p:nvSpPr>
-        <p:spPr>
-          <a:xfrm>
-            <a:off x="6446520" y="4599431"/>
-            <a:ext cx="411480" cy="411480"/>
-          </a:xfrm>
-          <a:prstGeom prst="ellipse">
-            <a:avLst/>
-          </a:prstGeom>
-          <a:solidFill>
-            <a:srgbClr val="6A4C93"/>
-          </a:solidFill>
-          <a:ln>
-            <a:noFill/>
-          </a:ln>
-          <a:effectLst/>
-        </p:spPr>
-        <p:style>
-          <a:lnRef idx="1">
-            <a:schemeClr val="accent1"/>
-          </a:lnRef>
-          <a:fillRef idx="3">
-            <a:schemeClr val="accent1"/>
-          </a:fillRef>
-          <a:effectRef idx="2">
-            <a:schemeClr val="accent1"/>
-          </a:effectRef>
-          <a:fontRef idx="minor">
-            <a:schemeClr val="lt1"/>
-          </a:fontRef>
-        </p:style>
-        <p:txBody>
-          <a:bodyPr rtlCol="0" anchor="ctr"/>
-          <a:lstStyle/>
-          <a:p>
-            <a:pPr algn="ctr"/>
-          </a:p>
-        </p:txBody>
-      </p:sp>
-      <p:sp>
-        <p:nvSpPr>
-          <p:cNvPr id="22" name="TextBox 21"/>
-          <p:cNvSpPr txBox="1"/>
-          <p:nvPr/>
-        </p:nvSpPr>
-        <p:spPr>
-          <a:xfrm>
-            <a:off x="6446520" y="4599431"/>
-            <a:ext cx="411480" cy="411480"/>
-          </a:xfrm>
-          <a:prstGeom prst="rect">
-            <a:avLst/>
-          </a:prstGeom>
-          <a:noFill/>
-        </p:spPr>
-        <p:txBody>
-          <a:bodyPr wrap="square" anchor="ctr" lIns="0" rIns="0" tIns="0" bIns="0">
-            <a:spAutoFit/>
-          </a:bodyPr>
-          <a:lstStyle/>
-          <a:p>
-            <a:pPr algn="ctr"/>
-            <a:r>
-              <a:rPr sz="1400" b="1" i="0">
-                <a:solidFill>
-                  <a:srgbClr val="FFFFFF"/>
-                </a:solidFill>
-                <a:latin typeface="Calibri"/>
-              </a:rPr>
-              <a:t>D</a:t>
-            </a:r>
-          </a:p>
-        </p:txBody>
-      </p:sp>
-      <p:sp>
-        <p:nvSpPr>
-          <p:cNvPr id="23" name="TextBox 22"/>
-          <p:cNvSpPr txBox="1"/>
-          <p:nvPr/>
-        </p:nvSpPr>
-        <p:spPr>
-          <a:xfrm>
-            <a:off x="7040880" y="4370831"/>
-            <a:ext cx="4297680" cy="868680"/>
-          </a:xfrm>
-          <a:prstGeom prst="rect">
-            <a:avLst/>
-          </a:prstGeom>
-          <a:noFill/>
-        </p:spPr>
-        <p:txBody>
-          <a:bodyPr wrap="square" anchor="ctr" lIns="0" rIns="0" tIns="0" bIns="0">
-            <a:spAutoFit/>
-          </a:bodyPr>
-          <a:lstStyle/>
-          <a:p>
-            <a:pPr algn="l"/>
-            <a:r>
-              <a:rPr sz="1450" b="0" i="0">
-                <a:solidFill>
-                  <a:srgbClr val="1D2433"/>
-                </a:solidFill>
-                <a:latin typeface="Calibri"/>
-              </a:rPr>
-              <a:t>Is lighter</a:t>
             </a:r>
           </a:p>
         </p:txBody>
@@ -18577,7 +18689,7 @@
             <a:avLst/>
           </a:prstGeom>
           <a:solidFill>
-            <a:srgbClr val="2A9D8F"/>
+            <a:srgbClr val="6A4C93"/>
           </a:solidFill>
           <a:ln>
             <a:noFill/>
@@ -18632,11 +18744,11 @@
             <a:r>
               <a:rPr sz="1300" b="1" i="0">
                 <a:solidFill>
-                  <a:srgbClr val="2A9D8F"/>
+                  <a:srgbClr val="6A4C93"/>
                 </a:solidFill>
                 <a:latin typeface="Arial"/>
               </a:rPr>
-              <a:t>ANSWER REVEALED</a:t>
+              <a:t>QUIZ QUESTION</a:t>
             </a:r>
           </a:p>
         </p:txBody>
@@ -18824,7 +18936,7 @@
             <a:avLst/>
           </a:prstGeom>
           <a:solidFill>
-            <a:srgbClr val="B7C2CC"/>
+            <a:srgbClr val="6A4C93"/>
           </a:solidFill>
           <a:ln>
             <a:noFill/>
@@ -18914,7 +19026,7 @@
             <a:r>
               <a:rPr sz="1450" b="0" i="0">
                 <a:solidFill>
-                  <a:srgbClr val="6B7280"/>
+                  <a:srgbClr val="1D2433"/>
                 </a:solidFill>
                 <a:latin typeface="Calibri"/>
               </a:rPr>
@@ -18932,168 +19044,6 @@
         <p:spPr>
           <a:xfrm>
             <a:off x="6172200" y="3337560"/>
-            <a:ext cx="5349240" cy="868680"/>
-          </a:xfrm>
-          <a:prstGeom prst="roundRect">
-            <a:avLst>
-              <a:gd name="adj" fmla="val 12000"/>
-            </a:avLst>
-          </a:prstGeom>
-          <a:solidFill>
-            <a:srgbClr val="E9F5F0"/>
-          </a:solidFill>
-          <a:ln w="25400">
-            <a:solidFill>
-              <a:srgbClr val="2A9D8F"/>
-            </a:solidFill>
-          </a:ln>
-          <a:effectLst/>
-        </p:spPr>
-        <p:style>
-          <a:lnRef idx="1">
-            <a:schemeClr val="accent1"/>
-          </a:lnRef>
-          <a:fillRef idx="3">
-            <a:schemeClr val="accent1"/>
-          </a:fillRef>
-          <a:effectRef idx="2">
-            <a:schemeClr val="accent1"/>
-          </a:effectRef>
-          <a:fontRef idx="minor">
-            <a:schemeClr val="lt1"/>
-          </a:fontRef>
-        </p:style>
-        <p:txBody>
-          <a:bodyPr rtlCol="0" anchor="ctr"/>
-          <a:lstStyle/>
-          <a:p>
-            <a:pPr algn="ctr"/>
-          </a:p>
-        </p:txBody>
-      </p:sp>
-      <p:sp>
-        <p:nvSpPr>
-          <p:cNvPr id="13" name="Oval 12"/>
-          <p:cNvSpPr/>
-          <p:nvPr/>
-        </p:nvSpPr>
-        <p:spPr>
-          <a:xfrm>
-            <a:off x="6446520" y="3566160"/>
-            <a:ext cx="411480" cy="411480"/>
-          </a:xfrm>
-          <a:prstGeom prst="ellipse">
-            <a:avLst/>
-          </a:prstGeom>
-          <a:solidFill>
-            <a:srgbClr val="2A9D8F"/>
-          </a:solidFill>
-          <a:ln>
-            <a:noFill/>
-          </a:ln>
-          <a:effectLst/>
-        </p:spPr>
-        <p:style>
-          <a:lnRef idx="1">
-            <a:schemeClr val="accent1"/>
-          </a:lnRef>
-          <a:fillRef idx="3">
-            <a:schemeClr val="accent1"/>
-          </a:fillRef>
-          <a:effectRef idx="2">
-            <a:schemeClr val="accent1"/>
-          </a:effectRef>
-          <a:fontRef idx="minor">
-            <a:schemeClr val="lt1"/>
-          </a:fontRef>
-        </p:style>
-        <p:txBody>
-          <a:bodyPr rtlCol="0" anchor="ctr"/>
-          <a:lstStyle/>
-          <a:p>
-            <a:pPr algn="ctr"/>
-          </a:p>
-        </p:txBody>
-      </p:sp>
-      <p:sp>
-        <p:nvSpPr>
-          <p:cNvPr id="14" name="TextBox 13"/>
-          <p:cNvSpPr txBox="1"/>
-          <p:nvPr/>
-        </p:nvSpPr>
-        <p:spPr>
-          <a:xfrm>
-            <a:off x="6446520" y="3566160"/>
-            <a:ext cx="411480" cy="411480"/>
-          </a:xfrm>
-          <a:prstGeom prst="rect">
-            <a:avLst/>
-          </a:prstGeom>
-          <a:noFill/>
-        </p:spPr>
-        <p:txBody>
-          <a:bodyPr wrap="square" anchor="ctr" lIns="0" rIns="0" tIns="0" bIns="0">
-            <a:spAutoFit/>
-          </a:bodyPr>
-          <a:lstStyle/>
-          <a:p>
-            <a:pPr algn="ctr"/>
-            <a:r>
-              <a:rPr sz="1400" b="1" i="0">
-                <a:solidFill>
-                  <a:srgbClr val="FFFFFF"/>
-                </a:solidFill>
-                <a:latin typeface="Calibri"/>
-              </a:rPr>
-              <a:t>✓</a:t>
-            </a:r>
-          </a:p>
-        </p:txBody>
-      </p:sp>
-      <p:sp>
-        <p:nvSpPr>
-          <p:cNvPr id="15" name="TextBox 14"/>
-          <p:cNvSpPr txBox="1"/>
-          <p:nvPr/>
-        </p:nvSpPr>
-        <p:spPr>
-          <a:xfrm>
-            <a:off x="7040880" y="3337560"/>
-            <a:ext cx="4297680" cy="868680"/>
-          </a:xfrm>
-          <a:prstGeom prst="rect">
-            <a:avLst/>
-          </a:prstGeom>
-          <a:noFill/>
-        </p:spPr>
-        <p:txBody>
-          <a:bodyPr wrap="square" anchor="ctr" lIns="0" rIns="0" tIns="0" bIns="0">
-            <a:spAutoFit/>
-          </a:bodyPr>
-          <a:lstStyle/>
-          <a:p>
-            <a:pPr algn="l"/>
-            <a:r>
-              <a:rPr sz="1450" b="1" i="0">
-                <a:solidFill>
-                  <a:srgbClr val="1D2433"/>
-                </a:solidFill>
-                <a:latin typeface="Calibri"/>
-              </a:rPr>
-              <a:t>Loses its magnetism as soon as the current stops</a:t>
-            </a:r>
-          </a:p>
-        </p:txBody>
-      </p:sp>
-      <p:sp>
-        <p:nvSpPr>
-          <p:cNvPr id="16" name="Rounded Rectangle 15"/>
-          <p:cNvSpPr/>
-          <p:nvPr/>
-        </p:nvSpPr>
-        <p:spPr>
-          <a:xfrm>
-            <a:off x="640080" y="4370831"/>
             <a:ext cx="5349240" cy="868680"/>
           </a:xfrm>
           <a:prstGeom prst="roundRect">
@@ -19133,20 +19083,20 @@
       </p:sp>
       <p:sp>
         <p:nvSpPr>
-          <p:cNvPr id="17" name="Oval 16"/>
+          <p:cNvPr id="13" name="Oval 12"/>
           <p:cNvSpPr/>
           <p:nvPr/>
         </p:nvSpPr>
         <p:spPr>
           <a:xfrm>
-            <a:off x="914400" y="4599431"/>
+            <a:off x="6446520" y="3566160"/>
             <a:ext cx="411480" cy="411480"/>
           </a:xfrm>
           <a:prstGeom prst="ellipse">
             <a:avLst/>
           </a:prstGeom>
           <a:solidFill>
-            <a:srgbClr val="B7C2CC"/>
+            <a:srgbClr val="6A4C93"/>
           </a:solidFill>
           <a:ln>
             <a:noFill/>
@@ -19177,13 +19127,13 @@
       </p:sp>
       <p:sp>
         <p:nvSpPr>
-          <p:cNvPr id="18" name="TextBox 17"/>
-          <p:cNvSpPr txBox="1"/>
-          <p:nvPr/>
-        </p:nvSpPr>
-        <p:spPr>
-          <a:xfrm>
-            <a:off x="914400" y="4599431"/>
+          <p:cNvPr id="14" name="TextBox 13"/>
+          <p:cNvSpPr txBox="1"/>
+          <p:nvPr/>
+        </p:nvSpPr>
+        <p:spPr>
+          <a:xfrm>
+            <a:off x="6446520" y="3566160"/>
             <a:ext cx="411480" cy="411480"/>
           </a:xfrm>
           <a:prstGeom prst="rect">
@@ -19205,20 +19155,20 @@
                 </a:solidFill>
                 <a:latin typeface="Calibri"/>
               </a:rPr>
-              <a:t>C</a:t>
-            </a:r>
-          </a:p>
-        </p:txBody>
-      </p:sp>
-      <p:sp>
-        <p:nvSpPr>
-          <p:cNvPr id="19" name="TextBox 18"/>
-          <p:cNvSpPr txBox="1"/>
-          <p:nvPr/>
-        </p:nvSpPr>
-        <p:spPr>
-          <a:xfrm>
-            <a:off x="1508760" y="4370831"/>
+              <a:t>B</a:t>
+            </a:r>
+          </a:p>
+        </p:txBody>
+      </p:sp>
+      <p:sp>
+        <p:nvSpPr>
+          <p:cNvPr id="15" name="TextBox 14"/>
+          <p:cNvSpPr txBox="1"/>
+          <p:nvPr/>
+        </p:nvSpPr>
+        <p:spPr>
+          <a:xfrm>
+            <a:off x="7040880" y="3337560"/>
             <a:ext cx="4297680" cy="868680"/>
           </a:xfrm>
           <a:prstGeom prst="rect">
@@ -19236,24 +19186,24 @@
             <a:r>
               <a:rPr sz="1450" b="0" i="0">
                 <a:solidFill>
-                  <a:srgbClr val="6B7280"/>
-                </a:solidFill>
-                <a:latin typeface="Calibri"/>
-              </a:rPr>
-              <a:t>Conducts electricity better</a:t>
-            </a:r>
-          </a:p>
-        </p:txBody>
-      </p:sp>
-      <p:sp>
-        <p:nvSpPr>
-          <p:cNvPr id="20" name="Rounded Rectangle 19"/>
+                  <a:srgbClr val="1D2433"/>
+                </a:solidFill>
+                <a:latin typeface="Calibri"/>
+              </a:rPr>
+              <a:t>Loses its magnetism as soon as the current stops</a:t>
+            </a:r>
+          </a:p>
+        </p:txBody>
+      </p:sp>
+      <p:sp>
+        <p:nvSpPr>
+          <p:cNvPr id="16" name="Rounded Rectangle 15"/>
           <p:cNvSpPr/>
           <p:nvPr/>
         </p:nvSpPr>
         <p:spPr>
           <a:xfrm>
-            <a:off x="6172200" y="4370831"/>
+            <a:off x="640080" y="4370831"/>
             <a:ext cx="5349240" cy="868680"/>
           </a:xfrm>
           <a:prstGeom prst="roundRect">
@@ -19293,20 +19243,20 @@
       </p:sp>
       <p:sp>
         <p:nvSpPr>
-          <p:cNvPr id="21" name="Oval 20"/>
+          <p:cNvPr id="17" name="Oval 16"/>
           <p:cNvSpPr/>
           <p:nvPr/>
         </p:nvSpPr>
         <p:spPr>
           <a:xfrm>
-            <a:off x="6446520" y="4599431"/>
+            <a:off x="914400" y="4599431"/>
             <a:ext cx="411480" cy="411480"/>
           </a:xfrm>
           <a:prstGeom prst="ellipse">
             <a:avLst/>
           </a:prstGeom>
           <a:solidFill>
-            <a:srgbClr val="B7C2CC"/>
+            <a:srgbClr val="6A4C93"/>
           </a:solidFill>
           <a:ln>
             <a:noFill/>
@@ -19337,13 +19287,13 @@
       </p:sp>
       <p:sp>
         <p:nvSpPr>
-          <p:cNvPr id="22" name="TextBox 21"/>
-          <p:cNvSpPr txBox="1"/>
-          <p:nvPr/>
-        </p:nvSpPr>
-        <p:spPr>
-          <a:xfrm>
-            <a:off x="6446520" y="4599431"/>
+          <p:cNvPr id="18" name="TextBox 17"/>
+          <p:cNvSpPr txBox="1"/>
+          <p:nvPr/>
+        </p:nvSpPr>
+        <p:spPr>
+          <a:xfrm>
+            <a:off x="914400" y="4599431"/>
             <a:ext cx="411480" cy="411480"/>
           </a:xfrm>
           <a:prstGeom prst="rect">
@@ -19365,20 +19315,20 @@
                 </a:solidFill>
                 <a:latin typeface="Calibri"/>
               </a:rPr>
-              <a:t>D</a:t>
-            </a:r>
-          </a:p>
-        </p:txBody>
-      </p:sp>
-      <p:sp>
-        <p:nvSpPr>
-          <p:cNvPr id="23" name="TextBox 22"/>
-          <p:cNvSpPr txBox="1"/>
-          <p:nvPr/>
-        </p:nvSpPr>
-        <p:spPr>
-          <a:xfrm>
-            <a:off x="7040880" y="4370831"/>
+              <a:t>C</a:t>
+            </a:r>
+          </a:p>
+        </p:txBody>
+      </p:sp>
+      <p:sp>
+        <p:nvSpPr>
+          <p:cNvPr id="19" name="TextBox 18"/>
+          <p:cNvSpPr txBox="1"/>
+          <p:nvPr/>
+        </p:nvSpPr>
+        <p:spPr>
+          <a:xfrm>
+            <a:off x="1508760" y="4370831"/>
             <a:ext cx="4297680" cy="868680"/>
           </a:xfrm>
           <a:prstGeom prst="rect">
@@ -19396,44 +19346,38 @@
             <a:r>
               <a:rPr sz="1450" b="0" i="0">
                 <a:solidFill>
-                  <a:srgbClr val="6B7280"/>
-                </a:solidFill>
-                <a:latin typeface="Calibri"/>
-              </a:rPr>
-              <a:t>Is lighter</a:t>
-            </a:r>
-          </a:p>
-        </p:txBody>
-      </p:sp>
-      <p:sp>
-        <p:nvSpPr>
-          <p:cNvPr id="24" name="Rounded Rectangle 23"/>
+                  <a:srgbClr val="1D2433"/>
+                </a:solidFill>
+                <a:latin typeface="Calibri"/>
+              </a:rPr>
+              <a:t>Conducts electricity better</a:t>
+            </a:r>
+          </a:p>
+        </p:txBody>
+      </p:sp>
+      <p:sp>
+        <p:nvSpPr>
+          <p:cNvPr id="20" name="Rounded Rectangle 19"/>
           <p:cNvSpPr/>
           <p:nvPr/>
         </p:nvSpPr>
         <p:spPr>
           <a:xfrm>
-            <a:off x="640080" y="5440680"/>
-            <a:ext cx="10881360" cy="1097280"/>
+            <a:off x="6172200" y="4370831"/>
+            <a:ext cx="5349240" cy="868680"/>
           </a:xfrm>
           <a:prstGeom prst="roundRect">
             <a:avLst>
-              <a:gd name="adj" fmla="val 5000"/>
+              <a:gd name="adj" fmla="val 12000"/>
             </a:avLst>
           </a:prstGeom>
           <a:solidFill>
-            <a:srgbClr val="FFFFFF"/>
+            <a:srgbClr val="EAF1F4"/>
           </a:solidFill>
           <a:ln>
             <a:noFill/>
           </a:ln>
-          <a:effectLst>
-            <a:outerShdw blurRad="88900" dist="38100" dir="5400000" rotWithShape="0" algn="bl">
-              <a:srgbClr val="000000">
-                <a:alpha val="16000"/>
-              </a:srgbClr>
-            </a:outerShdw>
-          </a:effectLst>
+          <a:effectLst/>
         </p:spPr>
         <p:style>
           <a:lnRef idx="1">
@@ -19459,74 +19403,114 @@
       </p:sp>
       <p:sp>
         <p:nvSpPr>
-          <p:cNvPr id="25" name="TextBox 24"/>
-          <p:cNvSpPr txBox="1"/>
-          <p:nvPr/>
-        </p:nvSpPr>
-        <p:spPr>
-          <a:xfrm>
-            <a:off x="1005840" y="5596128"/>
-            <a:ext cx="4572000" cy="320040"/>
-          </a:xfrm>
-          <a:prstGeom prst="rect">
-            <a:avLst/>
-          </a:prstGeom>
-          <a:noFill/>
-        </p:spPr>
-        <p:txBody>
-          <a:bodyPr wrap="square" anchor="t" lIns="0" rIns="0" tIns="0" bIns="0">
+          <p:cNvPr id="21" name="Oval 20"/>
+          <p:cNvSpPr/>
+          <p:nvPr/>
+        </p:nvSpPr>
+        <p:spPr>
+          <a:xfrm>
+            <a:off x="6446520" y="4599431"/>
+            <a:ext cx="411480" cy="411480"/>
+          </a:xfrm>
+          <a:prstGeom prst="ellipse">
+            <a:avLst/>
+          </a:prstGeom>
+          <a:solidFill>
+            <a:srgbClr val="6A4C93"/>
+          </a:solidFill>
+          <a:ln>
+            <a:noFill/>
+          </a:ln>
+          <a:effectLst/>
+        </p:spPr>
+        <p:style>
+          <a:lnRef idx="1">
+            <a:schemeClr val="accent1"/>
+          </a:lnRef>
+          <a:fillRef idx="3">
+            <a:schemeClr val="accent1"/>
+          </a:fillRef>
+          <a:effectRef idx="2">
+            <a:schemeClr val="accent1"/>
+          </a:effectRef>
+          <a:fontRef idx="minor">
+            <a:schemeClr val="lt1"/>
+          </a:fontRef>
+        </p:style>
+        <p:txBody>
+          <a:bodyPr rtlCol="0" anchor="ctr"/>
+          <a:lstStyle/>
+          <a:p>
+            <a:pPr algn="ctr"/>
+          </a:p>
+        </p:txBody>
+      </p:sp>
+      <p:sp>
+        <p:nvSpPr>
+          <p:cNvPr id="22" name="TextBox 21"/>
+          <p:cNvSpPr txBox="1"/>
+          <p:nvPr/>
+        </p:nvSpPr>
+        <p:spPr>
+          <a:xfrm>
+            <a:off x="6446520" y="4599431"/>
+            <a:ext cx="411480" cy="411480"/>
+          </a:xfrm>
+          <a:prstGeom prst="rect">
+            <a:avLst/>
+          </a:prstGeom>
+          <a:noFill/>
+        </p:spPr>
+        <p:txBody>
+          <a:bodyPr wrap="square" anchor="ctr" lIns="0" rIns="0" tIns="0" bIns="0">
+            <a:spAutoFit/>
+          </a:bodyPr>
+          <a:lstStyle/>
+          <a:p>
+            <a:pPr algn="ctr"/>
+            <a:r>
+              <a:rPr sz="1400" b="1" i="0">
+                <a:solidFill>
+                  <a:srgbClr val="FFFFFF"/>
+                </a:solidFill>
+                <a:latin typeface="Calibri"/>
+              </a:rPr>
+              <a:t>D</a:t>
+            </a:r>
+          </a:p>
+        </p:txBody>
+      </p:sp>
+      <p:sp>
+        <p:nvSpPr>
+          <p:cNvPr id="23" name="TextBox 22"/>
+          <p:cNvSpPr txBox="1"/>
+          <p:nvPr/>
+        </p:nvSpPr>
+        <p:spPr>
+          <a:xfrm>
+            <a:off x="7040880" y="4370831"/>
+            <a:ext cx="4297680" cy="868680"/>
+          </a:xfrm>
+          <a:prstGeom prst="rect">
+            <a:avLst/>
+          </a:prstGeom>
+          <a:noFill/>
+        </p:spPr>
+        <p:txBody>
+          <a:bodyPr wrap="square" anchor="ctr" lIns="0" rIns="0" tIns="0" bIns="0">
             <a:spAutoFit/>
           </a:bodyPr>
           <a:lstStyle/>
           <a:p>
             <a:pPr algn="l"/>
             <a:r>
-              <a:rPr sz="1300" b="1" i="0">
-                <a:solidFill>
-                  <a:srgbClr val="2A9D8F"/>
-                </a:solidFill>
-                <a:latin typeface="Arial"/>
-              </a:rPr>
-              <a:t>WHY</a:t>
-            </a:r>
-          </a:p>
-        </p:txBody>
-      </p:sp>
-      <p:sp>
-        <p:nvSpPr>
-          <p:cNvPr id="26" name="TextBox 25"/>
-          <p:cNvSpPr txBox="1"/>
-          <p:nvPr/>
-        </p:nvSpPr>
-        <p:spPr>
-          <a:xfrm>
-            <a:off x="1005840" y="5943600"/>
-            <a:ext cx="10149840" cy="548640"/>
-          </a:xfrm>
-          <a:prstGeom prst="rect">
-            <a:avLst/>
-          </a:prstGeom>
-          <a:noFill/>
-        </p:spPr>
-        <p:txBody>
-          <a:bodyPr wrap="square" anchor="t" lIns="0" rIns="0" tIns="0" bIns="0">
-            <a:spAutoFit/>
-          </a:bodyPr>
-          <a:lstStyle/>
-          <a:p>
-            <a:pPr algn="l">
-              <a:lnSpc>
-                <a:spcPct val="105000"/>
-              </a:lnSpc>
-            </a:pPr>
-            <a:r>
               <a:rPr sz="1450" b="0" i="0">
                 <a:solidFill>
                   <a:srgbClr val="1D2433"/>
                 </a:solidFill>
                 <a:latin typeface="Calibri"/>
               </a:rPr>
-              <a:t>Soft iron magnetises and demagnetises easily, so the electromagnet can be switched off. Steel would keep its magnetism and could not be turned off.</a:t>
+              <a:t>Is lighter</a:t>
             </a:r>
           </a:p>
         </p:txBody>
@@ -19616,7 +19600,7 @@
             <a:avLst/>
           </a:prstGeom>
           <a:solidFill>
-            <a:srgbClr val="6A4C93"/>
+            <a:srgbClr val="2A9D8F"/>
           </a:solidFill>
           <a:ln>
             <a:noFill/>
@@ -19671,11 +19655,11 @@
             <a:r>
               <a:rPr sz="1300" b="1" i="0">
                 <a:solidFill>
-                  <a:srgbClr val="6A4C93"/>
+                  <a:srgbClr val="2A9D8F"/>
                 </a:solidFill>
                 <a:latin typeface="Arial"/>
               </a:rPr>
-              <a:t>QUIZ QUESTION</a:t>
+              <a:t>ANSWER REVEALED</a:t>
             </a:r>
           </a:p>
         </p:txBody>
@@ -19710,7 +19694,7 @@
                 </a:solidFill>
                 <a:latin typeface="Calibri"/>
               </a:rPr>
-              <a:t>Q2 — Make It Stronger</a:t>
+              <a:t>Q1 — Why Soft Iron?</a:t>
             </a:r>
           </a:p>
         </p:txBody>
@@ -19797,7 +19781,7 @@
                 </a:solidFill>
                 <a:latin typeface="Calibri"/>
               </a:rPr>
-              <a:t>Which change would NOT strengthen an electromagnet?</a:t>
+              <a:t>An electromagnet's core is made of soft iron rather than steel because soft iron:</a:t>
             </a:r>
           </a:p>
         </p:txBody>
@@ -19863,7 +19847,7 @@
             <a:avLst/>
           </a:prstGeom>
           <a:solidFill>
-            <a:srgbClr val="6A4C93"/>
+            <a:srgbClr val="B7C2CC"/>
           </a:solidFill>
           <a:ln>
             <a:noFill/>
@@ -19953,11 +19937,11 @@
             <a:r>
               <a:rPr sz="1450" b="0" i="0">
                 <a:solidFill>
-                  <a:srgbClr val="1D2433"/>
-                </a:solidFill>
-                <a:latin typeface="Calibri"/>
-              </a:rPr>
-              <a:t>More turns on the coil</a:t>
+                  <a:srgbClr val="6B7280"/>
+                </a:solidFill>
+                <a:latin typeface="Calibri"/>
+              </a:rPr>
+              <a:t>Stays magnetic permanently</a:t>
             </a:r>
           </a:p>
         </p:txBody>
@@ -19971,6 +19955,168 @@
         <p:spPr>
           <a:xfrm>
             <a:off x="6172200" y="3337560"/>
+            <a:ext cx="5349240" cy="868680"/>
+          </a:xfrm>
+          <a:prstGeom prst="roundRect">
+            <a:avLst>
+              <a:gd name="adj" fmla="val 12000"/>
+            </a:avLst>
+          </a:prstGeom>
+          <a:solidFill>
+            <a:srgbClr val="E9F5F0"/>
+          </a:solidFill>
+          <a:ln w="25400">
+            <a:solidFill>
+              <a:srgbClr val="2A9D8F"/>
+            </a:solidFill>
+          </a:ln>
+          <a:effectLst/>
+        </p:spPr>
+        <p:style>
+          <a:lnRef idx="1">
+            <a:schemeClr val="accent1"/>
+          </a:lnRef>
+          <a:fillRef idx="3">
+            <a:schemeClr val="accent1"/>
+          </a:fillRef>
+          <a:effectRef idx="2">
+            <a:schemeClr val="accent1"/>
+          </a:effectRef>
+          <a:fontRef idx="minor">
+            <a:schemeClr val="lt1"/>
+          </a:fontRef>
+        </p:style>
+        <p:txBody>
+          <a:bodyPr rtlCol="0" anchor="ctr"/>
+          <a:lstStyle/>
+          <a:p>
+            <a:pPr algn="ctr"/>
+          </a:p>
+        </p:txBody>
+      </p:sp>
+      <p:sp>
+        <p:nvSpPr>
+          <p:cNvPr id="13" name="Oval 12"/>
+          <p:cNvSpPr/>
+          <p:nvPr/>
+        </p:nvSpPr>
+        <p:spPr>
+          <a:xfrm>
+            <a:off x="6446520" y="3566160"/>
+            <a:ext cx="411480" cy="411480"/>
+          </a:xfrm>
+          <a:prstGeom prst="ellipse">
+            <a:avLst/>
+          </a:prstGeom>
+          <a:solidFill>
+            <a:srgbClr val="2A9D8F"/>
+          </a:solidFill>
+          <a:ln>
+            <a:noFill/>
+          </a:ln>
+          <a:effectLst/>
+        </p:spPr>
+        <p:style>
+          <a:lnRef idx="1">
+            <a:schemeClr val="accent1"/>
+          </a:lnRef>
+          <a:fillRef idx="3">
+            <a:schemeClr val="accent1"/>
+          </a:fillRef>
+          <a:effectRef idx="2">
+            <a:schemeClr val="accent1"/>
+          </a:effectRef>
+          <a:fontRef idx="minor">
+            <a:schemeClr val="lt1"/>
+          </a:fontRef>
+        </p:style>
+        <p:txBody>
+          <a:bodyPr rtlCol="0" anchor="ctr"/>
+          <a:lstStyle/>
+          <a:p>
+            <a:pPr algn="ctr"/>
+          </a:p>
+        </p:txBody>
+      </p:sp>
+      <p:sp>
+        <p:nvSpPr>
+          <p:cNvPr id="14" name="TextBox 13"/>
+          <p:cNvSpPr txBox="1"/>
+          <p:nvPr/>
+        </p:nvSpPr>
+        <p:spPr>
+          <a:xfrm>
+            <a:off x="6446520" y="3566160"/>
+            <a:ext cx="411480" cy="411480"/>
+          </a:xfrm>
+          <a:prstGeom prst="rect">
+            <a:avLst/>
+          </a:prstGeom>
+          <a:noFill/>
+        </p:spPr>
+        <p:txBody>
+          <a:bodyPr wrap="square" anchor="ctr" lIns="0" rIns="0" tIns="0" bIns="0">
+            <a:spAutoFit/>
+          </a:bodyPr>
+          <a:lstStyle/>
+          <a:p>
+            <a:pPr algn="ctr"/>
+            <a:r>
+              <a:rPr sz="1400" b="1" i="0">
+                <a:solidFill>
+                  <a:srgbClr val="FFFFFF"/>
+                </a:solidFill>
+                <a:latin typeface="Calibri"/>
+              </a:rPr>
+              <a:t>✓</a:t>
+            </a:r>
+          </a:p>
+        </p:txBody>
+      </p:sp>
+      <p:sp>
+        <p:nvSpPr>
+          <p:cNvPr id="15" name="TextBox 14"/>
+          <p:cNvSpPr txBox="1"/>
+          <p:nvPr/>
+        </p:nvSpPr>
+        <p:spPr>
+          <a:xfrm>
+            <a:off x="7040880" y="3337560"/>
+            <a:ext cx="4297680" cy="868680"/>
+          </a:xfrm>
+          <a:prstGeom prst="rect">
+            <a:avLst/>
+          </a:prstGeom>
+          <a:noFill/>
+        </p:spPr>
+        <p:txBody>
+          <a:bodyPr wrap="square" anchor="ctr" lIns="0" rIns="0" tIns="0" bIns="0">
+            <a:spAutoFit/>
+          </a:bodyPr>
+          <a:lstStyle/>
+          <a:p>
+            <a:pPr algn="l"/>
+            <a:r>
+              <a:rPr sz="1450" b="1" i="0">
+                <a:solidFill>
+                  <a:srgbClr val="1D2433"/>
+                </a:solidFill>
+                <a:latin typeface="Calibri"/>
+              </a:rPr>
+              <a:t>Loses its magnetism as soon as the current stops</a:t>
+            </a:r>
+          </a:p>
+        </p:txBody>
+      </p:sp>
+      <p:sp>
+        <p:nvSpPr>
+          <p:cNvPr id="16" name="Rounded Rectangle 15"/>
+          <p:cNvSpPr/>
+          <p:nvPr/>
+        </p:nvSpPr>
+        <p:spPr>
+          <a:xfrm>
+            <a:off x="640080" y="4370831"/>
             <a:ext cx="5349240" cy="868680"/>
           </a:xfrm>
           <a:prstGeom prst="roundRect">
@@ -20010,20 +20156,20 @@
       </p:sp>
       <p:sp>
         <p:nvSpPr>
-          <p:cNvPr id="13" name="Oval 12"/>
+          <p:cNvPr id="17" name="Oval 16"/>
           <p:cNvSpPr/>
           <p:nvPr/>
         </p:nvSpPr>
         <p:spPr>
           <a:xfrm>
-            <a:off x="6446520" y="3566160"/>
+            <a:off x="914400" y="4599431"/>
             <a:ext cx="411480" cy="411480"/>
           </a:xfrm>
           <a:prstGeom prst="ellipse">
             <a:avLst/>
           </a:prstGeom>
           <a:solidFill>
-            <a:srgbClr val="6A4C93"/>
+            <a:srgbClr val="B7C2CC"/>
           </a:solidFill>
           <a:ln>
             <a:noFill/>
@@ -20054,13 +20200,13 @@
       </p:sp>
       <p:sp>
         <p:nvSpPr>
-          <p:cNvPr id="14" name="TextBox 13"/>
-          <p:cNvSpPr txBox="1"/>
-          <p:nvPr/>
-        </p:nvSpPr>
-        <p:spPr>
-          <a:xfrm>
-            <a:off x="6446520" y="3566160"/>
+          <p:cNvPr id="18" name="TextBox 17"/>
+          <p:cNvSpPr txBox="1"/>
+          <p:nvPr/>
+        </p:nvSpPr>
+        <p:spPr>
+          <a:xfrm>
+            <a:off x="914400" y="4599431"/>
             <a:ext cx="411480" cy="411480"/>
           </a:xfrm>
           <a:prstGeom prst="rect">
@@ -20082,20 +20228,20 @@
                 </a:solidFill>
                 <a:latin typeface="Calibri"/>
               </a:rPr>
-              <a:t>B</a:t>
-            </a:r>
-          </a:p>
-        </p:txBody>
-      </p:sp>
-      <p:sp>
-        <p:nvSpPr>
-          <p:cNvPr id="15" name="TextBox 14"/>
-          <p:cNvSpPr txBox="1"/>
-          <p:nvPr/>
-        </p:nvSpPr>
-        <p:spPr>
-          <a:xfrm>
-            <a:off x="7040880" y="3337560"/>
+              <a:t>C</a:t>
+            </a:r>
+          </a:p>
+        </p:txBody>
+      </p:sp>
+      <p:sp>
+        <p:nvSpPr>
+          <p:cNvPr id="19" name="TextBox 18"/>
+          <p:cNvSpPr txBox="1"/>
+          <p:nvPr/>
+        </p:nvSpPr>
+        <p:spPr>
+          <a:xfrm>
+            <a:off x="1508760" y="4370831"/>
             <a:ext cx="4297680" cy="868680"/>
           </a:xfrm>
           <a:prstGeom prst="rect">
@@ -20113,24 +20259,24 @@
             <a:r>
               <a:rPr sz="1450" b="0" i="0">
                 <a:solidFill>
-                  <a:srgbClr val="1D2433"/>
-                </a:solidFill>
-                <a:latin typeface="Calibri"/>
-              </a:rPr>
-              <a:t>A larger current</a:t>
-            </a:r>
-          </a:p>
-        </p:txBody>
-      </p:sp>
-      <p:sp>
-        <p:nvSpPr>
-          <p:cNvPr id="16" name="Rounded Rectangle 15"/>
+                  <a:srgbClr val="6B7280"/>
+                </a:solidFill>
+                <a:latin typeface="Calibri"/>
+              </a:rPr>
+              <a:t>Conducts electricity better</a:t>
+            </a:r>
+          </a:p>
+        </p:txBody>
+      </p:sp>
+      <p:sp>
+        <p:nvSpPr>
+          <p:cNvPr id="20" name="Rounded Rectangle 19"/>
           <p:cNvSpPr/>
           <p:nvPr/>
         </p:nvSpPr>
         <p:spPr>
           <a:xfrm>
-            <a:off x="640080" y="4370831"/>
+            <a:off x="6172200" y="4370831"/>
             <a:ext cx="5349240" cy="868680"/>
           </a:xfrm>
           <a:prstGeom prst="roundRect">
@@ -20170,20 +20316,20 @@
       </p:sp>
       <p:sp>
         <p:nvSpPr>
-          <p:cNvPr id="17" name="Oval 16"/>
+          <p:cNvPr id="21" name="Oval 20"/>
           <p:cNvSpPr/>
           <p:nvPr/>
         </p:nvSpPr>
         <p:spPr>
           <a:xfrm>
-            <a:off x="914400" y="4599431"/>
+            <a:off x="6446520" y="4599431"/>
             <a:ext cx="411480" cy="411480"/>
           </a:xfrm>
           <a:prstGeom prst="ellipse">
             <a:avLst/>
           </a:prstGeom>
           <a:solidFill>
-            <a:srgbClr val="6A4C93"/>
+            <a:srgbClr val="B7C2CC"/>
           </a:solidFill>
           <a:ln>
             <a:noFill/>
@@ -20214,13 +20360,13 @@
       </p:sp>
       <p:sp>
         <p:nvSpPr>
-          <p:cNvPr id="18" name="TextBox 17"/>
-          <p:cNvSpPr txBox="1"/>
-          <p:nvPr/>
-        </p:nvSpPr>
-        <p:spPr>
-          <a:xfrm>
-            <a:off x="914400" y="4599431"/>
+          <p:cNvPr id="22" name="TextBox 21"/>
+          <p:cNvSpPr txBox="1"/>
+          <p:nvPr/>
+        </p:nvSpPr>
+        <p:spPr>
+          <a:xfrm>
+            <a:off x="6446520" y="4599431"/>
             <a:ext cx="411480" cy="411480"/>
           </a:xfrm>
           <a:prstGeom prst="rect">
@@ -20242,20 +20388,20 @@
                 </a:solidFill>
                 <a:latin typeface="Calibri"/>
               </a:rPr>
-              <a:t>C</a:t>
-            </a:r>
-          </a:p>
-        </p:txBody>
-      </p:sp>
-      <p:sp>
-        <p:nvSpPr>
-          <p:cNvPr id="19" name="TextBox 18"/>
-          <p:cNvSpPr txBox="1"/>
-          <p:nvPr/>
-        </p:nvSpPr>
-        <p:spPr>
-          <a:xfrm>
-            <a:off x="1508760" y="4370831"/>
+              <a:t>D</a:t>
+            </a:r>
+          </a:p>
+        </p:txBody>
+      </p:sp>
+      <p:sp>
+        <p:nvSpPr>
+          <p:cNvPr id="23" name="TextBox 22"/>
+          <p:cNvSpPr txBox="1"/>
+          <p:nvPr/>
+        </p:nvSpPr>
+        <p:spPr>
+          <a:xfrm>
+            <a:off x="7040880" y="4370831"/>
             <a:ext cx="4297680" cy="868680"/>
           </a:xfrm>
           <a:prstGeom prst="rect">
@@ -20273,38 +20419,44 @@
             <a:r>
               <a:rPr sz="1450" b="0" i="0">
                 <a:solidFill>
-                  <a:srgbClr val="1D2433"/>
-                </a:solidFill>
-                <a:latin typeface="Calibri"/>
-              </a:rPr>
-              <a:t>A soft-iron core</a:t>
-            </a:r>
-          </a:p>
-        </p:txBody>
-      </p:sp>
-      <p:sp>
-        <p:nvSpPr>
-          <p:cNvPr id="20" name="Rounded Rectangle 19"/>
+                  <a:srgbClr val="6B7280"/>
+                </a:solidFill>
+                <a:latin typeface="Calibri"/>
+              </a:rPr>
+              <a:t>Is lighter</a:t>
+            </a:r>
+          </a:p>
+        </p:txBody>
+      </p:sp>
+      <p:sp>
+        <p:nvSpPr>
+          <p:cNvPr id="24" name="Rounded Rectangle 23"/>
           <p:cNvSpPr/>
           <p:nvPr/>
         </p:nvSpPr>
         <p:spPr>
           <a:xfrm>
-            <a:off x="6172200" y="4370831"/>
-            <a:ext cx="5349240" cy="868680"/>
+            <a:off x="640080" y="5440680"/>
+            <a:ext cx="10881360" cy="1097280"/>
           </a:xfrm>
           <a:prstGeom prst="roundRect">
             <a:avLst>
-              <a:gd name="adj" fmla="val 12000"/>
+              <a:gd name="adj" fmla="val 5000"/>
             </a:avLst>
           </a:prstGeom>
           <a:solidFill>
-            <a:srgbClr val="EAF1F4"/>
+            <a:srgbClr val="FFFFFF"/>
           </a:solidFill>
           <a:ln>
             <a:noFill/>
           </a:ln>
-          <a:effectLst/>
+          <a:effectLst>
+            <a:outerShdw blurRad="88900" dist="38100" dir="5400000" rotWithShape="0" algn="bl">
+              <a:srgbClr val="000000">
+                <a:alpha val="16000"/>
+              </a:srgbClr>
+            </a:outerShdw>
+          </a:effectLst>
         </p:spPr>
         <p:style>
           <a:lnRef idx="1">
@@ -20330,114 +20482,74 @@
       </p:sp>
       <p:sp>
         <p:nvSpPr>
-          <p:cNvPr id="21" name="Oval 20"/>
-          <p:cNvSpPr/>
-          <p:nvPr/>
-        </p:nvSpPr>
-        <p:spPr>
-          <a:xfrm>
-            <a:off x="6446520" y="4599431"/>
-            <a:ext cx="411480" cy="411480"/>
-          </a:xfrm>
-          <a:prstGeom prst="ellipse">
-            <a:avLst/>
-          </a:prstGeom>
-          <a:solidFill>
-            <a:srgbClr val="6A4C93"/>
-          </a:solidFill>
-          <a:ln>
-            <a:noFill/>
-          </a:ln>
-          <a:effectLst/>
-        </p:spPr>
-        <p:style>
-          <a:lnRef idx="1">
-            <a:schemeClr val="accent1"/>
-          </a:lnRef>
-          <a:fillRef idx="3">
-            <a:schemeClr val="accent1"/>
-          </a:fillRef>
-          <a:effectRef idx="2">
-            <a:schemeClr val="accent1"/>
-          </a:effectRef>
-          <a:fontRef idx="minor">
-            <a:schemeClr val="lt1"/>
-          </a:fontRef>
-        </p:style>
-        <p:txBody>
-          <a:bodyPr rtlCol="0" anchor="ctr"/>
-          <a:lstStyle/>
-          <a:p>
-            <a:pPr algn="ctr"/>
-          </a:p>
-        </p:txBody>
-      </p:sp>
-      <p:sp>
-        <p:nvSpPr>
-          <p:cNvPr id="22" name="TextBox 21"/>
-          <p:cNvSpPr txBox="1"/>
-          <p:nvPr/>
-        </p:nvSpPr>
-        <p:spPr>
-          <a:xfrm>
-            <a:off x="6446520" y="4599431"/>
-            <a:ext cx="411480" cy="411480"/>
-          </a:xfrm>
-          <a:prstGeom prst="rect">
-            <a:avLst/>
-          </a:prstGeom>
-          <a:noFill/>
-        </p:spPr>
-        <p:txBody>
-          <a:bodyPr wrap="square" anchor="ctr" lIns="0" rIns="0" tIns="0" bIns="0">
-            <a:spAutoFit/>
-          </a:bodyPr>
-          <a:lstStyle/>
-          <a:p>
-            <a:pPr algn="ctr"/>
-            <a:r>
-              <a:rPr sz="1400" b="1" i="0">
-                <a:solidFill>
-                  <a:srgbClr val="FFFFFF"/>
-                </a:solidFill>
-                <a:latin typeface="Calibri"/>
-              </a:rPr>
-              <a:t>D</a:t>
-            </a:r>
-          </a:p>
-        </p:txBody>
-      </p:sp>
-      <p:sp>
-        <p:nvSpPr>
-          <p:cNvPr id="23" name="TextBox 22"/>
-          <p:cNvSpPr txBox="1"/>
-          <p:nvPr/>
-        </p:nvSpPr>
-        <p:spPr>
-          <a:xfrm>
-            <a:off x="7040880" y="4370831"/>
-            <a:ext cx="4297680" cy="868680"/>
-          </a:xfrm>
-          <a:prstGeom prst="rect">
-            <a:avLst/>
-          </a:prstGeom>
-          <a:noFill/>
-        </p:spPr>
-        <p:txBody>
-          <a:bodyPr wrap="square" anchor="ctr" lIns="0" rIns="0" tIns="0" bIns="0">
+          <p:cNvPr id="25" name="TextBox 24"/>
+          <p:cNvSpPr txBox="1"/>
+          <p:nvPr/>
+        </p:nvSpPr>
+        <p:spPr>
+          <a:xfrm>
+            <a:off x="1005840" y="5596128"/>
+            <a:ext cx="4572000" cy="320040"/>
+          </a:xfrm>
+          <a:prstGeom prst="rect">
+            <a:avLst/>
+          </a:prstGeom>
+          <a:noFill/>
+        </p:spPr>
+        <p:txBody>
+          <a:bodyPr wrap="square" anchor="t" lIns="0" rIns="0" tIns="0" bIns="0">
             <a:spAutoFit/>
           </a:bodyPr>
           <a:lstStyle/>
           <a:p>
             <a:pPr algn="l"/>
             <a:r>
+              <a:rPr sz="1300" b="1" i="0">
+                <a:solidFill>
+                  <a:srgbClr val="2A9D8F"/>
+                </a:solidFill>
+                <a:latin typeface="Arial"/>
+              </a:rPr>
+              <a:t>WHY</a:t>
+            </a:r>
+          </a:p>
+        </p:txBody>
+      </p:sp>
+      <p:sp>
+        <p:nvSpPr>
+          <p:cNvPr id="26" name="TextBox 25"/>
+          <p:cNvSpPr txBox="1"/>
+          <p:nvPr/>
+        </p:nvSpPr>
+        <p:spPr>
+          <a:xfrm>
+            <a:off x="1005840" y="5943600"/>
+            <a:ext cx="10149840" cy="548640"/>
+          </a:xfrm>
+          <a:prstGeom prst="rect">
+            <a:avLst/>
+          </a:prstGeom>
+          <a:noFill/>
+        </p:spPr>
+        <p:txBody>
+          <a:bodyPr wrap="square" anchor="t" lIns="0" rIns="0" tIns="0" bIns="0">
+            <a:spAutoFit/>
+          </a:bodyPr>
+          <a:lstStyle/>
+          <a:p>
+            <a:pPr algn="l">
+              <a:lnSpc>
+                <a:spcPct val="105000"/>
+              </a:lnSpc>
+            </a:pPr>
+            <a:r>
               <a:rPr sz="1450" b="0" i="0">
                 <a:solidFill>
                   <a:srgbClr val="1D2433"/>
                 </a:solidFill>
                 <a:latin typeface="Calibri"/>
               </a:rPr>
-              <a:t>Using a wooden core instead of iron</a:t>
+              <a:t>Soft iron magnetises and demagnetises easily, so the electromagnet can be switched off. Steel would keep its magnetism and could not be turned off.</a:t>
             </a:r>
           </a:p>
         </p:txBody>
@@ -20527,7 +20639,7 @@
             <a:avLst/>
           </a:prstGeom>
           <a:solidFill>
-            <a:srgbClr val="2A9D8F"/>
+            <a:srgbClr val="6A4C93"/>
           </a:solidFill>
           <a:ln>
             <a:noFill/>
@@ -20582,11 +20694,11 @@
             <a:r>
               <a:rPr sz="1300" b="1" i="0">
                 <a:solidFill>
-                  <a:srgbClr val="2A9D8F"/>
+                  <a:srgbClr val="6A4C93"/>
                 </a:solidFill>
                 <a:latin typeface="Arial"/>
               </a:rPr>
-              <a:t>ANSWER REVEALED</a:t>
+              <a:t>QUIZ QUESTION</a:t>
             </a:r>
           </a:p>
         </p:txBody>
@@ -20774,7 +20886,7 @@
             <a:avLst/>
           </a:prstGeom>
           <a:solidFill>
-            <a:srgbClr val="B7C2CC"/>
+            <a:srgbClr val="6A4C93"/>
           </a:solidFill>
           <a:ln>
             <a:noFill/>
@@ -20864,7 +20976,7 @@
             <a:r>
               <a:rPr sz="1450" b="0" i="0">
                 <a:solidFill>
-                  <a:srgbClr val="6B7280"/>
+                  <a:srgbClr val="1D2433"/>
                 </a:solidFill>
                 <a:latin typeface="Calibri"/>
               </a:rPr>
@@ -20934,7 +21046,7 @@
             <a:avLst/>
           </a:prstGeom>
           <a:solidFill>
-            <a:srgbClr val="B7C2CC"/>
+            <a:srgbClr val="6A4C93"/>
           </a:solidFill>
           <a:ln>
             <a:noFill/>
@@ -21024,7 +21136,7 @@
             <a:r>
               <a:rPr sz="1450" b="0" i="0">
                 <a:solidFill>
-                  <a:srgbClr val="6B7280"/>
+                  <a:srgbClr val="1D2433"/>
                 </a:solidFill>
                 <a:latin typeface="Calibri"/>
               </a:rPr>
@@ -21094,7 +21206,7 @@
             <a:avLst/>
           </a:prstGeom>
           <a:solidFill>
-            <a:srgbClr val="B7C2CC"/>
+            <a:srgbClr val="6A4C93"/>
           </a:solidFill>
           <a:ln>
             <a:noFill/>
@@ -21184,7 +21296,7 @@
             <a:r>
               <a:rPr sz="1450" b="0" i="0">
                 <a:solidFill>
-                  <a:srgbClr val="6B7280"/>
+                  <a:srgbClr val="1D2433"/>
                 </a:solidFill>
                 <a:latin typeface="Calibri"/>
               </a:rPr>
@@ -21210,12 +21322,10 @@
             </a:avLst>
           </a:prstGeom>
           <a:solidFill>
-            <a:srgbClr val="E9F5F0"/>
+            <a:srgbClr val="EAF1F4"/>
           </a:solidFill>
-          <a:ln w="25400">
-            <a:solidFill>
-              <a:srgbClr val="2A9D8F"/>
-            </a:solidFill>
+          <a:ln>
+            <a:noFill/>
           </a:ln>
           <a:effectLst/>
         </p:spPr>
@@ -21256,7 +21366,7 @@
             <a:avLst/>
           </a:prstGeom>
           <a:solidFill>
-            <a:srgbClr val="2A9D8F"/>
+            <a:srgbClr val="6A4C93"/>
           </a:solidFill>
           <a:ln>
             <a:noFill/>
@@ -21315,7 +21425,7 @@
                 </a:solidFill>
                 <a:latin typeface="Calibri"/>
               </a:rPr>
-              <a:t>✓</a:t>
+              <a:t>D</a:t>
             </a:r>
           </a:p>
         </p:txBody>
@@ -21344,139 +21454,13 @@
           <a:p>
             <a:pPr algn="l"/>
             <a:r>
-              <a:rPr sz="1450" b="1" i="0">
+              <a:rPr sz="1450" b="0" i="0">
                 <a:solidFill>
                   <a:srgbClr val="1D2433"/>
                 </a:solidFill>
                 <a:latin typeface="Calibri"/>
               </a:rPr>
               <a:t>Using a wooden core instead of iron</a:t>
-            </a:r>
-          </a:p>
-        </p:txBody>
-      </p:sp>
-      <p:sp>
-        <p:nvSpPr>
-          <p:cNvPr id="24" name="Rounded Rectangle 23"/>
-          <p:cNvSpPr/>
-          <p:nvPr/>
-        </p:nvSpPr>
-        <p:spPr>
-          <a:xfrm>
-            <a:off x="640080" y="5440680"/>
-            <a:ext cx="10881360" cy="1097280"/>
-          </a:xfrm>
-          <a:prstGeom prst="roundRect">
-            <a:avLst>
-              <a:gd name="adj" fmla="val 5000"/>
-            </a:avLst>
-          </a:prstGeom>
-          <a:solidFill>
-            <a:srgbClr val="FFFFFF"/>
-          </a:solidFill>
-          <a:ln>
-            <a:noFill/>
-          </a:ln>
-          <a:effectLst>
-            <a:outerShdw blurRad="88900" dist="38100" dir="5400000" rotWithShape="0" algn="bl">
-              <a:srgbClr val="000000">
-                <a:alpha val="16000"/>
-              </a:srgbClr>
-            </a:outerShdw>
-          </a:effectLst>
-        </p:spPr>
-        <p:style>
-          <a:lnRef idx="1">
-            <a:schemeClr val="accent1"/>
-          </a:lnRef>
-          <a:fillRef idx="3">
-            <a:schemeClr val="accent1"/>
-          </a:fillRef>
-          <a:effectRef idx="2">
-            <a:schemeClr val="accent1"/>
-          </a:effectRef>
-          <a:fontRef idx="minor">
-            <a:schemeClr val="lt1"/>
-          </a:fontRef>
-        </p:style>
-        <p:txBody>
-          <a:bodyPr rtlCol="0" anchor="ctr"/>
-          <a:lstStyle/>
-          <a:p>
-            <a:pPr algn="ctr"/>
-          </a:p>
-        </p:txBody>
-      </p:sp>
-      <p:sp>
-        <p:nvSpPr>
-          <p:cNvPr id="25" name="TextBox 24"/>
-          <p:cNvSpPr txBox="1"/>
-          <p:nvPr/>
-        </p:nvSpPr>
-        <p:spPr>
-          <a:xfrm>
-            <a:off x="1005840" y="5596128"/>
-            <a:ext cx="4572000" cy="320040"/>
-          </a:xfrm>
-          <a:prstGeom prst="rect">
-            <a:avLst/>
-          </a:prstGeom>
-          <a:noFill/>
-        </p:spPr>
-        <p:txBody>
-          <a:bodyPr wrap="square" anchor="t" lIns="0" rIns="0" tIns="0" bIns="0">
-            <a:spAutoFit/>
-          </a:bodyPr>
-          <a:lstStyle/>
-          <a:p>
-            <a:pPr algn="l"/>
-            <a:r>
-              <a:rPr sz="1300" b="1" i="0">
-                <a:solidFill>
-                  <a:srgbClr val="2A9D8F"/>
-                </a:solidFill>
-                <a:latin typeface="Arial"/>
-              </a:rPr>
-              <a:t>WHY</a:t>
-            </a:r>
-          </a:p>
-        </p:txBody>
-      </p:sp>
-      <p:sp>
-        <p:nvSpPr>
-          <p:cNvPr id="26" name="TextBox 25"/>
-          <p:cNvSpPr txBox="1"/>
-          <p:nvPr/>
-        </p:nvSpPr>
-        <p:spPr>
-          <a:xfrm>
-            <a:off x="1005840" y="5943600"/>
-            <a:ext cx="10149840" cy="548640"/>
-          </a:xfrm>
-          <a:prstGeom prst="rect">
-            <a:avLst/>
-          </a:prstGeom>
-          <a:noFill/>
-        </p:spPr>
-        <p:txBody>
-          <a:bodyPr wrap="square" anchor="t" lIns="0" rIns="0" tIns="0" bIns="0">
-            <a:spAutoFit/>
-          </a:bodyPr>
-          <a:lstStyle/>
-          <a:p>
-            <a:pPr algn="l">
-              <a:lnSpc>
-                <a:spcPct val="105000"/>
-              </a:lnSpc>
-            </a:pPr>
-            <a:r>
-              <a:rPr sz="1450" b="0" i="0">
-                <a:solidFill>
-                  <a:srgbClr val="1D2433"/>
-                </a:solidFill>
-                <a:latin typeface="Calibri"/>
-              </a:rPr>
-              <a:t>Wood is non-magnetic and adds nothing. An electromagnet is made stronger by more turns, a larger current and a soft-iron core.</a:t>
             </a:r>
           </a:p>
         </p:txBody>
@@ -21566,7 +21550,7 @@
             <a:avLst/>
           </a:prstGeom>
           <a:solidFill>
-            <a:srgbClr val="6A4C93"/>
+            <a:srgbClr val="2A9D8F"/>
           </a:solidFill>
           <a:ln>
             <a:noFill/>
@@ -21621,11 +21605,11 @@
             <a:r>
               <a:rPr sz="1300" b="1" i="0">
                 <a:solidFill>
-                  <a:srgbClr val="6A4C93"/>
+                  <a:srgbClr val="2A9D8F"/>
                 </a:solidFill>
                 <a:latin typeface="Arial"/>
               </a:rPr>
-              <a:t>QUIZ QUESTION</a:t>
+              <a:t>ANSWER REVEALED</a:t>
             </a:r>
           </a:p>
         </p:txBody>
@@ -21660,7 +21644,7 @@
                 </a:solidFill>
                 <a:latin typeface="Calibri"/>
               </a:rPr>
-              <a:t>Q3 — Scrapyard Crane</a:t>
+              <a:t>Q2 — Make It Stronger</a:t>
             </a:r>
           </a:p>
         </p:txBody>
@@ -21747,7 +21731,7 @@
                 </a:solidFill>
                 <a:latin typeface="Calibri"/>
               </a:rPr>
-              <a:t>A scrapyard prefers an electromagnet to a permanent magnet for moving iron because it can:</a:t>
+              <a:t>Which change would NOT strengthen an electromagnet?</a:t>
             </a:r>
           </a:p>
         </p:txBody>
@@ -21813,7 +21797,7 @@
             <a:avLst/>
           </a:prstGeom>
           <a:solidFill>
-            <a:srgbClr val="6A4C93"/>
+            <a:srgbClr val="B7C2CC"/>
           </a:solidFill>
           <a:ln>
             <a:noFill/>
@@ -21903,11 +21887,11 @@
             <a:r>
               <a:rPr sz="1450" b="0" i="0">
                 <a:solidFill>
-                  <a:srgbClr val="1D2433"/>
-                </a:solidFill>
-                <a:latin typeface="Calibri"/>
-              </a:rPr>
-              <a:t>Never be switched off</a:t>
+                  <a:srgbClr val="6B7280"/>
+                </a:solidFill>
+                <a:latin typeface="Calibri"/>
+              </a:rPr>
+              <a:t>More turns on the coil</a:t>
             </a:r>
           </a:p>
         </p:txBody>
@@ -21973,7 +21957,7 @@
             <a:avLst/>
           </a:prstGeom>
           <a:solidFill>
-            <a:srgbClr val="6A4C93"/>
+            <a:srgbClr val="B7C2CC"/>
           </a:solidFill>
           <a:ln>
             <a:noFill/>
@@ -22063,11 +22047,11 @@
             <a:r>
               <a:rPr sz="1450" b="0" i="0">
                 <a:solidFill>
-                  <a:srgbClr val="1D2433"/>
-                </a:solidFill>
-                <a:latin typeface="Calibri"/>
-              </a:rPr>
-              <a:t>Be switched off to release the load</a:t>
+                  <a:srgbClr val="6B7280"/>
+                </a:solidFill>
+                <a:latin typeface="Calibri"/>
+              </a:rPr>
+              <a:t>A larger current</a:t>
             </a:r>
           </a:p>
         </p:txBody>
@@ -22133,7 +22117,7 @@
             <a:avLst/>
           </a:prstGeom>
           <a:solidFill>
-            <a:srgbClr val="6A4C93"/>
+            <a:srgbClr val="B7C2CC"/>
           </a:solidFill>
           <a:ln>
             <a:noFill/>
@@ -22223,11 +22207,11 @@
             <a:r>
               <a:rPr sz="1450" b="0" i="0">
                 <a:solidFill>
-                  <a:srgbClr val="1D2433"/>
-                </a:solidFill>
-                <a:latin typeface="Calibri"/>
-              </a:rPr>
-              <a:t>Work without electricity</a:t>
+                  <a:srgbClr val="6B7280"/>
+                </a:solidFill>
+                <a:latin typeface="Calibri"/>
+              </a:rPr>
+              <a:t>A soft-iron core</a:t>
             </a:r>
           </a:p>
         </p:txBody>
@@ -22249,7 +22233,53 @@
             </a:avLst>
           </a:prstGeom>
           <a:solidFill>
-            <a:srgbClr val="EAF1F4"/>
+            <a:srgbClr val="E9F5F0"/>
+          </a:solidFill>
+          <a:ln w="25400">
+            <a:solidFill>
+              <a:srgbClr val="2A9D8F"/>
+            </a:solidFill>
+          </a:ln>
+          <a:effectLst/>
+        </p:spPr>
+        <p:style>
+          <a:lnRef idx="1">
+            <a:schemeClr val="accent1"/>
+          </a:lnRef>
+          <a:fillRef idx="3">
+            <a:schemeClr val="accent1"/>
+          </a:fillRef>
+          <a:effectRef idx="2">
+            <a:schemeClr val="accent1"/>
+          </a:effectRef>
+          <a:fontRef idx="minor">
+            <a:schemeClr val="lt1"/>
+          </a:fontRef>
+        </p:style>
+        <p:txBody>
+          <a:bodyPr rtlCol="0" anchor="ctr"/>
+          <a:lstStyle/>
+          <a:p>
+            <a:pPr algn="ctr"/>
+          </a:p>
+        </p:txBody>
+      </p:sp>
+      <p:sp>
+        <p:nvSpPr>
+          <p:cNvPr id="21" name="Oval 20"/>
+          <p:cNvSpPr/>
+          <p:nvPr/>
+        </p:nvSpPr>
+        <p:spPr>
+          <a:xfrm>
+            <a:off x="6446520" y="4599431"/>
+            <a:ext cx="411480" cy="411480"/>
+          </a:xfrm>
+          <a:prstGeom prst="ellipse">
+            <a:avLst/>
+          </a:prstGeom>
+          <a:solidFill>
+            <a:srgbClr val="2A9D8F"/>
           </a:solidFill>
           <a:ln>
             <a:noFill/>
@@ -22280,8 +22310,8 @@
       </p:sp>
       <p:sp>
         <p:nvSpPr>
-          <p:cNvPr id="21" name="Oval 20"/>
-          <p:cNvSpPr/>
+          <p:cNvPr id="22" name="TextBox 21"/>
+          <p:cNvSpPr txBox="1"/>
           <p:nvPr/>
         </p:nvSpPr>
         <p:spPr>
@@ -22289,16 +22319,94 @@
             <a:off x="6446520" y="4599431"/>
             <a:ext cx="411480" cy="411480"/>
           </a:xfrm>
-          <a:prstGeom prst="ellipse">
-            <a:avLst/>
+          <a:prstGeom prst="rect">
+            <a:avLst/>
+          </a:prstGeom>
+          <a:noFill/>
+        </p:spPr>
+        <p:txBody>
+          <a:bodyPr wrap="square" anchor="ctr" lIns="0" rIns="0" tIns="0" bIns="0">
+            <a:spAutoFit/>
+          </a:bodyPr>
+          <a:lstStyle/>
+          <a:p>
+            <a:pPr algn="ctr"/>
+            <a:r>
+              <a:rPr sz="1400" b="1" i="0">
+                <a:solidFill>
+                  <a:srgbClr val="FFFFFF"/>
+                </a:solidFill>
+                <a:latin typeface="Calibri"/>
+              </a:rPr>
+              <a:t>✓</a:t>
+            </a:r>
+          </a:p>
+        </p:txBody>
+      </p:sp>
+      <p:sp>
+        <p:nvSpPr>
+          <p:cNvPr id="23" name="TextBox 22"/>
+          <p:cNvSpPr txBox="1"/>
+          <p:nvPr/>
+        </p:nvSpPr>
+        <p:spPr>
+          <a:xfrm>
+            <a:off x="7040880" y="4370831"/>
+            <a:ext cx="4297680" cy="868680"/>
+          </a:xfrm>
+          <a:prstGeom prst="rect">
+            <a:avLst/>
+          </a:prstGeom>
+          <a:noFill/>
+        </p:spPr>
+        <p:txBody>
+          <a:bodyPr wrap="square" anchor="ctr" lIns="0" rIns="0" tIns="0" bIns="0">
+            <a:spAutoFit/>
+          </a:bodyPr>
+          <a:lstStyle/>
+          <a:p>
+            <a:pPr algn="l"/>
+            <a:r>
+              <a:rPr sz="1450" b="1" i="0">
+                <a:solidFill>
+                  <a:srgbClr val="1D2433"/>
+                </a:solidFill>
+                <a:latin typeface="Calibri"/>
+              </a:rPr>
+              <a:t>Using a wooden core instead of iron</a:t>
+            </a:r>
+          </a:p>
+        </p:txBody>
+      </p:sp>
+      <p:sp>
+        <p:nvSpPr>
+          <p:cNvPr id="24" name="Rounded Rectangle 23"/>
+          <p:cNvSpPr/>
+          <p:nvPr/>
+        </p:nvSpPr>
+        <p:spPr>
+          <a:xfrm>
+            <a:off x="640080" y="5440680"/>
+            <a:ext cx="10881360" cy="1097280"/>
+          </a:xfrm>
+          <a:prstGeom prst="roundRect">
+            <a:avLst>
+              <a:gd name="adj" fmla="val 5000"/>
+            </a:avLst>
           </a:prstGeom>
           <a:solidFill>
-            <a:srgbClr val="6A4C93"/>
+            <a:srgbClr val="FFFFFF"/>
           </a:solidFill>
           <a:ln>
             <a:noFill/>
           </a:ln>
-          <a:effectLst/>
+          <a:effectLst>
+            <a:outerShdw blurRad="88900" dist="38100" dir="5400000" rotWithShape="0" algn="bl">
+              <a:srgbClr val="000000">
+                <a:alpha val="16000"/>
+              </a:srgbClr>
+            </a:outerShdw>
+          </a:effectLst>
         </p:spPr>
         <p:style>
           <a:lnRef idx="1">
@@ -22324,70 +22432,74 @@
       </p:sp>
       <p:sp>
         <p:nvSpPr>
-          <p:cNvPr id="22" name="TextBox 21"/>
-          <p:cNvSpPr txBox="1"/>
-          <p:nvPr/>
-        </p:nvSpPr>
-        <p:spPr>
-          <a:xfrm>
-            <a:off x="6446520" y="4599431"/>
-            <a:ext cx="411480" cy="411480"/>
-          </a:xfrm>
-          <a:prstGeom prst="rect">
-            <a:avLst/>
-          </a:prstGeom>
-          <a:noFill/>
-        </p:spPr>
-        <p:txBody>
-          <a:bodyPr wrap="square" anchor="ctr" lIns="0" rIns="0" tIns="0" bIns="0">
-            <a:spAutoFit/>
-          </a:bodyPr>
-          <a:lstStyle/>
-          <a:p>
-            <a:pPr algn="ctr"/>
-            <a:r>
-              <a:rPr sz="1400" b="1" i="0">
-                <a:solidFill>
-                  <a:srgbClr val="FFFFFF"/>
-                </a:solidFill>
-                <a:latin typeface="Calibri"/>
-              </a:rPr>
-              <a:t>D</a:t>
-            </a:r>
-          </a:p>
-        </p:txBody>
-      </p:sp>
-      <p:sp>
-        <p:nvSpPr>
-          <p:cNvPr id="23" name="TextBox 22"/>
-          <p:cNvSpPr txBox="1"/>
-          <p:nvPr/>
-        </p:nvSpPr>
-        <p:spPr>
-          <a:xfrm>
-            <a:off x="7040880" y="4370831"/>
-            <a:ext cx="4297680" cy="868680"/>
-          </a:xfrm>
-          <a:prstGeom prst="rect">
-            <a:avLst/>
-          </a:prstGeom>
-          <a:noFill/>
-        </p:spPr>
-        <p:txBody>
-          <a:bodyPr wrap="square" anchor="ctr" lIns="0" rIns="0" tIns="0" bIns="0">
+          <p:cNvPr id="25" name="TextBox 24"/>
+          <p:cNvSpPr txBox="1"/>
+          <p:nvPr/>
+        </p:nvSpPr>
+        <p:spPr>
+          <a:xfrm>
+            <a:off x="1005840" y="5596128"/>
+            <a:ext cx="4572000" cy="320040"/>
+          </a:xfrm>
+          <a:prstGeom prst="rect">
+            <a:avLst/>
+          </a:prstGeom>
+          <a:noFill/>
+        </p:spPr>
+        <p:txBody>
+          <a:bodyPr wrap="square" anchor="t" lIns="0" rIns="0" tIns="0" bIns="0">
             <a:spAutoFit/>
           </a:bodyPr>
           <a:lstStyle/>
           <a:p>
             <a:pPr algn="l"/>
             <a:r>
+              <a:rPr sz="1300" b="1" i="0">
+                <a:solidFill>
+                  <a:srgbClr val="2A9D8F"/>
+                </a:solidFill>
+                <a:latin typeface="Arial"/>
+              </a:rPr>
+              <a:t>WHY</a:t>
+            </a:r>
+          </a:p>
+        </p:txBody>
+      </p:sp>
+      <p:sp>
+        <p:nvSpPr>
+          <p:cNvPr id="26" name="TextBox 25"/>
+          <p:cNvSpPr txBox="1"/>
+          <p:nvPr/>
+        </p:nvSpPr>
+        <p:spPr>
+          <a:xfrm>
+            <a:off x="1005840" y="5943600"/>
+            <a:ext cx="10149840" cy="548640"/>
+          </a:xfrm>
+          <a:prstGeom prst="rect">
+            <a:avLst/>
+          </a:prstGeom>
+          <a:noFill/>
+        </p:spPr>
+        <p:txBody>
+          <a:bodyPr wrap="square" anchor="t" lIns="0" rIns="0" tIns="0" bIns="0">
+            <a:spAutoFit/>
+          </a:bodyPr>
+          <a:lstStyle/>
+          <a:p>
+            <a:pPr algn="l">
+              <a:lnSpc>
+                <a:spcPct val="105000"/>
+              </a:lnSpc>
+            </a:pPr>
+            <a:r>
               <a:rPr sz="1450" b="0" i="0">
                 <a:solidFill>
                   <a:srgbClr val="1D2433"/>
                 </a:solidFill>
                 <a:latin typeface="Calibri"/>
               </a:rPr>
-              <a:t>Lift plastic too</a:t>
+              <a:t>Wood is non-magnetic and adds nothing. An electromagnet is made stronger by more turns, a larger current and a soft-iron core.</a:t>
             </a:r>
           </a:p>
         </p:txBody>
@@ -22687,7 +22799,7 @@
             <a:avLst/>
           </a:prstGeom>
           <a:solidFill>
-            <a:srgbClr val="2A9D8F"/>
+            <a:srgbClr val="6A4C93"/>
           </a:solidFill>
           <a:ln>
             <a:noFill/>
@@ -22742,11 +22854,11 @@
             <a:r>
               <a:rPr sz="1300" b="1" i="0">
                 <a:solidFill>
-                  <a:srgbClr val="2A9D8F"/>
+                  <a:srgbClr val="6A4C93"/>
                 </a:solidFill>
                 <a:latin typeface="Arial"/>
               </a:rPr>
-              <a:t>ANSWER REVEALED</a:t>
+              <a:t>QUIZ QUESTION</a:t>
             </a:r>
           </a:p>
         </p:txBody>
@@ -22934,7 +23046,7 @@
             <a:avLst/>
           </a:prstGeom>
           <a:solidFill>
-            <a:srgbClr val="B7C2CC"/>
+            <a:srgbClr val="6A4C93"/>
           </a:solidFill>
           <a:ln>
             <a:noFill/>
@@ -23024,7 +23136,7 @@
             <a:r>
               <a:rPr sz="1450" b="0" i="0">
                 <a:solidFill>
-                  <a:srgbClr val="6B7280"/>
+                  <a:srgbClr val="1D2433"/>
                 </a:solidFill>
                 <a:latin typeface="Calibri"/>
               </a:rPr>
@@ -23042,168 +23154,6 @@
         <p:spPr>
           <a:xfrm>
             <a:off x="6172200" y="3337560"/>
-            <a:ext cx="5349240" cy="868680"/>
-          </a:xfrm>
-          <a:prstGeom prst="roundRect">
-            <a:avLst>
-              <a:gd name="adj" fmla="val 12000"/>
-            </a:avLst>
-          </a:prstGeom>
-          <a:solidFill>
-            <a:srgbClr val="E9F5F0"/>
-          </a:solidFill>
-          <a:ln w="25400">
-            <a:solidFill>
-              <a:srgbClr val="2A9D8F"/>
-            </a:solidFill>
-          </a:ln>
-          <a:effectLst/>
-        </p:spPr>
-        <p:style>
-          <a:lnRef idx="1">
-            <a:schemeClr val="accent1"/>
-          </a:lnRef>
-          <a:fillRef idx="3">
-            <a:schemeClr val="accent1"/>
-          </a:fillRef>
-          <a:effectRef idx="2">
-            <a:schemeClr val="accent1"/>
-          </a:effectRef>
-          <a:fontRef idx="minor">
-            <a:schemeClr val="lt1"/>
-          </a:fontRef>
-        </p:style>
-        <p:txBody>
-          <a:bodyPr rtlCol="0" anchor="ctr"/>
-          <a:lstStyle/>
-          <a:p>
-            <a:pPr algn="ctr"/>
-          </a:p>
-        </p:txBody>
-      </p:sp>
-      <p:sp>
-        <p:nvSpPr>
-          <p:cNvPr id="13" name="Oval 12"/>
-          <p:cNvSpPr/>
-          <p:nvPr/>
-        </p:nvSpPr>
-        <p:spPr>
-          <a:xfrm>
-            <a:off x="6446520" y="3566160"/>
-            <a:ext cx="411480" cy="411480"/>
-          </a:xfrm>
-          <a:prstGeom prst="ellipse">
-            <a:avLst/>
-          </a:prstGeom>
-          <a:solidFill>
-            <a:srgbClr val="2A9D8F"/>
-          </a:solidFill>
-          <a:ln>
-            <a:noFill/>
-          </a:ln>
-          <a:effectLst/>
-        </p:spPr>
-        <p:style>
-          <a:lnRef idx="1">
-            <a:schemeClr val="accent1"/>
-          </a:lnRef>
-          <a:fillRef idx="3">
-            <a:schemeClr val="accent1"/>
-          </a:fillRef>
-          <a:effectRef idx="2">
-            <a:schemeClr val="accent1"/>
-          </a:effectRef>
-          <a:fontRef idx="minor">
-            <a:schemeClr val="lt1"/>
-          </a:fontRef>
-        </p:style>
-        <p:txBody>
-          <a:bodyPr rtlCol="0" anchor="ctr"/>
-          <a:lstStyle/>
-          <a:p>
-            <a:pPr algn="ctr"/>
-          </a:p>
-        </p:txBody>
-      </p:sp>
-      <p:sp>
-        <p:nvSpPr>
-          <p:cNvPr id="14" name="TextBox 13"/>
-          <p:cNvSpPr txBox="1"/>
-          <p:nvPr/>
-        </p:nvSpPr>
-        <p:spPr>
-          <a:xfrm>
-            <a:off x="6446520" y="3566160"/>
-            <a:ext cx="411480" cy="411480"/>
-          </a:xfrm>
-          <a:prstGeom prst="rect">
-            <a:avLst/>
-          </a:prstGeom>
-          <a:noFill/>
-        </p:spPr>
-        <p:txBody>
-          <a:bodyPr wrap="square" anchor="ctr" lIns="0" rIns="0" tIns="0" bIns="0">
-            <a:spAutoFit/>
-          </a:bodyPr>
-          <a:lstStyle/>
-          <a:p>
-            <a:pPr algn="ctr"/>
-            <a:r>
-              <a:rPr sz="1400" b="1" i="0">
-                <a:solidFill>
-                  <a:srgbClr val="FFFFFF"/>
-                </a:solidFill>
-                <a:latin typeface="Calibri"/>
-              </a:rPr>
-              <a:t>✓</a:t>
-            </a:r>
-          </a:p>
-        </p:txBody>
-      </p:sp>
-      <p:sp>
-        <p:nvSpPr>
-          <p:cNvPr id="15" name="TextBox 14"/>
-          <p:cNvSpPr txBox="1"/>
-          <p:nvPr/>
-        </p:nvSpPr>
-        <p:spPr>
-          <a:xfrm>
-            <a:off x="7040880" y="3337560"/>
-            <a:ext cx="4297680" cy="868680"/>
-          </a:xfrm>
-          <a:prstGeom prst="rect">
-            <a:avLst/>
-          </a:prstGeom>
-          <a:noFill/>
-        </p:spPr>
-        <p:txBody>
-          <a:bodyPr wrap="square" anchor="ctr" lIns="0" rIns="0" tIns="0" bIns="0">
-            <a:spAutoFit/>
-          </a:bodyPr>
-          <a:lstStyle/>
-          <a:p>
-            <a:pPr algn="l"/>
-            <a:r>
-              <a:rPr sz="1450" b="1" i="0">
-                <a:solidFill>
-                  <a:srgbClr val="1D2433"/>
-                </a:solidFill>
-                <a:latin typeface="Calibri"/>
-              </a:rPr>
-              <a:t>Be switched off to release the load</a:t>
-            </a:r>
-          </a:p>
-        </p:txBody>
-      </p:sp>
-      <p:sp>
-        <p:nvSpPr>
-          <p:cNvPr id="16" name="Rounded Rectangle 15"/>
-          <p:cNvSpPr/>
-          <p:nvPr/>
-        </p:nvSpPr>
-        <p:spPr>
-          <a:xfrm>
-            <a:off x="640080" y="4370831"/>
             <a:ext cx="5349240" cy="868680"/>
           </a:xfrm>
           <a:prstGeom prst="roundRect">
@@ -23243,20 +23193,20 @@
       </p:sp>
       <p:sp>
         <p:nvSpPr>
-          <p:cNvPr id="17" name="Oval 16"/>
+          <p:cNvPr id="13" name="Oval 12"/>
           <p:cNvSpPr/>
           <p:nvPr/>
         </p:nvSpPr>
         <p:spPr>
           <a:xfrm>
-            <a:off x="914400" y="4599431"/>
+            <a:off x="6446520" y="3566160"/>
             <a:ext cx="411480" cy="411480"/>
           </a:xfrm>
           <a:prstGeom prst="ellipse">
             <a:avLst/>
           </a:prstGeom>
           <a:solidFill>
-            <a:srgbClr val="B7C2CC"/>
+            <a:srgbClr val="6A4C93"/>
           </a:solidFill>
           <a:ln>
             <a:noFill/>
@@ -23287,13 +23237,13 @@
       </p:sp>
       <p:sp>
         <p:nvSpPr>
-          <p:cNvPr id="18" name="TextBox 17"/>
-          <p:cNvSpPr txBox="1"/>
-          <p:nvPr/>
-        </p:nvSpPr>
-        <p:spPr>
-          <a:xfrm>
-            <a:off x="914400" y="4599431"/>
+          <p:cNvPr id="14" name="TextBox 13"/>
+          <p:cNvSpPr txBox="1"/>
+          <p:nvPr/>
+        </p:nvSpPr>
+        <p:spPr>
+          <a:xfrm>
+            <a:off x="6446520" y="3566160"/>
             <a:ext cx="411480" cy="411480"/>
           </a:xfrm>
           <a:prstGeom prst="rect">
@@ -23315,20 +23265,20 @@
                 </a:solidFill>
                 <a:latin typeface="Calibri"/>
               </a:rPr>
-              <a:t>C</a:t>
-            </a:r>
-          </a:p>
-        </p:txBody>
-      </p:sp>
-      <p:sp>
-        <p:nvSpPr>
-          <p:cNvPr id="19" name="TextBox 18"/>
-          <p:cNvSpPr txBox="1"/>
-          <p:nvPr/>
-        </p:nvSpPr>
-        <p:spPr>
-          <a:xfrm>
-            <a:off x="1508760" y="4370831"/>
+              <a:t>B</a:t>
+            </a:r>
+          </a:p>
+        </p:txBody>
+      </p:sp>
+      <p:sp>
+        <p:nvSpPr>
+          <p:cNvPr id="15" name="TextBox 14"/>
+          <p:cNvSpPr txBox="1"/>
+          <p:nvPr/>
+        </p:nvSpPr>
+        <p:spPr>
+          <a:xfrm>
+            <a:off x="7040880" y="3337560"/>
             <a:ext cx="4297680" cy="868680"/>
           </a:xfrm>
           <a:prstGeom prst="rect">
@@ -23346,24 +23296,24 @@
             <a:r>
               <a:rPr sz="1450" b="0" i="0">
                 <a:solidFill>
-                  <a:srgbClr val="6B7280"/>
-                </a:solidFill>
-                <a:latin typeface="Calibri"/>
-              </a:rPr>
-              <a:t>Work without electricity</a:t>
-            </a:r>
-          </a:p>
-        </p:txBody>
-      </p:sp>
-      <p:sp>
-        <p:nvSpPr>
-          <p:cNvPr id="20" name="Rounded Rectangle 19"/>
+                  <a:srgbClr val="1D2433"/>
+                </a:solidFill>
+                <a:latin typeface="Calibri"/>
+              </a:rPr>
+              <a:t>Be switched off to release the load</a:t>
+            </a:r>
+          </a:p>
+        </p:txBody>
+      </p:sp>
+      <p:sp>
+        <p:nvSpPr>
+          <p:cNvPr id="16" name="Rounded Rectangle 15"/>
           <p:cNvSpPr/>
           <p:nvPr/>
         </p:nvSpPr>
         <p:spPr>
           <a:xfrm>
-            <a:off x="6172200" y="4370831"/>
+            <a:off x="640080" y="4370831"/>
             <a:ext cx="5349240" cy="868680"/>
           </a:xfrm>
           <a:prstGeom prst="roundRect">
@@ -23403,20 +23353,20 @@
       </p:sp>
       <p:sp>
         <p:nvSpPr>
-          <p:cNvPr id="21" name="Oval 20"/>
+          <p:cNvPr id="17" name="Oval 16"/>
           <p:cNvSpPr/>
           <p:nvPr/>
         </p:nvSpPr>
         <p:spPr>
           <a:xfrm>
-            <a:off x="6446520" y="4599431"/>
+            <a:off x="914400" y="4599431"/>
             <a:ext cx="411480" cy="411480"/>
           </a:xfrm>
           <a:prstGeom prst="ellipse">
             <a:avLst/>
           </a:prstGeom>
           <a:solidFill>
-            <a:srgbClr val="B7C2CC"/>
+            <a:srgbClr val="6A4C93"/>
           </a:solidFill>
           <a:ln>
             <a:noFill/>
@@ -23447,13 +23397,13 @@
       </p:sp>
       <p:sp>
         <p:nvSpPr>
-          <p:cNvPr id="22" name="TextBox 21"/>
-          <p:cNvSpPr txBox="1"/>
-          <p:nvPr/>
-        </p:nvSpPr>
-        <p:spPr>
-          <a:xfrm>
-            <a:off x="6446520" y="4599431"/>
+          <p:cNvPr id="18" name="TextBox 17"/>
+          <p:cNvSpPr txBox="1"/>
+          <p:nvPr/>
+        </p:nvSpPr>
+        <p:spPr>
+          <a:xfrm>
+            <a:off x="914400" y="4599431"/>
             <a:ext cx="411480" cy="411480"/>
           </a:xfrm>
           <a:prstGeom prst="rect">
@@ -23475,20 +23425,20 @@
                 </a:solidFill>
                 <a:latin typeface="Calibri"/>
               </a:rPr>
-              <a:t>D</a:t>
-            </a:r>
-          </a:p>
-        </p:txBody>
-      </p:sp>
-      <p:sp>
-        <p:nvSpPr>
-          <p:cNvPr id="23" name="TextBox 22"/>
-          <p:cNvSpPr txBox="1"/>
-          <p:nvPr/>
-        </p:nvSpPr>
-        <p:spPr>
-          <a:xfrm>
-            <a:off x="7040880" y="4370831"/>
+              <a:t>C</a:t>
+            </a:r>
+          </a:p>
+        </p:txBody>
+      </p:sp>
+      <p:sp>
+        <p:nvSpPr>
+          <p:cNvPr id="19" name="TextBox 18"/>
+          <p:cNvSpPr txBox="1"/>
+          <p:nvPr/>
+        </p:nvSpPr>
+        <p:spPr>
+          <a:xfrm>
+            <a:off x="1508760" y="4370831"/>
             <a:ext cx="4297680" cy="868680"/>
           </a:xfrm>
           <a:prstGeom prst="rect">
@@ -23506,44 +23456,38 @@
             <a:r>
               <a:rPr sz="1450" b="0" i="0">
                 <a:solidFill>
-                  <a:srgbClr val="6B7280"/>
-                </a:solidFill>
-                <a:latin typeface="Calibri"/>
-              </a:rPr>
-              <a:t>Lift plastic too</a:t>
-            </a:r>
-          </a:p>
-        </p:txBody>
-      </p:sp>
-      <p:sp>
-        <p:nvSpPr>
-          <p:cNvPr id="24" name="Rounded Rectangle 23"/>
+                  <a:srgbClr val="1D2433"/>
+                </a:solidFill>
+                <a:latin typeface="Calibri"/>
+              </a:rPr>
+              <a:t>Work without electricity</a:t>
+            </a:r>
+          </a:p>
+        </p:txBody>
+      </p:sp>
+      <p:sp>
+        <p:nvSpPr>
+          <p:cNvPr id="20" name="Rounded Rectangle 19"/>
           <p:cNvSpPr/>
           <p:nvPr/>
         </p:nvSpPr>
         <p:spPr>
           <a:xfrm>
-            <a:off x="640080" y="5440680"/>
-            <a:ext cx="10881360" cy="1097280"/>
+            <a:off x="6172200" y="4370831"/>
+            <a:ext cx="5349240" cy="868680"/>
           </a:xfrm>
           <a:prstGeom prst="roundRect">
             <a:avLst>
-              <a:gd name="adj" fmla="val 5000"/>
+              <a:gd name="adj" fmla="val 12000"/>
             </a:avLst>
           </a:prstGeom>
           <a:solidFill>
-            <a:srgbClr val="FFFFFF"/>
+            <a:srgbClr val="EAF1F4"/>
           </a:solidFill>
           <a:ln>
             <a:noFill/>
           </a:ln>
-          <a:effectLst>
-            <a:outerShdw blurRad="88900" dist="38100" dir="5400000" rotWithShape="0" algn="bl">
-              <a:srgbClr val="000000">
-                <a:alpha val="16000"/>
-              </a:srgbClr>
-            </a:outerShdw>
-          </a:effectLst>
+          <a:effectLst/>
         </p:spPr>
         <p:style>
           <a:lnRef idx="1">
@@ -23569,74 +23513,114 @@
       </p:sp>
       <p:sp>
         <p:nvSpPr>
-          <p:cNvPr id="25" name="TextBox 24"/>
-          <p:cNvSpPr txBox="1"/>
-          <p:nvPr/>
-        </p:nvSpPr>
-        <p:spPr>
-          <a:xfrm>
-            <a:off x="1005840" y="5596128"/>
-            <a:ext cx="4572000" cy="320040"/>
-          </a:xfrm>
-          <a:prstGeom prst="rect">
-            <a:avLst/>
-          </a:prstGeom>
-          <a:noFill/>
-        </p:spPr>
-        <p:txBody>
-          <a:bodyPr wrap="square" anchor="t" lIns="0" rIns="0" tIns="0" bIns="0">
+          <p:cNvPr id="21" name="Oval 20"/>
+          <p:cNvSpPr/>
+          <p:nvPr/>
+        </p:nvSpPr>
+        <p:spPr>
+          <a:xfrm>
+            <a:off x="6446520" y="4599431"/>
+            <a:ext cx="411480" cy="411480"/>
+          </a:xfrm>
+          <a:prstGeom prst="ellipse">
+            <a:avLst/>
+          </a:prstGeom>
+          <a:solidFill>
+            <a:srgbClr val="6A4C93"/>
+          </a:solidFill>
+          <a:ln>
+            <a:noFill/>
+          </a:ln>
+          <a:effectLst/>
+        </p:spPr>
+        <p:style>
+          <a:lnRef idx="1">
+            <a:schemeClr val="accent1"/>
+          </a:lnRef>
+          <a:fillRef idx="3">
+            <a:schemeClr val="accent1"/>
+          </a:fillRef>
+          <a:effectRef idx="2">
+            <a:schemeClr val="accent1"/>
+          </a:effectRef>
+          <a:fontRef idx="minor">
+            <a:schemeClr val="lt1"/>
+          </a:fontRef>
+        </p:style>
+        <p:txBody>
+          <a:bodyPr rtlCol="0" anchor="ctr"/>
+          <a:lstStyle/>
+          <a:p>
+            <a:pPr algn="ctr"/>
+          </a:p>
+        </p:txBody>
+      </p:sp>
+      <p:sp>
+        <p:nvSpPr>
+          <p:cNvPr id="22" name="TextBox 21"/>
+          <p:cNvSpPr txBox="1"/>
+          <p:nvPr/>
+        </p:nvSpPr>
+        <p:spPr>
+          <a:xfrm>
+            <a:off x="6446520" y="4599431"/>
+            <a:ext cx="411480" cy="411480"/>
+          </a:xfrm>
+          <a:prstGeom prst="rect">
+            <a:avLst/>
+          </a:prstGeom>
+          <a:noFill/>
+        </p:spPr>
+        <p:txBody>
+          <a:bodyPr wrap="square" anchor="ctr" lIns="0" rIns="0" tIns="0" bIns="0">
+            <a:spAutoFit/>
+          </a:bodyPr>
+          <a:lstStyle/>
+          <a:p>
+            <a:pPr algn="ctr"/>
+            <a:r>
+              <a:rPr sz="1400" b="1" i="0">
+                <a:solidFill>
+                  <a:srgbClr val="FFFFFF"/>
+                </a:solidFill>
+                <a:latin typeface="Calibri"/>
+              </a:rPr>
+              <a:t>D</a:t>
+            </a:r>
+          </a:p>
+        </p:txBody>
+      </p:sp>
+      <p:sp>
+        <p:nvSpPr>
+          <p:cNvPr id="23" name="TextBox 22"/>
+          <p:cNvSpPr txBox="1"/>
+          <p:nvPr/>
+        </p:nvSpPr>
+        <p:spPr>
+          <a:xfrm>
+            <a:off x="7040880" y="4370831"/>
+            <a:ext cx="4297680" cy="868680"/>
+          </a:xfrm>
+          <a:prstGeom prst="rect">
+            <a:avLst/>
+          </a:prstGeom>
+          <a:noFill/>
+        </p:spPr>
+        <p:txBody>
+          <a:bodyPr wrap="square" anchor="ctr" lIns="0" rIns="0" tIns="0" bIns="0">
             <a:spAutoFit/>
           </a:bodyPr>
           <a:lstStyle/>
           <a:p>
             <a:pPr algn="l"/>
             <a:r>
-              <a:rPr sz="1300" b="1" i="0">
-                <a:solidFill>
-                  <a:srgbClr val="2A9D8F"/>
-                </a:solidFill>
-                <a:latin typeface="Arial"/>
-              </a:rPr>
-              <a:t>WHY</a:t>
-            </a:r>
-          </a:p>
-        </p:txBody>
-      </p:sp>
-      <p:sp>
-        <p:nvSpPr>
-          <p:cNvPr id="26" name="TextBox 25"/>
-          <p:cNvSpPr txBox="1"/>
-          <p:nvPr/>
-        </p:nvSpPr>
-        <p:spPr>
-          <a:xfrm>
-            <a:off x="1005840" y="5943600"/>
-            <a:ext cx="10149840" cy="548640"/>
-          </a:xfrm>
-          <a:prstGeom prst="rect">
-            <a:avLst/>
-          </a:prstGeom>
-          <a:noFill/>
-        </p:spPr>
-        <p:txBody>
-          <a:bodyPr wrap="square" anchor="t" lIns="0" rIns="0" tIns="0" bIns="0">
-            <a:spAutoFit/>
-          </a:bodyPr>
-          <a:lstStyle/>
-          <a:p>
-            <a:pPr algn="l">
-              <a:lnSpc>
-                <a:spcPct val="105000"/>
-              </a:lnSpc>
-            </a:pPr>
-            <a:r>
               <a:rPr sz="1450" b="0" i="0">
                 <a:solidFill>
                   <a:srgbClr val="1D2433"/>
                 </a:solidFill>
                 <a:latin typeface="Calibri"/>
               </a:rPr>
-              <a:t>The crane grabs the scrap when the current is on and drops it when the current is switched off — control a permanent magnet could never provide.</a:t>
+              <a:t>Lift plastic too</a:t>
             </a:r>
           </a:p>
         </p:txBody>
@@ -23726,7 +23710,7 @@
             <a:avLst/>
           </a:prstGeom>
           <a:solidFill>
-            <a:srgbClr val="6A4C93"/>
+            <a:srgbClr val="2A9D8F"/>
           </a:solidFill>
           <a:ln>
             <a:noFill/>
@@ -23781,11 +23765,11 @@
             <a:r>
               <a:rPr sz="1300" b="1" i="0">
                 <a:solidFill>
-                  <a:srgbClr val="6A4C93"/>
+                  <a:srgbClr val="2A9D8F"/>
                 </a:solidFill>
                 <a:latin typeface="Arial"/>
               </a:rPr>
-              <a:t>QUIZ QUESTION</a:t>
+              <a:t>ANSWER REVEALED</a:t>
             </a:r>
           </a:p>
         </p:txBody>
@@ -23820,7 +23804,7 @@
                 </a:solidFill>
                 <a:latin typeface="Calibri"/>
               </a:rPr>
-              <a:t>Q4 — Reverse Current</a:t>
+              <a:t>Q3 — Scrapyard Crane</a:t>
             </a:r>
           </a:p>
         </p:txBody>
@@ -23907,7 +23891,7 @@
                 </a:solidFill>
                 <a:latin typeface="Calibri"/>
               </a:rPr>
-              <a:t>Reversing the current through an electromagnet:</a:t>
+              <a:t>A scrapyard prefers an electromagnet to a permanent magnet for moving iron because it can:</a:t>
             </a:r>
           </a:p>
         </p:txBody>
@@ -23973,7 +23957,7 @@
             <a:avLst/>
           </a:prstGeom>
           <a:solidFill>
-            <a:srgbClr val="6A4C93"/>
+            <a:srgbClr val="B7C2CC"/>
           </a:solidFill>
           <a:ln>
             <a:noFill/>
@@ -24063,11 +24047,11 @@
             <a:r>
               <a:rPr sz="1450" b="0" i="0">
                 <a:solidFill>
-                  <a:srgbClr val="1D2433"/>
-                </a:solidFill>
-                <a:latin typeface="Calibri"/>
-              </a:rPr>
-              <a:t>Switches it off</a:t>
+                  <a:srgbClr val="6B7280"/>
+                </a:solidFill>
+                <a:latin typeface="Calibri"/>
+              </a:rPr>
+              <a:t>Never be switched off</a:t>
             </a:r>
           </a:p>
         </p:txBody>
@@ -24081,6 +24065,168 @@
         <p:spPr>
           <a:xfrm>
             <a:off x="6172200" y="3337560"/>
+            <a:ext cx="5349240" cy="868680"/>
+          </a:xfrm>
+          <a:prstGeom prst="roundRect">
+            <a:avLst>
+              <a:gd name="adj" fmla="val 12000"/>
+            </a:avLst>
+          </a:prstGeom>
+          <a:solidFill>
+            <a:srgbClr val="E9F5F0"/>
+          </a:solidFill>
+          <a:ln w="25400">
+            <a:solidFill>
+              <a:srgbClr val="2A9D8F"/>
+            </a:solidFill>
+          </a:ln>
+          <a:effectLst/>
+        </p:spPr>
+        <p:style>
+          <a:lnRef idx="1">
+            <a:schemeClr val="accent1"/>
+          </a:lnRef>
+          <a:fillRef idx="3">
+            <a:schemeClr val="accent1"/>
+          </a:fillRef>
+          <a:effectRef idx="2">
+            <a:schemeClr val="accent1"/>
+          </a:effectRef>
+          <a:fontRef idx="minor">
+            <a:schemeClr val="lt1"/>
+          </a:fontRef>
+        </p:style>
+        <p:txBody>
+          <a:bodyPr rtlCol="0" anchor="ctr"/>
+          <a:lstStyle/>
+          <a:p>
+            <a:pPr algn="ctr"/>
+          </a:p>
+        </p:txBody>
+      </p:sp>
+      <p:sp>
+        <p:nvSpPr>
+          <p:cNvPr id="13" name="Oval 12"/>
+          <p:cNvSpPr/>
+          <p:nvPr/>
+        </p:nvSpPr>
+        <p:spPr>
+          <a:xfrm>
+            <a:off x="6446520" y="3566160"/>
+            <a:ext cx="411480" cy="411480"/>
+          </a:xfrm>
+          <a:prstGeom prst="ellipse">
+            <a:avLst/>
+          </a:prstGeom>
+          <a:solidFill>
+            <a:srgbClr val="2A9D8F"/>
+          </a:solidFill>
+          <a:ln>
+            <a:noFill/>
+          </a:ln>
+          <a:effectLst/>
+        </p:spPr>
+        <p:style>
+          <a:lnRef idx="1">
+            <a:schemeClr val="accent1"/>
+          </a:lnRef>
+          <a:fillRef idx="3">
+            <a:schemeClr val="accent1"/>
+          </a:fillRef>
+          <a:effectRef idx="2">
+            <a:schemeClr val="accent1"/>
+          </a:effectRef>
+          <a:fontRef idx="minor">
+            <a:schemeClr val="lt1"/>
+          </a:fontRef>
+        </p:style>
+        <p:txBody>
+          <a:bodyPr rtlCol="0" anchor="ctr"/>
+          <a:lstStyle/>
+          <a:p>
+            <a:pPr algn="ctr"/>
+          </a:p>
+        </p:txBody>
+      </p:sp>
+      <p:sp>
+        <p:nvSpPr>
+          <p:cNvPr id="14" name="TextBox 13"/>
+          <p:cNvSpPr txBox="1"/>
+          <p:nvPr/>
+        </p:nvSpPr>
+        <p:spPr>
+          <a:xfrm>
+            <a:off x="6446520" y="3566160"/>
+            <a:ext cx="411480" cy="411480"/>
+          </a:xfrm>
+          <a:prstGeom prst="rect">
+            <a:avLst/>
+          </a:prstGeom>
+          <a:noFill/>
+        </p:spPr>
+        <p:txBody>
+          <a:bodyPr wrap="square" anchor="ctr" lIns="0" rIns="0" tIns="0" bIns="0">
+            <a:spAutoFit/>
+          </a:bodyPr>
+          <a:lstStyle/>
+          <a:p>
+            <a:pPr algn="ctr"/>
+            <a:r>
+              <a:rPr sz="1400" b="1" i="0">
+                <a:solidFill>
+                  <a:srgbClr val="FFFFFF"/>
+                </a:solidFill>
+                <a:latin typeface="Calibri"/>
+              </a:rPr>
+              <a:t>✓</a:t>
+            </a:r>
+          </a:p>
+        </p:txBody>
+      </p:sp>
+      <p:sp>
+        <p:nvSpPr>
+          <p:cNvPr id="15" name="TextBox 14"/>
+          <p:cNvSpPr txBox="1"/>
+          <p:nvPr/>
+        </p:nvSpPr>
+        <p:spPr>
+          <a:xfrm>
+            <a:off x="7040880" y="3337560"/>
+            <a:ext cx="4297680" cy="868680"/>
+          </a:xfrm>
+          <a:prstGeom prst="rect">
+            <a:avLst/>
+          </a:prstGeom>
+          <a:noFill/>
+        </p:spPr>
+        <p:txBody>
+          <a:bodyPr wrap="square" anchor="ctr" lIns="0" rIns="0" tIns="0" bIns="0">
+            <a:spAutoFit/>
+          </a:bodyPr>
+          <a:lstStyle/>
+          <a:p>
+            <a:pPr algn="l"/>
+            <a:r>
+              <a:rPr sz="1450" b="1" i="0">
+                <a:solidFill>
+                  <a:srgbClr val="1D2433"/>
+                </a:solidFill>
+                <a:latin typeface="Calibri"/>
+              </a:rPr>
+              <a:t>Be switched off to release the load</a:t>
+            </a:r>
+          </a:p>
+        </p:txBody>
+      </p:sp>
+      <p:sp>
+        <p:nvSpPr>
+          <p:cNvPr id="16" name="Rounded Rectangle 15"/>
+          <p:cNvSpPr/>
+          <p:nvPr/>
+        </p:nvSpPr>
+        <p:spPr>
+          <a:xfrm>
+            <a:off x="640080" y="4370831"/>
             <a:ext cx="5349240" cy="868680"/>
           </a:xfrm>
           <a:prstGeom prst="roundRect">
@@ -24120,20 +24266,20 @@
       </p:sp>
       <p:sp>
         <p:nvSpPr>
-          <p:cNvPr id="13" name="Oval 12"/>
+          <p:cNvPr id="17" name="Oval 16"/>
           <p:cNvSpPr/>
           <p:nvPr/>
         </p:nvSpPr>
         <p:spPr>
           <a:xfrm>
-            <a:off x="6446520" y="3566160"/>
+            <a:off x="914400" y="4599431"/>
             <a:ext cx="411480" cy="411480"/>
           </a:xfrm>
           <a:prstGeom prst="ellipse">
             <a:avLst/>
           </a:prstGeom>
           <a:solidFill>
-            <a:srgbClr val="6A4C93"/>
+            <a:srgbClr val="B7C2CC"/>
           </a:solidFill>
           <a:ln>
             <a:noFill/>
@@ -24164,13 +24310,13 @@
       </p:sp>
       <p:sp>
         <p:nvSpPr>
-          <p:cNvPr id="14" name="TextBox 13"/>
-          <p:cNvSpPr txBox="1"/>
-          <p:nvPr/>
-        </p:nvSpPr>
-        <p:spPr>
-          <a:xfrm>
-            <a:off x="6446520" y="3566160"/>
+          <p:cNvPr id="18" name="TextBox 17"/>
+          <p:cNvSpPr txBox="1"/>
+          <p:nvPr/>
+        </p:nvSpPr>
+        <p:spPr>
+          <a:xfrm>
+            <a:off x="914400" y="4599431"/>
             <a:ext cx="411480" cy="411480"/>
           </a:xfrm>
           <a:prstGeom prst="rect">
@@ -24192,20 +24338,20 @@
                 </a:solidFill>
                 <a:latin typeface="Calibri"/>
               </a:rPr>
-              <a:t>B</a:t>
-            </a:r>
-          </a:p>
-        </p:txBody>
-      </p:sp>
-      <p:sp>
-        <p:nvSpPr>
-          <p:cNvPr id="15" name="TextBox 14"/>
-          <p:cNvSpPr txBox="1"/>
-          <p:nvPr/>
-        </p:nvSpPr>
-        <p:spPr>
-          <a:xfrm>
-            <a:off x="7040880" y="3337560"/>
+              <a:t>C</a:t>
+            </a:r>
+          </a:p>
+        </p:txBody>
+      </p:sp>
+      <p:sp>
+        <p:nvSpPr>
+          <p:cNvPr id="19" name="TextBox 18"/>
+          <p:cNvSpPr txBox="1"/>
+          <p:nvPr/>
+        </p:nvSpPr>
+        <p:spPr>
+          <a:xfrm>
+            <a:off x="1508760" y="4370831"/>
             <a:ext cx="4297680" cy="868680"/>
           </a:xfrm>
           <a:prstGeom prst="rect">
@@ -24223,24 +24369,24 @@
             <a:r>
               <a:rPr sz="1450" b="0" i="0">
                 <a:solidFill>
-                  <a:srgbClr val="1D2433"/>
-                </a:solidFill>
-                <a:latin typeface="Calibri"/>
-              </a:rPr>
-              <a:t>Swaps its north and south poles</a:t>
-            </a:r>
-          </a:p>
-        </p:txBody>
-      </p:sp>
-      <p:sp>
-        <p:nvSpPr>
-          <p:cNvPr id="16" name="Rounded Rectangle 15"/>
+                  <a:srgbClr val="6B7280"/>
+                </a:solidFill>
+                <a:latin typeface="Calibri"/>
+              </a:rPr>
+              <a:t>Work without electricity</a:t>
+            </a:r>
+          </a:p>
+        </p:txBody>
+      </p:sp>
+      <p:sp>
+        <p:nvSpPr>
+          <p:cNvPr id="20" name="Rounded Rectangle 19"/>
           <p:cNvSpPr/>
           <p:nvPr/>
         </p:nvSpPr>
         <p:spPr>
           <a:xfrm>
-            <a:off x="640080" y="4370831"/>
+            <a:off x="6172200" y="4370831"/>
             <a:ext cx="5349240" cy="868680"/>
           </a:xfrm>
           <a:prstGeom prst="roundRect">
@@ -24280,20 +24426,20 @@
       </p:sp>
       <p:sp>
         <p:nvSpPr>
-          <p:cNvPr id="17" name="Oval 16"/>
+          <p:cNvPr id="21" name="Oval 20"/>
           <p:cNvSpPr/>
           <p:nvPr/>
         </p:nvSpPr>
         <p:spPr>
           <a:xfrm>
-            <a:off x="914400" y="4599431"/>
+            <a:off x="6446520" y="4599431"/>
             <a:ext cx="411480" cy="411480"/>
           </a:xfrm>
           <a:prstGeom prst="ellipse">
             <a:avLst/>
           </a:prstGeom>
           <a:solidFill>
-            <a:srgbClr val="6A4C93"/>
+            <a:srgbClr val="B7C2CC"/>
           </a:solidFill>
           <a:ln>
             <a:noFill/>
@@ -24324,13 +24470,13 @@
       </p:sp>
       <p:sp>
         <p:nvSpPr>
-          <p:cNvPr id="18" name="TextBox 17"/>
-          <p:cNvSpPr txBox="1"/>
-          <p:nvPr/>
-        </p:nvSpPr>
-        <p:spPr>
-          <a:xfrm>
-            <a:off x="914400" y="4599431"/>
+          <p:cNvPr id="22" name="TextBox 21"/>
+          <p:cNvSpPr txBox="1"/>
+          <p:nvPr/>
+        </p:nvSpPr>
+        <p:spPr>
+          <a:xfrm>
+            <a:off x="6446520" y="4599431"/>
             <a:ext cx="411480" cy="411480"/>
           </a:xfrm>
           <a:prstGeom prst="rect">
@@ -24352,20 +24498,20 @@
                 </a:solidFill>
                 <a:latin typeface="Calibri"/>
               </a:rPr>
-              <a:t>C</a:t>
-            </a:r>
-          </a:p>
-        </p:txBody>
-      </p:sp>
-      <p:sp>
-        <p:nvSpPr>
-          <p:cNvPr id="19" name="TextBox 18"/>
-          <p:cNvSpPr txBox="1"/>
-          <p:nvPr/>
-        </p:nvSpPr>
-        <p:spPr>
-          <a:xfrm>
-            <a:off x="1508760" y="4370831"/>
+              <a:t>D</a:t>
+            </a:r>
+          </a:p>
+        </p:txBody>
+      </p:sp>
+      <p:sp>
+        <p:nvSpPr>
+          <p:cNvPr id="23" name="TextBox 22"/>
+          <p:cNvSpPr txBox="1"/>
+          <p:nvPr/>
+        </p:nvSpPr>
+        <p:spPr>
+          <a:xfrm>
+            <a:off x="7040880" y="4370831"/>
             <a:ext cx="4297680" cy="868680"/>
           </a:xfrm>
           <a:prstGeom prst="rect">
@@ -24383,38 +24529,44 @@
             <a:r>
               <a:rPr sz="1450" b="0" i="0">
                 <a:solidFill>
-                  <a:srgbClr val="1D2433"/>
-                </a:solidFill>
-                <a:latin typeface="Calibri"/>
-              </a:rPr>
-              <a:t>Doubles its strength</a:t>
-            </a:r>
-          </a:p>
-        </p:txBody>
-      </p:sp>
-      <p:sp>
-        <p:nvSpPr>
-          <p:cNvPr id="20" name="Rounded Rectangle 19"/>
+                  <a:srgbClr val="6B7280"/>
+                </a:solidFill>
+                <a:latin typeface="Calibri"/>
+              </a:rPr>
+              <a:t>Lift plastic too</a:t>
+            </a:r>
+          </a:p>
+        </p:txBody>
+      </p:sp>
+      <p:sp>
+        <p:nvSpPr>
+          <p:cNvPr id="24" name="Rounded Rectangle 23"/>
           <p:cNvSpPr/>
           <p:nvPr/>
         </p:nvSpPr>
         <p:spPr>
           <a:xfrm>
-            <a:off x="6172200" y="4370831"/>
-            <a:ext cx="5349240" cy="868680"/>
+            <a:off x="640080" y="5440680"/>
+            <a:ext cx="10881360" cy="1097280"/>
           </a:xfrm>
           <a:prstGeom prst="roundRect">
             <a:avLst>
-              <a:gd name="adj" fmla="val 12000"/>
+              <a:gd name="adj" fmla="val 5000"/>
             </a:avLst>
           </a:prstGeom>
           <a:solidFill>
-            <a:srgbClr val="EAF1F4"/>
+            <a:srgbClr val="FFFFFF"/>
           </a:solidFill>
           <a:ln>
             <a:noFill/>
           </a:ln>
-          <a:effectLst/>
+          <a:effectLst>
+            <a:outerShdw blurRad="88900" dist="38100" dir="5400000" rotWithShape="0" algn="bl">
+              <a:srgbClr val="000000">
+                <a:alpha val="16000"/>
+              </a:srgbClr>
+            </a:outerShdw>
+          </a:effectLst>
         </p:spPr>
         <p:style>
           <a:lnRef idx="1">
@@ -24440,114 +24592,74 @@
       </p:sp>
       <p:sp>
         <p:nvSpPr>
-          <p:cNvPr id="21" name="Oval 20"/>
-          <p:cNvSpPr/>
-          <p:nvPr/>
-        </p:nvSpPr>
-        <p:spPr>
-          <a:xfrm>
-            <a:off x="6446520" y="4599431"/>
-            <a:ext cx="411480" cy="411480"/>
-          </a:xfrm>
-          <a:prstGeom prst="ellipse">
-            <a:avLst/>
-          </a:prstGeom>
-          <a:solidFill>
-            <a:srgbClr val="6A4C93"/>
-          </a:solidFill>
-          <a:ln>
-            <a:noFill/>
-          </a:ln>
-          <a:effectLst/>
-        </p:spPr>
-        <p:style>
-          <a:lnRef idx="1">
-            <a:schemeClr val="accent1"/>
-          </a:lnRef>
-          <a:fillRef idx="3">
-            <a:schemeClr val="accent1"/>
-          </a:fillRef>
-          <a:effectRef idx="2">
-            <a:schemeClr val="accent1"/>
-          </a:effectRef>
-          <a:fontRef idx="minor">
-            <a:schemeClr val="lt1"/>
-          </a:fontRef>
-        </p:style>
-        <p:txBody>
-          <a:bodyPr rtlCol="0" anchor="ctr"/>
-          <a:lstStyle/>
-          <a:p>
-            <a:pPr algn="ctr"/>
-          </a:p>
-        </p:txBody>
-      </p:sp>
-      <p:sp>
-        <p:nvSpPr>
-          <p:cNvPr id="22" name="TextBox 21"/>
-          <p:cNvSpPr txBox="1"/>
-          <p:nvPr/>
-        </p:nvSpPr>
-        <p:spPr>
-          <a:xfrm>
-            <a:off x="6446520" y="4599431"/>
-            <a:ext cx="411480" cy="411480"/>
-          </a:xfrm>
-          <a:prstGeom prst="rect">
-            <a:avLst/>
-          </a:prstGeom>
-          <a:noFill/>
-        </p:spPr>
-        <p:txBody>
-          <a:bodyPr wrap="square" anchor="ctr" lIns="0" rIns="0" tIns="0" bIns="0">
-            <a:spAutoFit/>
-          </a:bodyPr>
-          <a:lstStyle/>
-          <a:p>
-            <a:pPr algn="ctr"/>
-            <a:r>
-              <a:rPr sz="1400" b="1" i="0">
-                <a:solidFill>
-                  <a:srgbClr val="FFFFFF"/>
-                </a:solidFill>
-                <a:latin typeface="Calibri"/>
-              </a:rPr>
-              <a:t>D</a:t>
-            </a:r>
-          </a:p>
-        </p:txBody>
-      </p:sp>
-      <p:sp>
-        <p:nvSpPr>
-          <p:cNvPr id="23" name="TextBox 22"/>
-          <p:cNvSpPr txBox="1"/>
-          <p:nvPr/>
-        </p:nvSpPr>
-        <p:spPr>
-          <a:xfrm>
-            <a:off x="7040880" y="4370831"/>
-            <a:ext cx="4297680" cy="868680"/>
-          </a:xfrm>
-          <a:prstGeom prst="rect">
-            <a:avLst/>
-          </a:prstGeom>
-          <a:noFill/>
-        </p:spPr>
-        <p:txBody>
-          <a:bodyPr wrap="square" anchor="ctr" lIns="0" rIns="0" tIns="0" bIns="0">
+          <p:cNvPr id="25" name="TextBox 24"/>
+          <p:cNvSpPr txBox="1"/>
+          <p:nvPr/>
+        </p:nvSpPr>
+        <p:spPr>
+          <a:xfrm>
+            <a:off x="1005840" y="5596128"/>
+            <a:ext cx="4572000" cy="320040"/>
+          </a:xfrm>
+          <a:prstGeom prst="rect">
+            <a:avLst/>
+          </a:prstGeom>
+          <a:noFill/>
+        </p:spPr>
+        <p:txBody>
+          <a:bodyPr wrap="square" anchor="t" lIns="0" rIns="0" tIns="0" bIns="0">
             <a:spAutoFit/>
           </a:bodyPr>
           <a:lstStyle/>
           <a:p>
             <a:pPr algn="l"/>
             <a:r>
+              <a:rPr sz="1300" b="1" i="0">
+                <a:solidFill>
+                  <a:srgbClr val="2A9D8F"/>
+                </a:solidFill>
+                <a:latin typeface="Arial"/>
+              </a:rPr>
+              <a:t>WHY</a:t>
+            </a:r>
+          </a:p>
+        </p:txBody>
+      </p:sp>
+      <p:sp>
+        <p:nvSpPr>
+          <p:cNvPr id="26" name="TextBox 25"/>
+          <p:cNvSpPr txBox="1"/>
+          <p:nvPr/>
+        </p:nvSpPr>
+        <p:spPr>
+          <a:xfrm>
+            <a:off x="1005840" y="5943600"/>
+            <a:ext cx="10149840" cy="548640"/>
+          </a:xfrm>
+          <a:prstGeom prst="rect">
+            <a:avLst/>
+          </a:prstGeom>
+          <a:noFill/>
+        </p:spPr>
+        <p:txBody>
+          <a:bodyPr wrap="square" anchor="t" lIns="0" rIns="0" tIns="0" bIns="0">
+            <a:spAutoFit/>
+          </a:bodyPr>
+          <a:lstStyle/>
+          <a:p>
+            <a:pPr algn="l">
+              <a:lnSpc>
+                <a:spcPct val="105000"/>
+              </a:lnSpc>
+            </a:pPr>
+            <a:r>
               <a:rPr sz="1450" b="0" i="0">
                 <a:solidFill>
                   <a:srgbClr val="1D2433"/>
                 </a:solidFill>
                 <a:latin typeface="Calibri"/>
               </a:rPr>
-              <a:t>Has no effect</a:t>
+              <a:t>The crane grabs the scrap when the current is on and drops it when the current is switched off — control a permanent magnet could never provide.</a:t>
             </a:r>
           </a:p>
         </p:txBody>
@@ -24637,7 +24749,7 @@
             <a:avLst/>
           </a:prstGeom>
           <a:solidFill>
-            <a:srgbClr val="2A9D8F"/>
+            <a:srgbClr val="6A4C93"/>
           </a:solidFill>
           <a:ln>
             <a:noFill/>
@@ -24692,11 +24804,11 @@
             <a:r>
               <a:rPr sz="1300" b="1" i="0">
                 <a:solidFill>
-                  <a:srgbClr val="2A9D8F"/>
+                  <a:srgbClr val="6A4C93"/>
                 </a:solidFill>
                 <a:latin typeface="Arial"/>
               </a:rPr>
-              <a:t>ANSWER REVEALED</a:t>
+              <a:t>QUIZ QUESTION</a:t>
             </a:r>
           </a:p>
         </p:txBody>
@@ -24884,7 +24996,7 @@
             <a:avLst/>
           </a:prstGeom>
           <a:solidFill>
-            <a:srgbClr val="B7C2CC"/>
+            <a:srgbClr val="6A4C93"/>
           </a:solidFill>
           <a:ln>
             <a:noFill/>
@@ -24974,7 +25086,7 @@
             <a:r>
               <a:rPr sz="1450" b="0" i="0">
                 <a:solidFill>
-                  <a:srgbClr val="6B7280"/>
+                  <a:srgbClr val="1D2433"/>
                 </a:solidFill>
                 <a:latin typeface="Calibri"/>
               </a:rPr>
@@ -24992,168 +25104,6 @@
         <p:spPr>
           <a:xfrm>
             <a:off x="6172200" y="3337560"/>
-            <a:ext cx="5349240" cy="868680"/>
-          </a:xfrm>
-          <a:prstGeom prst="roundRect">
-            <a:avLst>
-              <a:gd name="adj" fmla="val 12000"/>
-            </a:avLst>
-          </a:prstGeom>
-          <a:solidFill>
-            <a:srgbClr val="E9F5F0"/>
-          </a:solidFill>
-          <a:ln w="25400">
-            <a:solidFill>
-              <a:srgbClr val="2A9D8F"/>
-            </a:solidFill>
-          </a:ln>
-          <a:effectLst/>
-        </p:spPr>
-        <p:style>
-          <a:lnRef idx="1">
-            <a:schemeClr val="accent1"/>
-          </a:lnRef>
-          <a:fillRef idx="3">
-            <a:schemeClr val="accent1"/>
-          </a:fillRef>
-          <a:effectRef idx="2">
-            <a:schemeClr val="accent1"/>
-          </a:effectRef>
-          <a:fontRef idx="minor">
-            <a:schemeClr val="lt1"/>
-          </a:fontRef>
-        </p:style>
-        <p:txBody>
-          <a:bodyPr rtlCol="0" anchor="ctr"/>
-          <a:lstStyle/>
-          <a:p>
-            <a:pPr algn="ctr"/>
-          </a:p>
-        </p:txBody>
-      </p:sp>
-      <p:sp>
-        <p:nvSpPr>
-          <p:cNvPr id="13" name="Oval 12"/>
-          <p:cNvSpPr/>
-          <p:nvPr/>
-        </p:nvSpPr>
-        <p:spPr>
-          <a:xfrm>
-            <a:off x="6446520" y="3566160"/>
-            <a:ext cx="411480" cy="411480"/>
-          </a:xfrm>
-          <a:prstGeom prst="ellipse">
-            <a:avLst/>
-          </a:prstGeom>
-          <a:solidFill>
-            <a:srgbClr val="2A9D8F"/>
-          </a:solidFill>
-          <a:ln>
-            <a:noFill/>
-          </a:ln>
-          <a:effectLst/>
-        </p:spPr>
-        <p:style>
-          <a:lnRef idx="1">
-            <a:schemeClr val="accent1"/>
-          </a:lnRef>
-          <a:fillRef idx="3">
-            <a:schemeClr val="accent1"/>
-          </a:fillRef>
-          <a:effectRef idx="2">
-            <a:schemeClr val="accent1"/>
-          </a:effectRef>
-          <a:fontRef idx="minor">
-            <a:schemeClr val="lt1"/>
-          </a:fontRef>
-        </p:style>
-        <p:txBody>
-          <a:bodyPr rtlCol="0" anchor="ctr"/>
-          <a:lstStyle/>
-          <a:p>
-            <a:pPr algn="ctr"/>
-          </a:p>
-        </p:txBody>
-      </p:sp>
-      <p:sp>
-        <p:nvSpPr>
-          <p:cNvPr id="14" name="TextBox 13"/>
-          <p:cNvSpPr txBox="1"/>
-          <p:nvPr/>
-        </p:nvSpPr>
-        <p:spPr>
-          <a:xfrm>
-            <a:off x="6446520" y="3566160"/>
-            <a:ext cx="411480" cy="411480"/>
-          </a:xfrm>
-          <a:prstGeom prst="rect">
-            <a:avLst/>
-          </a:prstGeom>
-          <a:noFill/>
-        </p:spPr>
-        <p:txBody>
-          <a:bodyPr wrap="square" anchor="ctr" lIns="0" rIns="0" tIns="0" bIns="0">
-            <a:spAutoFit/>
-          </a:bodyPr>
-          <a:lstStyle/>
-          <a:p>
-            <a:pPr algn="ctr"/>
-            <a:r>
-              <a:rPr sz="1400" b="1" i="0">
-                <a:solidFill>
-                  <a:srgbClr val="FFFFFF"/>
-                </a:solidFill>
-                <a:latin typeface="Calibri"/>
-              </a:rPr>
-              <a:t>✓</a:t>
-            </a:r>
-          </a:p>
-        </p:txBody>
-      </p:sp>
-      <p:sp>
-        <p:nvSpPr>
-          <p:cNvPr id="15" name="TextBox 14"/>
-          <p:cNvSpPr txBox="1"/>
-          <p:nvPr/>
-        </p:nvSpPr>
-        <p:spPr>
-          <a:xfrm>
-            <a:off x="7040880" y="3337560"/>
-            <a:ext cx="4297680" cy="868680"/>
-          </a:xfrm>
-          <a:prstGeom prst="rect">
-            <a:avLst/>
-          </a:prstGeom>
-          <a:noFill/>
-        </p:spPr>
-        <p:txBody>
-          <a:bodyPr wrap="square" anchor="ctr" lIns="0" rIns="0" tIns="0" bIns="0">
-            <a:spAutoFit/>
-          </a:bodyPr>
-          <a:lstStyle/>
-          <a:p>
-            <a:pPr algn="l"/>
-            <a:r>
-              <a:rPr sz="1450" b="1" i="0">
-                <a:solidFill>
-                  <a:srgbClr val="1D2433"/>
-                </a:solidFill>
-                <a:latin typeface="Calibri"/>
-              </a:rPr>
-              <a:t>Swaps its north and south poles</a:t>
-            </a:r>
-          </a:p>
-        </p:txBody>
-      </p:sp>
-      <p:sp>
-        <p:nvSpPr>
-          <p:cNvPr id="16" name="Rounded Rectangle 15"/>
-          <p:cNvSpPr/>
-          <p:nvPr/>
-        </p:nvSpPr>
-        <p:spPr>
-          <a:xfrm>
-            <a:off x="640080" y="4370831"/>
             <a:ext cx="5349240" cy="868680"/>
           </a:xfrm>
           <a:prstGeom prst="roundRect">
@@ -25193,20 +25143,20 @@
       </p:sp>
       <p:sp>
         <p:nvSpPr>
-          <p:cNvPr id="17" name="Oval 16"/>
+          <p:cNvPr id="13" name="Oval 12"/>
           <p:cNvSpPr/>
           <p:nvPr/>
         </p:nvSpPr>
         <p:spPr>
           <a:xfrm>
-            <a:off x="914400" y="4599431"/>
+            <a:off x="6446520" y="3566160"/>
             <a:ext cx="411480" cy="411480"/>
           </a:xfrm>
           <a:prstGeom prst="ellipse">
             <a:avLst/>
           </a:prstGeom>
           <a:solidFill>
-            <a:srgbClr val="B7C2CC"/>
+            <a:srgbClr val="6A4C93"/>
           </a:solidFill>
           <a:ln>
             <a:noFill/>
@@ -25237,13 +25187,13 @@
       </p:sp>
       <p:sp>
         <p:nvSpPr>
-          <p:cNvPr id="18" name="TextBox 17"/>
-          <p:cNvSpPr txBox="1"/>
-          <p:nvPr/>
-        </p:nvSpPr>
-        <p:spPr>
-          <a:xfrm>
-            <a:off x="914400" y="4599431"/>
+          <p:cNvPr id="14" name="TextBox 13"/>
+          <p:cNvSpPr txBox="1"/>
+          <p:nvPr/>
+        </p:nvSpPr>
+        <p:spPr>
+          <a:xfrm>
+            <a:off x="6446520" y="3566160"/>
             <a:ext cx="411480" cy="411480"/>
           </a:xfrm>
           <a:prstGeom prst="rect">
@@ -25265,20 +25215,20 @@
                 </a:solidFill>
                 <a:latin typeface="Calibri"/>
               </a:rPr>
-              <a:t>C</a:t>
-            </a:r>
-          </a:p>
-        </p:txBody>
-      </p:sp>
-      <p:sp>
-        <p:nvSpPr>
-          <p:cNvPr id="19" name="TextBox 18"/>
-          <p:cNvSpPr txBox="1"/>
-          <p:nvPr/>
-        </p:nvSpPr>
-        <p:spPr>
-          <a:xfrm>
-            <a:off x="1508760" y="4370831"/>
+              <a:t>B</a:t>
+            </a:r>
+          </a:p>
+        </p:txBody>
+      </p:sp>
+      <p:sp>
+        <p:nvSpPr>
+          <p:cNvPr id="15" name="TextBox 14"/>
+          <p:cNvSpPr txBox="1"/>
+          <p:nvPr/>
+        </p:nvSpPr>
+        <p:spPr>
+          <a:xfrm>
+            <a:off x="7040880" y="3337560"/>
             <a:ext cx="4297680" cy="868680"/>
           </a:xfrm>
           <a:prstGeom prst="rect">
@@ -25296,24 +25246,24 @@
             <a:r>
               <a:rPr sz="1450" b="0" i="0">
                 <a:solidFill>
-                  <a:srgbClr val="6B7280"/>
-                </a:solidFill>
-                <a:latin typeface="Calibri"/>
-              </a:rPr>
-              <a:t>Doubles its strength</a:t>
-            </a:r>
-          </a:p>
-        </p:txBody>
-      </p:sp>
-      <p:sp>
-        <p:nvSpPr>
-          <p:cNvPr id="20" name="Rounded Rectangle 19"/>
+                  <a:srgbClr val="1D2433"/>
+                </a:solidFill>
+                <a:latin typeface="Calibri"/>
+              </a:rPr>
+              <a:t>Swaps its north and south poles</a:t>
+            </a:r>
+          </a:p>
+        </p:txBody>
+      </p:sp>
+      <p:sp>
+        <p:nvSpPr>
+          <p:cNvPr id="16" name="Rounded Rectangle 15"/>
           <p:cNvSpPr/>
           <p:nvPr/>
         </p:nvSpPr>
         <p:spPr>
           <a:xfrm>
-            <a:off x="6172200" y="4370831"/>
+            <a:off x="640080" y="4370831"/>
             <a:ext cx="5349240" cy="868680"/>
           </a:xfrm>
           <a:prstGeom prst="roundRect">
@@ -25353,20 +25303,20 @@
       </p:sp>
       <p:sp>
         <p:nvSpPr>
-          <p:cNvPr id="21" name="Oval 20"/>
+          <p:cNvPr id="17" name="Oval 16"/>
           <p:cNvSpPr/>
           <p:nvPr/>
         </p:nvSpPr>
         <p:spPr>
           <a:xfrm>
-            <a:off x="6446520" y="4599431"/>
+            <a:off x="914400" y="4599431"/>
             <a:ext cx="411480" cy="411480"/>
           </a:xfrm>
           <a:prstGeom prst="ellipse">
             <a:avLst/>
           </a:prstGeom>
           <a:solidFill>
-            <a:srgbClr val="B7C2CC"/>
+            <a:srgbClr val="6A4C93"/>
           </a:solidFill>
           <a:ln>
             <a:noFill/>
@@ -25397,13 +25347,13 @@
       </p:sp>
       <p:sp>
         <p:nvSpPr>
-          <p:cNvPr id="22" name="TextBox 21"/>
-          <p:cNvSpPr txBox="1"/>
-          <p:nvPr/>
-        </p:nvSpPr>
-        <p:spPr>
-          <a:xfrm>
-            <a:off x="6446520" y="4599431"/>
+          <p:cNvPr id="18" name="TextBox 17"/>
+          <p:cNvSpPr txBox="1"/>
+          <p:nvPr/>
+        </p:nvSpPr>
+        <p:spPr>
+          <a:xfrm>
+            <a:off x="914400" y="4599431"/>
             <a:ext cx="411480" cy="411480"/>
           </a:xfrm>
           <a:prstGeom prst="rect">
@@ -25425,20 +25375,20 @@
                 </a:solidFill>
                 <a:latin typeface="Calibri"/>
               </a:rPr>
-              <a:t>D</a:t>
-            </a:r>
-          </a:p>
-        </p:txBody>
-      </p:sp>
-      <p:sp>
-        <p:nvSpPr>
-          <p:cNvPr id="23" name="TextBox 22"/>
-          <p:cNvSpPr txBox="1"/>
-          <p:nvPr/>
-        </p:nvSpPr>
-        <p:spPr>
-          <a:xfrm>
-            <a:off x="7040880" y="4370831"/>
+              <a:t>C</a:t>
+            </a:r>
+          </a:p>
+        </p:txBody>
+      </p:sp>
+      <p:sp>
+        <p:nvSpPr>
+          <p:cNvPr id="19" name="TextBox 18"/>
+          <p:cNvSpPr txBox="1"/>
+          <p:nvPr/>
+        </p:nvSpPr>
+        <p:spPr>
+          <a:xfrm>
+            <a:off x="1508760" y="4370831"/>
             <a:ext cx="4297680" cy="868680"/>
           </a:xfrm>
           <a:prstGeom prst="rect">
@@ -25456,44 +25406,38 @@
             <a:r>
               <a:rPr sz="1450" b="0" i="0">
                 <a:solidFill>
-                  <a:srgbClr val="6B7280"/>
-                </a:solidFill>
-                <a:latin typeface="Calibri"/>
-              </a:rPr>
-              <a:t>Has no effect</a:t>
-            </a:r>
-          </a:p>
-        </p:txBody>
-      </p:sp>
-      <p:sp>
-        <p:nvSpPr>
-          <p:cNvPr id="24" name="Rounded Rectangle 23"/>
+                  <a:srgbClr val="1D2433"/>
+                </a:solidFill>
+                <a:latin typeface="Calibri"/>
+              </a:rPr>
+              <a:t>Doubles its strength</a:t>
+            </a:r>
+          </a:p>
+        </p:txBody>
+      </p:sp>
+      <p:sp>
+        <p:nvSpPr>
+          <p:cNvPr id="20" name="Rounded Rectangle 19"/>
           <p:cNvSpPr/>
           <p:nvPr/>
         </p:nvSpPr>
         <p:spPr>
           <a:xfrm>
-            <a:off x="640080" y="5440680"/>
-            <a:ext cx="10881360" cy="1097280"/>
+            <a:off x="6172200" y="4370831"/>
+            <a:ext cx="5349240" cy="868680"/>
           </a:xfrm>
           <a:prstGeom prst="roundRect">
             <a:avLst>
-              <a:gd name="adj" fmla="val 5000"/>
+              <a:gd name="adj" fmla="val 12000"/>
             </a:avLst>
           </a:prstGeom>
           <a:solidFill>
-            <a:srgbClr val="FFFFFF"/>
+            <a:srgbClr val="EAF1F4"/>
           </a:solidFill>
           <a:ln>
             <a:noFill/>
           </a:ln>
-          <a:effectLst>
-            <a:outerShdw blurRad="88900" dist="38100" dir="5400000" rotWithShape="0" algn="bl">
-              <a:srgbClr val="000000">
-                <a:alpha val="16000"/>
-              </a:srgbClr>
-            </a:outerShdw>
-          </a:effectLst>
+          <a:effectLst/>
         </p:spPr>
         <p:style>
           <a:lnRef idx="1">
@@ -25519,74 +25463,114 @@
       </p:sp>
       <p:sp>
         <p:nvSpPr>
-          <p:cNvPr id="25" name="TextBox 24"/>
-          <p:cNvSpPr txBox="1"/>
-          <p:nvPr/>
-        </p:nvSpPr>
-        <p:spPr>
-          <a:xfrm>
-            <a:off x="1005840" y="5596128"/>
-            <a:ext cx="4572000" cy="320040"/>
-          </a:xfrm>
-          <a:prstGeom prst="rect">
-            <a:avLst/>
-          </a:prstGeom>
-          <a:noFill/>
-        </p:spPr>
-        <p:txBody>
-          <a:bodyPr wrap="square" anchor="t" lIns="0" rIns="0" tIns="0" bIns="0">
+          <p:cNvPr id="21" name="Oval 20"/>
+          <p:cNvSpPr/>
+          <p:nvPr/>
+        </p:nvSpPr>
+        <p:spPr>
+          <a:xfrm>
+            <a:off x="6446520" y="4599431"/>
+            <a:ext cx="411480" cy="411480"/>
+          </a:xfrm>
+          <a:prstGeom prst="ellipse">
+            <a:avLst/>
+          </a:prstGeom>
+          <a:solidFill>
+            <a:srgbClr val="6A4C93"/>
+          </a:solidFill>
+          <a:ln>
+            <a:noFill/>
+          </a:ln>
+          <a:effectLst/>
+        </p:spPr>
+        <p:style>
+          <a:lnRef idx="1">
+            <a:schemeClr val="accent1"/>
+          </a:lnRef>
+          <a:fillRef idx="3">
+            <a:schemeClr val="accent1"/>
+          </a:fillRef>
+          <a:effectRef idx="2">
+            <a:schemeClr val="accent1"/>
+          </a:effectRef>
+          <a:fontRef idx="minor">
+            <a:schemeClr val="lt1"/>
+          </a:fontRef>
+        </p:style>
+        <p:txBody>
+          <a:bodyPr rtlCol="0" anchor="ctr"/>
+          <a:lstStyle/>
+          <a:p>
+            <a:pPr algn="ctr"/>
+          </a:p>
+        </p:txBody>
+      </p:sp>
+      <p:sp>
+        <p:nvSpPr>
+          <p:cNvPr id="22" name="TextBox 21"/>
+          <p:cNvSpPr txBox="1"/>
+          <p:nvPr/>
+        </p:nvSpPr>
+        <p:spPr>
+          <a:xfrm>
+            <a:off x="6446520" y="4599431"/>
+            <a:ext cx="411480" cy="411480"/>
+          </a:xfrm>
+          <a:prstGeom prst="rect">
+            <a:avLst/>
+          </a:prstGeom>
+          <a:noFill/>
+        </p:spPr>
+        <p:txBody>
+          <a:bodyPr wrap="square" anchor="ctr" lIns="0" rIns="0" tIns="0" bIns="0">
+            <a:spAutoFit/>
+          </a:bodyPr>
+          <a:lstStyle/>
+          <a:p>
+            <a:pPr algn="ctr"/>
+            <a:r>
+              <a:rPr sz="1400" b="1" i="0">
+                <a:solidFill>
+                  <a:srgbClr val="FFFFFF"/>
+                </a:solidFill>
+                <a:latin typeface="Calibri"/>
+              </a:rPr>
+              <a:t>D</a:t>
+            </a:r>
+          </a:p>
+        </p:txBody>
+      </p:sp>
+      <p:sp>
+        <p:nvSpPr>
+          <p:cNvPr id="23" name="TextBox 22"/>
+          <p:cNvSpPr txBox="1"/>
+          <p:nvPr/>
+        </p:nvSpPr>
+        <p:spPr>
+          <a:xfrm>
+            <a:off x="7040880" y="4370831"/>
+            <a:ext cx="4297680" cy="868680"/>
+          </a:xfrm>
+          <a:prstGeom prst="rect">
+            <a:avLst/>
+          </a:prstGeom>
+          <a:noFill/>
+        </p:spPr>
+        <p:txBody>
+          <a:bodyPr wrap="square" anchor="ctr" lIns="0" rIns="0" tIns="0" bIns="0">
             <a:spAutoFit/>
           </a:bodyPr>
           <a:lstStyle/>
           <a:p>
             <a:pPr algn="l"/>
             <a:r>
-              <a:rPr sz="1300" b="1" i="0">
-                <a:solidFill>
-                  <a:srgbClr val="2A9D8F"/>
-                </a:solidFill>
-                <a:latin typeface="Arial"/>
-              </a:rPr>
-              <a:t>WHY</a:t>
-            </a:r>
-          </a:p>
-        </p:txBody>
-      </p:sp>
-      <p:sp>
-        <p:nvSpPr>
-          <p:cNvPr id="26" name="TextBox 25"/>
-          <p:cNvSpPr txBox="1"/>
-          <p:nvPr/>
-        </p:nvSpPr>
-        <p:spPr>
-          <a:xfrm>
-            <a:off x="1005840" y="5943600"/>
-            <a:ext cx="10149840" cy="548640"/>
-          </a:xfrm>
-          <a:prstGeom prst="rect">
-            <a:avLst/>
-          </a:prstGeom>
-          <a:noFill/>
-        </p:spPr>
-        <p:txBody>
-          <a:bodyPr wrap="square" anchor="t" lIns="0" rIns="0" tIns="0" bIns="0">
-            <a:spAutoFit/>
-          </a:bodyPr>
-          <a:lstStyle/>
-          <a:p>
-            <a:pPr algn="l">
-              <a:lnSpc>
-                <a:spcPct val="105000"/>
-              </a:lnSpc>
-            </a:pPr>
-            <a:r>
               <a:rPr sz="1450" b="0" i="0">
                 <a:solidFill>
                   <a:srgbClr val="1D2433"/>
                 </a:solidFill>
                 <a:latin typeface="Calibri"/>
               </a:rPr>
-              <a:t>The poles of an electromagnet depend on the current's direction. Reversing the current reverses the field, so the north and south ends interchange.</a:t>
+              <a:t>Has no effect</a:t>
             </a:r>
           </a:p>
         </p:txBody>
@@ -25676,7 +25660,7 @@
             <a:avLst/>
           </a:prstGeom>
           <a:solidFill>
-            <a:srgbClr val="6A4C93"/>
+            <a:srgbClr val="2A9D8F"/>
           </a:solidFill>
           <a:ln>
             <a:noFill/>
@@ -25731,11 +25715,11 @@
             <a:r>
               <a:rPr sz="1300" b="1" i="0">
                 <a:solidFill>
-                  <a:srgbClr val="6A4C93"/>
+                  <a:srgbClr val="2A9D8F"/>
                 </a:solidFill>
                 <a:latin typeface="Arial"/>
               </a:rPr>
-              <a:t>QUIZ QUESTION</a:t>
+              <a:t>ANSWER REVEALED</a:t>
             </a:r>
           </a:p>
         </p:txBody>
@@ -25770,7 +25754,7 @@
                 </a:solidFill>
                 <a:latin typeface="Calibri"/>
               </a:rPr>
-              <a:t>Q5 — Which Is Stronger Controllable</a:t>
+              <a:t>Q4 — Reverse Current</a:t>
             </a:r>
           </a:p>
         </p:txBody>
@@ -25857,7 +25841,7 @@
                 </a:solidFill>
                 <a:latin typeface="Calibri"/>
               </a:rPr>
-              <a:t>Compared with an ordinary permanent magnet, an electromagnet's strength is:</a:t>
+              <a:t>Reversing the current through an electromagnet:</a:t>
             </a:r>
           </a:p>
         </p:txBody>
@@ -25923,7 +25907,7 @@
             <a:avLst/>
           </a:prstGeom>
           <a:solidFill>
-            <a:srgbClr val="6A4C93"/>
+            <a:srgbClr val="B7C2CC"/>
           </a:solidFill>
           <a:ln>
             <a:noFill/>
@@ -26013,11 +25997,11 @@
             <a:r>
               <a:rPr sz="1450" b="0" i="0">
                 <a:solidFill>
-                  <a:srgbClr val="1D2433"/>
-                </a:solidFill>
-                <a:latin typeface="Calibri"/>
-              </a:rPr>
-              <a:t>Always fixed</a:t>
+                  <a:srgbClr val="6B7280"/>
+                </a:solidFill>
+                <a:latin typeface="Calibri"/>
+              </a:rPr>
+              <a:t>Switches it off</a:t>
             </a:r>
           </a:p>
         </p:txBody>
@@ -26031,6 +26015,168 @@
         <p:spPr>
           <a:xfrm>
             <a:off x="6172200" y="3337560"/>
+            <a:ext cx="5349240" cy="868680"/>
+          </a:xfrm>
+          <a:prstGeom prst="roundRect">
+            <a:avLst>
+              <a:gd name="adj" fmla="val 12000"/>
+            </a:avLst>
+          </a:prstGeom>
+          <a:solidFill>
+            <a:srgbClr val="E9F5F0"/>
+          </a:solidFill>
+          <a:ln w="25400">
+            <a:solidFill>
+              <a:srgbClr val="2A9D8F"/>
+            </a:solidFill>
+          </a:ln>
+          <a:effectLst/>
+        </p:spPr>
+        <p:style>
+          <a:lnRef idx="1">
+            <a:schemeClr val="accent1"/>
+          </a:lnRef>
+          <a:fillRef idx="3">
+            <a:schemeClr val="accent1"/>
+          </a:fillRef>
+          <a:effectRef idx="2">
+            <a:schemeClr val="accent1"/>
+          </a:effectRef>
+          <a:fontRef idx="minor">
+            <a:schemeClr val="lt1"/>
+          </a:fontRef>
+        </p:style>
+        <p:txBody>
+          <a:bodyPr rtlCol="0" anchor="ctr"/>
+          <a:lstStyle/>
+          <a:p>
+            <a:pPr algn="ctr"/>
+          </a:p>
+        </p:txBody>
+      </p:sp>
+      <p:sp>
+        <p:nvSpPr>
+          <p:cNvPr id="13" name="Oval 12"/>
+          <p:cNvSpPr/>
+          <p:nvPr/>
+        </p:nvSpPr>
+        <p:spPr>
+          <a:xfrm>
+            <a:off x="6446520" y="3566160"/>
+            <a:ext cx="411480" cy="411480"/>
+          </a:xfrm>
+          <a:prstGeom prst="ellipse">
+            <a:avLst/>
+          </a:prstGeom>
+          <a:solidFill>
+            <a:srgbClr val="2A9D8F"/>
+          </a:solidFill>
+          <a:ln>
+            <a:noFill/>
+          </a:ln>
+          <a:effectLst/>
+        </p:spPr>
+        <p:style>
+          <a:lnRef idx="1">
+            <a:schemeClr val="accent1"/>
+          </a:lnRef>
+          <a:fillRef idx="3">
+            <a:schemeClr val="accent1"/>
+          </a:fillRef>
+          <a:effectRef idx="2">
+            <a:schemeClr val="accent1"/>
+          </a:effectRef>
+          <a:fontRef idx="minor">
+            <a:schemeClr val="lt1"/>
+          </a:fontRef>
+        </p:style>
+        <p:txBody>
+          <a:bodyPr rtlCol="0" anchor="ctr"/>
+          <a:lstStyle/>
+          <a:p>
+            <a:pPr algn="ctr"/>
+          </a:p>
+        </p:txBody>
+      </p:sp>
+      <p:sp>
+        <p:nvSpPr>
+          <p:cNvPr id="14" name="TextBox 13"/>
+          <p:cNvSpPr txBox="1"/>
+          <p:nvPr/>
+        </p:nvSpPr>
+        <p:spPr>
+          <a:xfrm>
+            <a:off x="6446520" y="3566160"/>
+            <a:ext cx="411480" cy="411480"/>
+          </a:xfrm>
+          <a:prstGeom prst="rect">
+            <a:avLst/>
+          </a:prstGeom>
+          <a:noFill/>
+        </p:spPr>
+        <p:txBody>
+          <a:bodyPr wrap="square" anchor="ctr" lIns="0" rIns="0" tIns="0" bIns="0">
+            <a:spAutoFit/>
+          </a:bodyPr>
+          <a:lstStyle/>
+          <a:p>
+            <a:pPr algn="ctr"/>
+            <a:r>
+              <a:rPr sz="1400" b="1" i="0">
+                <a:solidFill>
+                  <a:srgbClr val="FFFFFF"/>
+                </a:solidFill>
+                <a:latin typeface="Calibri"/>
+              </a:rPr>
+              <a:t>✓</a:t>
+            </a:r>
+          </a:p>
+        </p:txBody>
+      </p:sp>
+      <p:sp>
+        <p:nvSpPr>
+          <p:cNvPr id="15" name="TextBox 14"/>
+          <p:cNvSpPr txBox="1"/>
+          <p:nvPr/>
+        </p:nvSpPr>
+        <p:spPr>
+          <a:xfrm>
+            <a:off x="7040880" y="3337560"/>
+            <a:ext cx="4297680" cy="868680"/>
+          </a:xfrm>
+          <a:prstGeom prst="rect">
+            <a:avLst/>
+          </a:prstGeom>
+          <a:noFill/>
+        </p:spPr>
+        <p:txBody>
+          <a:bodyPr wrap="square" anchor="ctr" lIns="0" rIns="0" tIns="0" bIns="0">
+            <a:spAutoFit/>
+          </a:bodyPr>
+          <a:lstStyle/>
+          <a:p>
+            <a:pPr algn="l"/>
+            <a:r>
+              <a:rPr sz="1450" b="1" i="0">
+                <a:solidFill>
+                  <a:srgbClr val="1D2433"/>
+                </a:solidFill>
+                <a:latin typeface="Calibri"/>
+              </a:rPr>
+              <a:t>Swaps its north and south poles</a:t>
+            </a:r>
+          </a:p>
+        </p:txBody>
+      </p:sp>
+      <p:sp>
+        <p:nvSpPr>
+          <p:cNvPr id="16" name="Rounded Rectangle 15"/>
+          <p:cNvSpPr/>
+          <p:nvPr/>
+        </p:nvSpPr>
+        <p:spPr>
+          <a:xfrm>
+            <a:off x="640080" y="4370831"/>
             <a:ext cx="5349240" cy="868680"/>
           </a:xfrm>
           <a:prstGeom prst="roundRect">
@@ -26070,20 +26216,20 @@
       </p:sp>
       <p:sp>
         <p:nvSpPr>
-          <p:cNvPr id="13" name="Oval 12"/>
+          <p:cNvPr id="17" name="Oval 16"/>
           <p:cNvSpPr/>
           <p:nvPr/>
         </p:nvSpPr>
         <p:spPr>
           <a:xfrm>
-            <a:off x="6446520" y="3566160"/>
+            <a:off x="914400" y="4599431"/>
             <a:ext cx="411480" cy="411480"/>
           </a:xfrm>
           <a:prstGeom prst="ellipse">
             <a:avLst/>
           </a:prstGeom>
           <a:solidFill>
-            <a:srgbClr val="6A4C93"/>
+            <a:srgbClr val="B7C2CC"/>
           </a:solidFill>
           <a:ln>
             <a:noFill/>
@@ -26114,13 +26260,13 @@
       </p:sp>
       <p:sp>
         <p:nvSpPr>
-          <p:cNvPr id="14" name="TextBox 13"/>
-          <p:cNvSpPr txBox="1"/>
-          <p:nvPr/>
-        </p:nvSpPr>
-        <p:spPr>
-          <a:xfrm>
-            <a:off x="6446520" y="3566160"/>
+          <p:cNvPr id="18" name="TextBox 17"/>
+          <p:cNvSpPr txBox="1"/>
+          <p:nvPr/>
+        </p:nvSpPr>
+        <p:spPr>
+          <a:xfrm>
+            <a:off x="914400" y="4599431"/>
             <a:ext cx="411480" cy="411480"/>
           </a:xfrm>
           <a:prstGeom prst="rect">
@@ -26142,20 +26288,20 @@
                 </a:solidFill>
                 <a:latin typeface="Calibri"/>
               </a:rPr>
-              <a:t>B</a:t>
-            </a:r>
-          </a:p>
-        </p:txBody>
-      </p:sp>
-      <p:sp>
-        <p:nvSpPr>
-          <p:cNvPr id="15" name="TextBox 14"/>
-          <p:cNvSpPr txBox="1"/>
-          <p:nvPr/>
-        </p:nvSpPr>
-        <p:spPr>
-          <a:xfrm>
-            <a:off x="7040880" y="3337560"/>
+              <a:t>C</a:t>
+            </a:r>
+          </a:p>
+        </p:txBody>
+      </p:sp>
+      <p:sp>
+        <p:nvSpPr>
+          <p:cNvPr id="19" name="TextBox 18"/>
+          <p:cNvSpPr txBox="1"/>
+          <p:nvPr/>
+        </p:nvSpPr>
+        <p:spPr>
+          <a:xfrm>
+            <a:off x="1508760" y="4370831"/>
             <a:ext cx="4297680" cy="868680"/>
           </a:xfrm>
           <a:prstGeom prst="rect">
@@ -26173,24 +26319,24 @@
             <a:r>
               <a:rPr sz="1450" b="0" i="0">
                 <a:solidFill>
-                  <a:srgbClr val="1D2433"/>
-                </a:solidFill>
-                <a:latin typeface="Calibri"/>
-              </a:rPr>
-              <a:t>Adjustable by changing the current</a:t>
-            </a:r>
-          </a:p>
-        </p:txBody>
-      </p:sp>
-      <p:sp>
-        <p:nvSpPr>
-          <p:cNvPr id="16" name="Rounded Rectangle 15"/>
+                  <a:srgbClr val="6B7280"/>
+                </a:solidFill>
+                <a:latin typeface="Calibri"/>
+              </a:rPr>
+              <a:t>Doubles its strength</a:t>
+            </a:r>
+          </a:p>
+        </p:txBody>
+      </p:sp>
+      <p:sp>
+        <p:nvSpPr>
+          <p:cNvPr id="20" name="Rounded Rectangle 19"/>
           <p:cNvSpPr/>
           <p:nvPr/>
         </p:nvSpPr>
         <p:spPr>
           <a:xfrm>
-            <a:off x="640080" y="4370831"/>
+            <a:off x="6172200" y="4370831"/>
             <a:ext cx="5349240" cy="868680"/>
           </a:xfrm>
           <a:prstGeom prst="roundRect">
@@ -26230,20 +26376,20 @@
       </p:sp>
       <p:sp>
         <p:nvSpPr>
-          <p:cNvPr id="17" name="Oval 16"/>
+          <p:cNvPr id="21" name="Oval 20"/>
           <p:cNvSpPr/>
           <p:nvPr/>
         </p:nvSpPr>
         <p:spPr>
           <a:xfrm>
-            <a:off x="914400" y="4599431"/>
+            <a:off x="6446520" y="4599431"/>
             <a:ext cx="411480" cy="411480"/>
           </a:xfrm>
           <a:prstGeom prst="ellipse">
             <a:avLst/>
           </a:prstGeom>
           <a:solidFill>
-            <a:srgbClr val="6A4C93"/>
+            <a:srgbClr val="B7C2CC"/>
           </a:solidFill>
           <a:ln>
             <a:noFill/>
@@ -26274,13 +26420,13 @@
       </p:sp>
       <p:sp>
         <p:nvSpPr>
-          <p:cNvPr id="18" name="TextBox 17"/>
-          <p:cNvSpPr txBox="1"/>
-          <p:nvPr/>
-        </p:nvSpPr>
-        <p:spPr>
-          <a:xfrm>
-            <a:off x="914400" y="4599431"/>
+          <p:cNvPr id="22" name="TextBox 21"/>
+          <p:cNvSpPr txBox="1"/>
+          <p:nvPr/>
+        </p:nvSpPr>
+        <p:spPr>
+          <a:xfrm>
+            <a:off x="6446520" y="4599431"/>
             <a:ext cx="411480" cy="411480"/>
           </a:xfrm>
           <a:prstGeom prst="rect">
@@ -26302,20 +26448,20 @@
                 </a:solidFill>
                 <a:latin typeface="Calibri"/>
               </a:rPr>
-              <a:t>C</a:t>
-            </a:r>
-          </a:p>
-        </p:txBody>
-      </p:sp>
-      <p:sp>
-        <p:nvSpPr>
-          <p:cNvPr id="19" name="TextBox 18"/>
-          <p:cNvSpPr txBox="1"/>
-          <p:nvPr/>
-        </p:nvSpPr>
-        <p:spPr>
-          <a:xfrm>
-            <a:off x="1508760" y="4370831"/>
+              <a:t>D</a:t>
+            </a:r>
+          </a:p>
+        </p:txBody>
+      </p:sp>
+      <p:sp>
+        <p:nvSpPr>
+          <p:cNvPr id="23" name="TextBox 22"/>
+          <p:cNvSpPr txBox="1"/>
+          <p:nvPr/>
+        </p:nvSpPr>
+        <p:spPr>
+          <a:xfrm>
+            <a:off x="7040880" y="4370831"/>
             <a:ext cx="4297680" cy="868680"/>
           </a:xfrm>
           <a:prstGeom prst="rect">
@@ -26333,38 +26479,44 @@
             <a:r>
               <a:rPr sz="1450" b="0" i="0">
                 <a:solidFill>
-                  <a:srgbClr val="1D2433"/>
-                </a:solidFill>
-                <a:latin typeface="Calibri"/>
-              </a:rPr>
-              <a:t>Always weaker</a:t>
-            </a:r>
-          </a:p>
-        </p:txBody>
-      </p:sp>
-      <p:sp>
-        <p:nvSpPr>
-          <p:cNvPr id="20" name="Rounded Rectangle 19"/>
+                  <a:srgbClr val="6B7280"/>
+                </a:solidFill>
+                <a:latin typeface="Calibri"/>
+              </a:rPr>
+              <a:t>Has no effect</a:t>
+            </a:r>
+          </a:p>
+        </p:txBody>
+      </p:sp>
+      <p:sp>
+        <p:nvSpPr>
+          <p:cNvPr id="24" name="Rounded Rectangle 23"/>
           <p:cNvSpPr/>
           <p:nvPr/>
         </p:nvSpPr>
         <p:spPr>
           <a:xfrm>
-            <a:off x="6172200" y="4370831"/>
-            <a:ext cx="5349240" cy="868680"/>
+            <a:off x="640080" y="5440680"/>
+            <a:ext cx="10881360" cy="1097280"/>
           </a:xfrm>
           <a:prstGeom prst="roundRect">
             <a:avLst>
-              <a:gd name="adj" fmla="val 12000"/>
+              <a:gd name="adj" fmla="val 5000"/>
             </a:avLst>
           </a:prstGeom>
           <a:solidFill>
-            <a:srgbClr val="EAF1F4"/>
+            <a:srgbClr val="FFFFFF"/>
           </a:solidFill>
           <a:ln>
             <a:noFill/>
           </a:ln>
-          <a:effectLst/>
+          <a:effectLst>
+            <a:outerShdw blurRad="88900" dist="38100" dir="5400000" rotWithShape="0" algn="bl">
+              <a:srgbClr val="000000">
+                <a:alpha val="16000"/>
+              </a:srgbClr>
+            </a:outerShdw>
+          </a:effectLst>
         </p:spPr>
         <p:style>
           <a:lnRef idx="1">
@@ -26390,114 +26542,74 @@
       </p:sp>
       <p:sp>
         <p:nvSpPr>
-          <p:cNvPr id="21" name="Oval 20"/>
-          <p:cNvSpPr/>
-          <p:nvPr/>
-        </p:nvSpPr>
-        <p:spPr>
-          <a:xfrm>
-            <a:off x="6446520" y="4599431"/>
-            <a:ext cx="411480" cy="411480"/>
-          </a:xfrm>
-          <a:prstGeom prst="ellipse">
-            <a:avLst/>
-          </a:prstGeom>
-          <a:solidFill>
-            <a:srgbClr val="6A4C93"/>
-          </a:solidFill>
-          <a:ln>
-            <a:noFill/>
-          </a:ln>
-          <a:effectLst/>
-        </p:spPr>
-        <p:style>
-          <a:lnRef idx="1">
-            <a:schemeClr val="accent1"/>
-          </a:lnRef>
-          <a:fillRef idx="3">
-            <a:schemeClr val="accent1"/>
-          </a:fillRef>
-          <a:effectRef idx="2">
-            <a:schemeClr val="accent1"/>
-          </a:effectRef>
-          <a:fontRef idx="minor">
-            <a:schemeClr val="lt1"/>
-          </a:fontRef>
-        </p:style>
-        <p:txBody>
-          <a:bodyPr rtlCol="0" anchor="ctr"/>
-          <a:lstStyle/>
-          <a:p>
-            <a:pPr algn="ctr"/>
-          </a:p>
-        </p:txBody>
-      </p:sp>
-      <p:sp>
-        <p:nvSpPr>
-          <p:cNvPr id="22" name="TextBox 21"/>
-          <p:cNvSpPr txBox="1"/>
-          <p:nvPr/>
-        </p:nvSpPr>
-        <p:spPr>
-          <a:xfrm>
-            <a:off x="6446520" y="4599431"/>
-            <a:ext cx="411480" cy="411480"/>
-          </a:xfrm>
-          <a:prstGeom prst="rect">
-            <a:avLst/>
-          </a:prstGeom>
-          <a:noFill/>
-        </p:spPr>
-        <p:txBody>
-          <a:bodyPr wrap="square" anchor="ctr" lIns="0" rIns="0" tIns="0" bIns="0">
-            <a:spAutoFit/>
-          </a:bodyPr>
-          <a:lstStyle/>
-          <a:p>
-            <a:pPr algn="ctr"/>
-            <a:r>
-              <a:rPr sz="1400" b="1" i="0">
-                <a:solidFill>
-                  <a:srgbClr val="FFFFFF"/>
-                </a:solidFill>
-                <a:latin typeface="Calibri"/>
-              </a:rPr>
-              <a:t>D</a:t>
-            </a:r>
-          </a:p>
-        </p:txBody>
-      </p:sp>
-      <p:sp>
-        <p:nvSpPr>
-          <p:cNvPr id="23" name="TextBox 22"/>
-          <p:cNvSpPr txBox="1"/>
-          <p:nvPr/>
-        </p:nvSpPr>
-        <p:spPr>
-          <a:xfrm>
-            <a:off x="7040880" y="4370831"/>
-            <a:ext cx="4297680" cy="868680"/>
-          </a:xfrm>
-          <a:prstGeom prst="rect">
-            <a:avLst/>
-          </a:prstGeom>
-          <a:noFill/>
-        </p:spPr>
-        <p:txBody>
-          <a:bodyPr wrap="square" anchor="ctr" lIns="0" rIns="0" tIns="0" bIns="0">
+          <p:cNvPr id="25" name="TextBox 24"/>
+          <p:cNvSpPr txBox="1"/>
+          <p:nvPr/>
+        </p:nvSpPr>
+        <p:spPr>
+          <a:xfrm>
+            <a:off x="1005840" y="5596128"/>
+            <a:ext cx="4572000" cy="320040"/>
+          </a:xfrm>
+          <a:prstGeom prst="rect">
+            <a:avLst/>
+          </a:prstGeom>
+          <a:noFill/>
+        </p:spPr>
+        <p:txBody>
+          <a:bodyPr wrap="square" anchor="t" lIns="0" rIns="0" tIns="0" bIns="0">
             <a:spAutoFit/>
           </a:bodyPr>
           <a:lstStyle/>
           <a:p>
             <a:pPr algn="l"/>
             <a:r>
+              <a:rPr sz="1300" b="1" i="0">
+                <a:solidFill>
+                  <a:srgbClr val="2A9D8F"/>
+                </a:solidFill>
+                <a:latin typeface="Arial"/>
+              </a:rPr>
+              <a:t>WHY</a:t>
+            </a:r>
+          </a:p>
+        </p:txBody>
+      </p:sp>
+      <p:sp>
+        <p:nvSpPr>
+          <p:cNvPr id="26" name="TextBox 25"/>
+          <p:cNvSpPr txBox="1"/>
+          <p:nvPr/>
+        </p:nvSpPr>
+        <p:spPr>
+          <a:xfrm>
+            <a:off x="1005840" y="5943600"/>
+            <a:ext cx="10149840" cy="548640"/>
+          </a:xfrm>
+          <a:prstGeom prst="rect">
+            <a:avLst/>
+          </a:prstGeom>
+          <a:noFill/>
+        </p:spPr>
+        <p:txBody>
+          <a:bodyPr wrap="square" anchor="t" lIns="0" rIns="0" tIns="0" bIns="0">
+            <a:spAutoFit/>
+          </a:bodyPr>
+          <a:lstStyle/>
+          <a:p>
+            <a:pPr algn="l">
+              <a:lnSpc>
+                <a:spcPct val="105000"/>
+              </a:lnSpc>
+            </a:pPr>
+            <a:r>
               <a:rPr sz="1450" b="0" i="0">
                 <a:solidFill>
                   <a:srgbClr val="1D2433"/>
                 </a:solidFill>
                 <a:latin typeface="Calibri"/>
               </a:rPr>
-              <a:t>Impossible to change</a:t>
+              <a:t>The poles of an electromagnet depend on the current's direction. Reversing the current reverses the field, so the north and south ends interchange.</a:t>
             </a:r>
           </a:p>
         </p:txBody>
@@ -26587,7 +26699,7 @@
             <a:avLst/>
           </a:prstGeom>
           <a:solidFill>
-            <a:srgbClr val="2A9D8F"/>
+            <a:srgbClr val="6A4C93"/>
           </a:solidFill>
           <a:ln>
             <a:noFill/>
@@ -26642,11 +26754,11 @@
             <a:r>
               <a:rPr sz="1300" b="1" i="0">
                 <a:solidFill>
-                  <a:srgbClr val="2A9D8F"/>
+                  <a:srgbClr val="6A4C93"/>
                 </a:solidFill>
                 <a:latin typeface="Arial"/>
               </a:rPr>
-              <a:t>ANSWER REVEALED</a:t>
+              <a:t>QUIZ QUESTION</a:t>
             </a:r>
           </a:p>
         </p:txBody>
@@ -26834,7 +26946,7 @@
             <a:avLst/>
           </a:prstGeom>
           <a:solidFill>
-            <a:srgbClr val="B7C2CC"/>
+            <a:srgbClr val="6A4C93"/>
           </a:solidFill>
           <a:ln>
             <a:noFill/>
@@ -26924,7 +27036,7 @@
             <a:r>
               <a:rPr sz="1450" b="0" i="0">
                 <a:solidFill>
-                  <a:srgbClr val="6B7280"/>
+                  <a:srgbClr val="1D2433"/>
                 </a:solidFill>
                 <a:latin typeface="Calibri"/>
               </a:rPr>
@@ -26950,12 +27062,10 @@
             </a:avLst>
           </a:prstGeom>
           <a:solidFill>
-            <a:srgbClr val="E9F5F0"/>
+            <a:srgbClr val="EAF1F4"/>
           </a:solidFill>
-          <a:ln w="25400">
-            <a:solidFill>
-              <a:srgbClr val="2A9D8F"/>
-            </a:solidFill>
+          <a:ln>
+            <a:noFill/>
           </a:ln>
           <a:effectLst/>
         </p:spPr>
@@ -26993,6 +27103,510 @@
             <a:ext cx="411480" cy="411480"/>
           </a:xfrm>
           <a:prstGeom prst="ellipse">
+            <a:avLst/>
+          </a:prstGeom>
+          <a:solidFill>
+            <a:srgbClr val="6A4C93"/>
+          </a:solidFill>
+          <a:ln>
+            <a:noFill/>
+          </a:ln>
+          <a:effectLst/>
+        </p:spPr>
+        <p:style>
+          <a:lnRef idx="1">
+            <a:schemeClr val="accent1"/>
+          </a:lnRef>
+          <a:fillRef idx="3">
+            <a:schemeClr val="accent1"/>
+          </a:fillRef>
+          <a:effectRef idx="2">
+            <a:schemeClr val="accent1"/>
+          </a:effectRef>
+          <a:fontRef idx="minor">
+            <a:schemeClr val="lt1"/>
+          </a:fontRef>
+        </p:style>
+        <p:txBody>
+          <a:bodyPr rtlCol="0" anchor="ctr"/>
+          <a:lstStyle/>
+          <a:p>
+            <a:pPr algn="ctr"/>
+          </a:p>
+        </p:txBody>
+      </p:sp>
+      <p:sp>
+        <p:nvSpPr>
+          <p:cNvPr id="14" name="TextBox 13"/>
+          <p:cNvSpPr txBox="1"/>
+          <p:nvPr/>
+        </p:nvSpPr>
+        <p:spPr>
+          <a:xfrm>
+            <a:off x="6446520" y="3566160"/>
+            <a:ext cx="411480" cy="411480"/>
+          </a:xfrm>
+          <a:prstGeom prst="rect">
+            <a:avLst/>
+          </a:prstGeom>
+          <a:noFill/>
+        </p:spPr>
+        <p:txBody>
+          <a:bodyPr wrap="square" anchor="ctr" lIns="0" rIns="0" tIns="0" bIns="0">
+            <a:spAutoFit/>
+          </a:bodyPr>
+          <a:lstStyle/>
+          <a:p>
+            <a:pPr algn="ctr"/>
+            <a:r>
+              <a:rPr sz="1400" b="1" i="0">
+                <a:solidFill>
+                  <a:srgbClr val="FFFFFF"/>
+                </a:solidFill>
+                <a:latin typeface="Calibri"/>
+              </a:rPr>
+              <a:t>B</a:t>
+            </a:r>
+          </a:p>
+        </p:txBody>
+      </p:sp>
+      <p:sp>
+        <p:nvSpPr>
+          <p:cNvPr id="15" name="TextBox 14"/>
+          <p:cNvSpPr txBox="1"/>
+          <p:nvPr/>
+        </p:nvSpPr>
+        <p:spPr>
+          <a:xfrm>
+            <a:off x="7040880" y="3337560"/>
+            <a:ext cx="4297680" cy="868680"/>
+          </a:xfrm>
+          <a:prstGeom prst="rect">
+            <a:avLst/>
+          </a:prstGeom>
+          <a:noFill/>
+        </p:spPr>
+        <p:txBody>
+          <a:bodyPr wrap="square" anchor="ctr" lIns="0" rIns="0" tIns="0" bIns="0">
+            <a:spAutoFit/>
+          </a:bodyPr>
+          <a:lstStyle/>
+          <a:p>
+            <a:pPr algn="l"/>
+            <a:r>
+              <a:rPr sz="1450" b="0" i="0">
+                <a:solidFill>
+                  <a:srgbClr val="1D2433"/>
+                </a:solidFill>
+                <a:latin typeface="Calibri"/>
+              </a:rPr>
+              <a:t>Adjustable by changing the current</a:t>
+            </a:r>
+          </a:p>
+        </p:txBody>
+      </p:sp>
+      <p:sp>
+        <p:nvSpPr>
+          <p:cNvPr id="16" name="Rounded Rectangle 15"/>
+          <p:cNvSpPr/>
+          <p:nvPr/>
+        </p:nvSpPr>
+        <p:spPr>
+          <a:xfrm>
+            <a:off x="640080" y="4370831"/>
+            <a:ext cx="5349240" cy="868680"/>
+          </a:xfrm>
+          <a:prstGeom prst="roundRect">
+            <a:avLst>
+              <a:gd name="adj" fmla="val 12000"/>
+            </a:avLst>
+          </a:prstGeom>
+          <a:solidFill>
+            <a:srgbClr val="EAF1F4"/>
+          </a:solidFill>
+          <a:ln>
+            <a:noFill/>
+          </a:ln>
+          <a:effectLst/>
+        </p:spPr>
+        <p:style>
+          <a:lnRef idx="1">
+            <a:schemeClr val="accent1"/>
+          </a:lnRef>
+          <a:fillRef idx="3">
+            <a:schemeClr val="accent1"/>
+          </a:fillRef>
+          <a:effectRef idx="2">
+            <a:schemeClr val="accent1"/>
+          </a:effectRef>
+          <a:fontRef idx="minor">
+            <a:schemeClr val="lt1"/>
+          </a:fontRef>
+        </p:style>
+        <p:txBody>
+          <a:bodyPr rtlCol="0" anchor="ctr"/>
+          <a:lstStyle/>
+          <a:p>
+            <a:pPr algn="ctr"/>
+          </a:p>
+        </p:txBody>
+      </p:sp>
+      <p:sp>
+        <p:nvSpPr>
+          <p:cNvPr id="17" name="Oval 16"/>
+          <p:cNvSpPr/>
+          <p:nvPr/>
+        </p:nvSpPr>
+        <p:spPr>
+          <a:xfrm>
+            <a:off x="914400" y="4599431"/>
+            <a:ext cx="411480" cy="411480"/>
+          </a:xfrm>
+          <a:prstGeom prst="ellipse">
+            <a:avLst/>
+          </a:prstGeom>
+          <a:solidFill>
+            <a:srgbClr val="6A4C93"/>
+          </a:solidFill>
+          <a:ln>
+            <a:noFill/>
+          </a:ln>
+          <a:effectLst/>
+        </p:spPr>
+        <p:style>
+          <a:lnRef idx="1">
+            <a:schemeClr val="accent1"/>
+          </a:lnRef>
+          <a:fillRef idx="3">
+            <a:schemeClr val="accent1"/>
+          </a:fillRef>
+          <a:effectRef idx="2">
+            <a:schemeClr val="accent1"/>
+          </a:effectRef>
+          <a:fontRef idx="minor">
+            <a:schemeClr val="lt1"/>
+          </a:fontRef>
+        </p:style>
+        <p:txBody>
+          <a:bodyPr rtlCol="0" anchor="ctr"/>
+          <a:lstStyle/>
+          <a:p>
+            <a:pPr algn="ctr"/>
+          </a:p>
+        </p:txBody>
+      </p:sp>
+      <p:sp>
+        <p:nvSpPr>
+          <p:cNvPr id="18" name="TextBox 17"/>
+          <p:cNvSpPr txBox="1"/>
+          <p:nvPr/>
+        </p:nvSpPr>
+        <p:spPr>
+          <a:xfrm>
+            <a:off x="914400" y="4599431"/>
+            <a:ext cx="411480" cy="411480"/>
+          </a:xfrm>
+          <a:prstGeom prst="rect">
+            <a:avLst/>
+          </a:prstGeom>
+          <a:noFill/>
+        </p:spPr>
+        <p:txBody>
+          <a:bodyPr wrap="square" anchor="ctr" lIns="0" rIns="0" tIns="0" bIns="0">
+            <a:spAutoFit/>
+          </a:bodyPr>
+          <a:lstStyle/>
+          <a:p>
+            <a:pPr algn="ctr"/>
+            <a:r>
+              <a:rPr sz="1400" b="1" i="0">
+                <a:solidFill>
+                  <a:srgbClr val="FFFFFF"/>
+                </a:solidFill>
+                <a:latin typeface="Calibri"/>
+              </a:rPr>
+              <a:t>C</a:t>
+            </a:r>
+          </a:p>
+        </p:txBody>
+      </p:sp>
+      <p:sp>
+        <p:nvSpPr>
+          <p:cNvPr id="19" name="TextBox 18"/>
+          <p:cNvSpPr txBox="1"/>
+          <p:nvPr/>
+        </p:nvSpPr>
+        <p:spPr>
+          <a:xfrm>
+            <a:off x="1508760" y="4370831"/>
+            <a:ext cx="4297680" cy="868680"/>
+          </a:xfrm>
+          <a:prstGeom prst="rect">
+            <a:avLst/>
+          </a:prstGeom>
+          <a:noFill/>
+        </p:spPr>
+        <p:txBody>
+          <a:bodyPr wrap="square" anchor="ctr" lIns="0" rIns="0" tIns="0" bIns="0">
+            <a:spAutoFit/>
+          </a:bodyPr>
+          <a:lstStyle/>
+          <a:p>
+            <a:pPr algn="l"/>
+            <a:r>
+              <a:rPr sz="1450" b="0" i="0">
+                <a:solidFill>
+                  <a:srgbClr val="1D2433"/>
+                </a:solidFill>
+                <a:latin typeface="Calibri"/>
+              </a:rPr>
+              <a:t>Always weaker</a:t>
+            </a:r>
+          </a:p>
+        </p:txBody>
+      </p:sp>
+      <p:sp>
+        <p:nvSpPr>
+          <p:cNvPr id="20" name="Rounded Rectangle 19"/>
+          <p:cNvSpPr/>
+          <p:nvPr/>
+        </p:nvSpPr>
+        <p:spPr>
+          <a:xfrm>
+            <a:off x="6172200" y="4370831"/>
+            <a:ext cx="5349240" cy="868680"/>
+          </a:xfrm>
+          <a:prstGeom prst="roundRect">
+            <a:avLst>
+              <a:gd name="adj" fmla="val 12000"/>
+            </a:avLst>
+          </a:prstGeom>
+          <a:solidFill>
+            <a:srgbClr val="EAF1F4"/>
+          </a:solidFill>
+          <a:ln>
+            <a:noFill/>
+          </a:ln>
+          <a:effectLst/>
+        </p:spPr>
+        <p:style>
+          <a:lnRef idx="1">
+            <a:schemeClr val="accent1"/>
+          </a:lnRef>
+          <a:fillRef idx="3">
+            <a:schemeClr val="accent1"/>
+          </a:fillRef>
+          <a:effectRef idx="2">
+            <a:schemeClr val="accent1"/>
+          </a:effectRef>
+          <a:fontRef idx="minor">
+            <a:schemeClr val="lt1"/>
+          </a:fontRef>
+        </p:style>
+        <p:txBody>
+          <a:bodyPr rtlCol="0" anchor="ctr"/>
+          <a:lstStyle/>
+          <a:p>
+            <a:pPr algn="ctr"/>
+          </a:p>
+        </p:txBody>
+      </p:sp>
+      <p:sp>
+        <p:nvSpPr>
+          <p:cNvPr id="21" name="Oval 20"/>
+          <p:cNvSpPr/>
+          <p:nvPr/>
+        </p:nvSpPr>
+        <p:spPr>
+          <a:xfrm>
+            <a:off x="6446520" y="4599431"/>
+            <a:ext cx="411480" cy="411480"/>
+          </a:xfrm>
+          <a:prstGeom prst="ellipse">
+            <a:avLst/>
+          </a:prstGeom>
+          <a:solidFill>
+            <a:srgbClr val="6A4C93"/>
+          </a:solidFill>
+          <a:ln>
+            <a:noFill/>
+          </a:ln>
+          <a:effectLst/>
+        </p:spPr>
+        <p:style>
+          <a:lnRef idx="1">
+            <a:schemeClr val="accent1"/>
+          </a:lnRef>
+          <a:fillRef idx="3">
+            <a:schemeClr val="accent1"/>
+          </a:fillRef>
+          <a:effectRef idx="2">
+            <a:schemeClr val="accent1"/>
+          </a:effectRef>
+          <a:fontRef idx="minor">
+            <a:schemeClr val="lt1"/>
+          </a:fontRef>
+        </p:style>
+        <p:txBody>
+          <a:bodyPr rtlCol="0" anchor="ctr"/>
+          <a:lstStyle/>
+          <a:p>
+            <a:pPr algn="ctr"/>
+          </a:p>
+        </p:txBody>
+      </p:sp>
+      <p:sp>
+        <p:nvSpPr>
+          <p:cNvPr id="22" name="TextBox 21"/>
+          <p:cNvSpPr txBox="1"/>
+          <p:nvPr/>
+        </p:nvSpPr>
+        <p:spPr>
+          <a:xfrm>
+            <a:off x="6446520" y="4599431"/>
+            <a:ext cx="411480" cy="411480"/>
+          </a:xfrm>
+          <a:prstGeom prst="rect">
+            <a:avLst/>
+          </a:prstGeom>
+          <a:noFill/>
+        </p:spPr>
+        <p:txBody>
+          <a:bodyPr wrap="square" anchor="ctr" lIns="0" rIns="0" tIns="0" bIns="0">
+            <a:spAutoFit/>
+          </a:bodyPr>
+          <a:lstStyle/>
+          <a:p>
+            <a:pPr algn="ctr"/>
+            <a:r>
+              <a:rPr sz="1400" b="1" i="0">
+                <a:solidFill>
+                  <a:srgbClr val="FFFFFF"/>
+                </a:solidFill>
+                <a:latin typeface="Calibri"/>
+              </a:rPr>
+              <a:t>D</a:t>
+            </a:r>
+          </a:p>
+        </p:txBody>
+      </p:sp>
+      <p:sp>
+        <p:nvSpPr>
+          <p:cNvPr id="23" name="TextBox 22"/>
+          <p:cNvSpPr txBox="1"/>
+          <p:nvPr/>
+        </p:nvSpPr>
+        <p:spPr>
+          <a:xfrm>
+            <a:off x="7040880" y="4370831"/>
+            <a:ext cx="4297680" cy="868680"/>
+          </a:xfrm>
+          <a:prstGeom prst="rect">
+            <a:avLst/>
+          </a:prstGeom>
+          <a:noFill/>
+        </p:spPr>
+        <p:txBody>
+          <a:bodyPr wrap="square" anchor="ctr" lIns="0" rIns="0" tIns="0" bIns="0">
+            <a:spAutoFit/>
+          </a:bodyPr>
+          <a:lstStyle/>
+          <a:p>
+            <a:pPr algn="l"/>
+            <a:r>
+              <a:rPr sz="1450" b="0" i="0">
+                <a:solidFill>
+                  <a:srgbClr val="1D2433"/>
+                </a:solidFill>
+                <a:latin typeface="Calibri"/>
+              </a:rPr>
+              <a:t>Impossible to change</a:t>
+            </a:r>
+          </a:p>
+        </p:txBody>
+      </p:sp>
+    </p:spTree>
+  </p:cSld>
+  <p:clrMapOvr>
+    <a:masterClrMapping/>
+  </p:clrMapOvr>
+</p:sld>
+</file>
+
+<file path=ppt/slides/slide35.xml><?xml version="1.0" encoding="utf-8"?>
+<p:sld xmlns:a="http://schemas.openxmlformats.org/drawingml/2006/main" xmlns:p="http://schemas.openxmlformats.org/presentationml/2006/main" xmlns:r="http://schemas.openxmlformats.org/officeDocument/2006/relationships">
+  <p:cSld>
+    <p:bg>
+      <p:bgPr>
+        <a:solidFill>
+          <a:srgbClr val="F4F6F8"/>
+        </a:solidFill>
+        <a:effectLst/>
+      </p:bgPr>
+    </p:bg>
+    <p:spTree>
+      <p:nvGrpSpPr>
+        <p:cNvPr id="1" name=""/>
+        <p:cNvGrpSpPr/>
+        <p:nvPr/>
+      </p:nvGrpSpPr>
+      <p:grpSpPr/>
+      <p:sp>
+        <p:nvSpPr>
+          <p:cNvPr id="2" name="Oval 1"/>
+          <p:cNvSpPr/>
+          <p:nvPr/>
+        </p:nvSpPr>
+        <p:spPr>
+          <a:xfrm>
+            <a:off x="10927080" y="365760"/>
+            <a:ext cx="868680" cy="868680"/>
+          </a:xfrm>
+          <a:prstGeom prst="ellipse">
+            <a:avLst/>
+          </a:prstGeom>
+          <a:noFill/>
+          <a:ln w="15875">
+            <a:solidFill>
+              <a:srgbClr val="DDE2E8"/>
+            </a:solidFill>
+          </a:ln>
+          <a:effectLst/>
+        </p:spPr>
+        <p:style>
+          <a:lnRef idx="1">
+            <a:schemeClr val="accent1"/>
+          </a:lnRef>
+          <a:fillRef idx="3">
+            <a:schemeClr val="accent1"/>
+          </a:fillRef>
+          <a:effectRef idx="2">
+            <a:schemeClr val="accent1"/>
+          </a:effectRef>
+          <a:fontRef idx="minor">
+            <a:schemeClr val="lt1"/>
+          </a:fontRef>
+        </p:style>
+        <p:txBody>
+          <a:bodyPr rtlCol="0" anchor="ctr"/>
+          <a:lstStyle/>
+          <a:p>
+            <a:pPr algn="ctr"/>
+          </a:p>
+        </p:txBody>
+      </p:sp>
+      <p:sp>
+        <p:nvSpPr>
+          <p:cNvPr id="3" name="Rectangle 2"/>
+          <p:cNvSpPr/>
+          <p:nvPr/>
+        </p:nvSpPr>
+        <p:spPr>
+          <a:xfrm>
+            <a:off x="548640" y="502920"/>
+            <a:ext cx="256032" cy="256032"/>
+          </a:xfrm>
+          <a:prstGeom prst="rect">
             <a:avLst/>
           </a:prstGeom>
           <a:solidFill>
@@ -27027,408 +27641,88 @@
       </p:sp>
       <p:sp>
         <p:nvSpPr>
-          <p:cNvPr id="14" name="TextBox 13"/>
-          <p:cNvSpPr txBox="1"/>
-          <p:nvPr/>
-        </p:nvSpPr>
-        <p:spPr>
-          <a:xfrm>
-            <a:off x="6446520" y="3566160"/>
-            <a:ext cx="411480" cy="411480"/>
-          </a:xfrm>
-          <a:prstGeom prst="rect">
-            <a:avLst/>
-          </a:prstGeom>
-          <a:noFill/>
-        </p:spPr>
-        <p:txBody>
-          <a:bodyPr wrap="square" anchor="ctr" lIns="0" rIns="0" tIns="0" bIns="0">
-            <a:spAutoFit/>
-          </a:bodyPr>
-          <a:lstStyle/>
-          <a:p>
-            <a:pPr algn="ctr"/>
-            <a:r>
-              <a:rPr sz="1400" b="1" i="0">
-                <a:solidFill>
-                  <a:srgbClr val="FFFFFF"/>
-                </a:solidFill>
-                <a:latin typeface="Calibri"/>
-              </a:rPr>
-              <a:t>✓</a:t>
-            </a:r>
-          </a:p>
-        </p:txBody>
-      </p:sp>
-      <p:sp>
-        <p:nvSpPr>
-          <p:cNvPr id="15" name="TextBox 14"/>
-          <p:cNvSpPr txBox="1"/>
-          <p:nvPr/>
-        </p:nvSpPr>
-        <p:spPr>
-          <a:xfrm>
-            <a:off x="7040880" y="3337560"/>
-            <a:ext cx="4297680" cy="868680"/>
-          </a:xfrm>
-          <a:prstGeom prst="rect">
-            <a:avLst/>
-          </a:prstGeom>
-          <a:noFill/>
-        </p:spPr>
-        <p:txBody>
-          <a:bodyPr wrap="square" anchor="ctr" lIns="0" rIns="0" tIns="0" bIns="0">
+          <p:cNvPr id="4" name="TextBox 3"/>
+          <p:cNvSpPr txBox="1"/>
+          <p:nvPr/>
+        </p:nvSpPr>
+        <p:spPr>
+          <a:xfrm>
+            <a:off x="914400" y="457200"/>
+            <a:ext cx="9509760" cy="320040"/>
+          </a:xfrm>
+          <a:prstGeom prst="rect">
+            <a:avLst/>
+          </a:prstGeom>
+          <a:noFill/>
+        </p:spPr>
+        <p:txBody>
+          <a:bodyPr wrap="square" anchor="t" lIns="0" rIns="0" tIns="0" bIns="0">
             <a:spAutoFit/>
           </a:bodyPr>
           <a:lstStyle/>
           <a:p>
             <a:pPr algn="l"/>
             <a:r>
-              <a:rPr sz="1450" b="1" i="0">
+              <a:rPr sz="1300" b="1" i="0">
+                <a:solidFill>
+                  <a:srgbClr val="2A9D8F"/>
+                </a:solidFill>
+                <a:latin typeface="Arial"/>
+              </a:rPr>
+              <a:t>ANSWER REVEALED</a:t>
+            </a:r>
+          </a:p>
+        </p:txBody>
+      </p:sp>
+      <p:sp>
+        <p:nvSpPr>
+          <p:cNvPr id="5" name="TextBox 4"/>
+          <p:cNvSpPr txBox="1"/>
+          <p:nvPr/>
+        </p:nvSpPr>
+        <p:spPr>
+          <a:xfrm>
+            <a:off x="548640" y="777240"/>
+            <a:ext cx="9966960" cy="822960"/>
+          </a:xfrm>
+          <a:prstGeom prst="rect">
+            <a:avLst/>
+          </a:prstGeom>
+          <a:noFill/>
+        </p:spPr>
+        <p:txBody>
+          <a:bodyPr wrap="square" anchor="t" lIns="0" rIns="0" tIns="0" bIns="0">
+            <a:spAutoFit/>
+          </a:bodyPr>
+          <a:lstStyle/>
+          <a:p>
+            <a:pPr algn="l"/>
+            <a:r>
+              <a:rPr sz="3000" b="1" i="0">
                 <a:solidFill>
                   <a:srgbClr val="1D2433"/>
                 </a:solidFill>
                 <a:latin typeface="Calibri"/>
               </a:rPr>
-              <a:t>Adjustable by changing the current</a:t>
-            </a:r>
-          </a:p>
-        </p:txBody>
-      </p:sp>
-      <p:sp>
-        <p:nvSpPr>
-          <p:cNvPr id="16" name="Rounded Rectangle 15"/>
+              <a:t>Q5 — Which Is Stronger Controllable</a:t>
+            </a:r>
+          </a:p>
+        </p:txBody>
+      </p:sp>
+      <p:sp>
+        <p:nvSpPr>
+          <p:cNvPr id="6" name="Rounded Rectangle 5"/>
           <p:cNvSpPr/>
           <p:nvPr/>
         </p:nvSpPr>
         <p:spPr>
           <a:xfrm>
-            <a:off x="640080" y="4370831"/>
-            <a:ext cx="5349240" cy="868680"/>
+            <a:off x="640080" y="1783080"/>
+            <a:ext cx="10881360" cy="1325880"/>
           </a:xfrm>
           <a:prstGeom prst="roundRect">
             <a:avLst>
-              <a:gd name="adj" fmla="val 12000"/>
-            </a:avLst>
-          </a:prstGeom>
-          <a:solidFill>
-            <a:srgbClr val="EAF1F4"/>
-          </a:solidFill>
-          <a:ln>
-            <a:noFill/>
-          </a:ln>
-          <a:effectLst/>
-        </p:spPr>
-        <p:style>
-          <a:lnRef idx="1">
-            <a:schemeClr val="accent1"/>
-          </a:lnRef>
-          <a:fillRef idx="3">
-            <a:schemeClr val="accent1"/>
-          </a:fillRef>
-          <a:effectRef idx="2">
-            <a:schemeClr val="accent1"/>
-          </a:effectRef>
-          <a:fontRef idx="minor">
-            <a:schemeClr val="lt1"/>
-          </a:fontRef>
-        </p:style>
-        <p:txBody>
-          <a:bodyPr rtlCol="0" anchor="ctr"/>
-          <a:lstStyle/>
-          <a:p>
-            <a:pPr algn="ctr"/>
-          </a:p>
-        </p:txBody>
-      </p:sp>
-      <p:sp>
-        <p:nvSpPr>
-          <p:cNvPr id="17" name="Oval 16"/>
-          <p:cNvSpPr/>
-          <p:nvPr/>
-        </p:nvSpPr>
-        <p:spPr>
-          <a:xfrm>
-            <a:off x="914400" y="4599431"/>
-            <a:ext cx="411480" cy="411480"/>
-          </a:xfrm>
-          <a:prstGeom prst="ellipse">
-            <a:avLst/>
-          </a:prstGeom>
-          <a:solidFill>
-            <a:srgbClr val="B7C2CC"/>
-          </a:solidFill>
-          <a:ln>
-            <a:noFill/>
-          </a:ln>
-          <a:effectLst/>
-        </p:spPr>
-        <p:style>
-          <a:lnRef idx="1">
-            <a:schemeClr val="accent1"/>
-          </a:lnRef>
-          <a:fillRef idx="3">
-            <a:schemeClr val="accent1"/>
-          </a:fillRef>
-          <a:effectRef idx="2">
-            <a:schemeClr val="accent1"/>
-          </a:effectRef>
-          <a:fontRef idx="minor">
-            <a:schemeClr val="lt1"/>
-          </a:fontRef>
-        </p:style>
-        <p:txBody>
-          <a:bodyPr rtlCol="0" anchor="ctr"/>
-          <a:lstStyle/>
-          <a:p>
-            <a:pPr algn="ctr"/>
-          </a:p>
-        </p:txBody>
-      </p:sp>
-      <p:sp>
-        <p:nvSpPr>
-          <p:cNvPr id="18" name="TextBox 17"/>
-          <p:cNvSpPr txBox="1"/>
-          <p:nvPr/>
-        </p:nvSpPr>
-        <p:spPr>
-          <a:xfrm>
-            <a:off x="914400" y="4599431"/>
-            <a:ext cx="411480" cy="411480"/>
-          </a:xfrm>
-          <a:prstGeom prst="rect">
-            <a:avLst/>
-          </a:prstGeom>
-          <a:noFill/>
-        </p:spPr>
-        <p:txBody>
-          <a:bodyPr wrap="square" anchor="ctr" lIns="0" rIns="0" tIns="0" bIns="0">
-            <a:spAutoFit/>
-          </a:bodyPr>
-          <a:lstStyle/>
-          <a:p>
-            <a:pPr algn="ctr"/>
-            <a:r>
-              <a:rPr sz="1400" b="1" i="0">
-                <a:solidFill>
-                  <a:srgbClr val="FFFFFF"/>
-                </a:solidFill>
-                <a:latin typeface="Calibri"/>
-              </a:rPr>
-              <a:t>C</a:t>
-            </a:r>
-          </a:p>
-        </p:txBody>
-      </p:sp>
-      <p:sp>
-        <p:nvSpPr>
-          <p:cNvPr id="19" name="TextBox 18"/>
-          <p:cNvSpPr txBox="1"/>
-          <p:nvPr/>
-        </p:nvSpPr>
-        <p:spPr>
-          <a:xfrm>
-            <a:off x="1508760" y="4370831"/>
-            <a:ext cx="4297680" cy="868680"/>
-          </a:xfrm>
-          <a:prstGeom prst="rect">
-            <a:avLst/>
-          </a:prstGeom>
-          <a:noFill/>
-        </p:spPr>
-        <p:txBody>
-          <a:bodyPr wrap="square" anchor="ctr" lIns="0" rIns="0" tIns="0" bIns="0">
-            <a:spAutoFit/>
-          </a:bodyPr>
-          <a:lstStyle/>
-          <a:p>
-            <a:pPr algn="l"/>
-            <a:r>
-              <a:rPr sz="1450" b="0" i="0">
-                <a:solidFill>
-                  <a:srgbClr val="6B7280"/>
-                </a:solidFill>
-                <a:latin typeface="Calibri"/>
-              </a:rPr>
-              <a:t>Always weaker</a:t>
-            </a:r>
-          </a:p>
-        </p:txBody>
-      </p:sp>
-      <p:sp>
-        <p:nvSpPr>
-          <p:cNvPr id="20" name="Rounded Rectangle 19"/>
-          <p:cNvSpPr/>
-          <p:nvPr/>
-        </p:nvSpPr>
-        <p:spPr>
-          <a:xfrm>
-            <a:off x="6172200" y="4370831"/>
-            <a:ext cx="5349240" cy="868680"/>
-          </a:xfrm>
-          <a:prstGeom prst="roundRect">
-            <a:avLst>
-              <a:gd name="adj" fmla="val 12000"/>
-            </a:avLst>
-          </a:prstGeom>
-          <a:solidFill>
-            <a:srgbClr val="EAF1F4"/>
-          </a:solidFill>
-          <a:ln>
-            <a:noFill/>
-          </a:ln>
-          <a:effectLst/>
-        </p:spPr>
-        <p:style>
-          <a:lnRef idx="1">
-            <a:schemeClr val="accent1"/>
-          </a:lnRef>
-          <a:fillRef idx="3">
-            <a:schemeClr val="accent1"/>
-          </a:fillRef>
-          <a:effectRef idx="2">
-            <a:schemeClr val="accent1"/>
-          </a:effectRef>
-          <a:fontRef idx="minor">
-            <a:schemeClr val="lt1"/>
-          </a:fontRef>
-        </p:style>
-        <p:txBody>
-          <a:bodyPr rtlCol="0" anchor="ctr"/>
-          <a:lstStyle/>
-          <a:p>
-            <a:pPr algn="ctr"/>
-          </a:p>
-        </p:txBody>
-      </p:sp>
-      <p:sp>
-        <p:nvSpPr>
-          <p:cNvPr id="21" name="Oval 20"/>
-          <p:cNvSpPr/>
-          <p:nvPr/>
-        </p:nvSpPr>
-        <p:spPr>
-          <a:xfrm>
-            <a:off x="6446520" y="4599431"/>
-            <a:ext cx="411480" cy="411480"/>
-          </a:xfrm>
-          <a:prstGeom prst="ellipse">
-            <a:avLst/>
-          </a:prstGeom>
-          <a:solidFill>
-            <a:srgbClr val="B7C2CC"/>
-          </a:solidFill>
-          <a:ln>
-            <a:noFill/>
-          </a:ln>
-          <a:effectLst/>
-        </p:spPr>
-        <p:style>
-          <a:lnRef idx="1">
-            <a:schemeClr val="accent1"/>
-          </a:lnRef>
-          <a:fillRef idx="3">
-            <a:schemeClr val="accent1"/>
-          </a:fillRef>
-          <a:effectRef idx="2">
-            <a:schemeClr val="accent1"/>
-          </a:effectRef>
-          <a:fontRef idx="minor">
-            <a:schemeClr val="lt1"/>
-          </a:fontRef>
-        </p:style>
-        <p:txBody>
-          <a:bodyPr rtlCol="0" anchor="ctr"/>
-          <a:lstStyle/>
-          <a:p>
-            <a:pPr algn="ctr"/>
-          </a:p>
-        </p:txBody>
-      </p:sp>
-      <p:sp>
-        <p:nvSpPr>
-          <p:cNvPr id="22" name="TextBox 21"/>
-          <p:cNvSpPr txBox="1"/>
-          <p:nvPr/>
-        </p:nvSpPr>
-        <p:spPr>
-          <a:xfrm>
-            <a:off x="6446520" y="4599431"/>
-            <a:ext cx="411480" cy="411480"/>
-          </a:xfrm>
-          <a:prstGeom prst="rect">
-            <a:avLst/>
-          </a:prstGeom>
-          <a:noFill/>
-        </p:spPr>
-        <p:txBody>
-          <a:bodyPr wrap="square" anchor="ctr" lIns="0" rIns="0" tIns="0" bIns="0">
-            <a:spAutoFit/>
-          </a:bodyPr>
-          <a:lstStyle/>
-          <a:p>
-            <a:pPr algn="ctr"/>
-            <a:r>
-              <a:rPr sz="1400" b="1" i="0">
-                <a:solidFill>
-                  <a:srgbClr val="FFFFFF"/>
-                </a:solidFill>
-                <a:latin typeface="Calibri"/>
-              </a:rPr>
-              <a:t>D</a:t>
-            </a:r>
-          </a:p>
-        </p:txBody>
-      </p:sp>
-      <p:sp>
-        <p:nvSpPr>
-          <p:cNvPr id="23" name="TextBox 22"/>
-          <p:cNvSpPr txBox="1"/>
-          <p:nvPr/>
-        </p:nvSpPr>
-        <p:spPr>
-          <a:xfrm>
-            <a:off x="7040880" y="4370831"/>
-            <a:ext cx="4297680" cy="868680"/>
-          </a:xfrm>
-          <a:prstGeom prst="rect">
-            <a:avLst/>
-          </a:prstGeom>
-          <a:noFill/>
-        </p:spPr>
-        <p:txBody>
-          <a:bodyPr wrap="square" anchor="ctr" lIns="0" rIns="0" tIns="0" bIns="0">
-            <a:spAutoFit/>
-          </a:bodyPr>
-          <a:lstStyle/>
-          <a:p>
-            <a:pPr algn="l"/>
-            <a:r>
-              <a:rPr sz="1450" b="0" i="0">
-                <a:solidFill>
-                  <a:srgbClr val="6B7280"/>
-                </a:solidFill>
-                <a:latin typeface="Calibri"/>
-              </a:rPr>
-              <a:t>Impossible to change</a:t>
-            </a:r>
-          </a:p>
-        </p:txBody>
-      </p:sp>
-      <p:sp>
-        <p:nvSpPr>
-          <p:cNvPr id="24" name="Rounded Rectangle 23"/>
-          <p:cNvSpPr/>
-          <p:nvPr/>
-        </p:nvSpPr>
-        <p:spPr>
-          <a:xfrm>
-            <a:off x="640080" y="5440680"/>
-            <a:ext cx="10881360" cy="1097280"/>
-          </a:xfrm>
-          <a:prstGeom prst="roundRect">
-            <a:avLst>
-              <a:gd name="adj" fmla="val 5000"/>
+              <a:gd name="adj" fmla="val 4000"/>
             </a:avLst>
           </a:prstGeom>
           <a:solidFill>
@@ -27469,6 +27763,735 @@
       </p:sp>
       <p:sp>
         <p:nvSpPr>
+          <p:cNvPr id="7" name="TextBox 6"/>
+          <p:cNvSpPr txBox="1"/>
+          <p:nvPr/>
+        </p:nvSpPr>
+        <p:spPr>
+          <a:xfrm>
+            <a:off x="1005840" y="1783080"/>
+            <a:ext cx="10149840" cy="1325880"/>
+          </a:xfrm>
+          <a:prstGeom prst="rect">
+            <a:avLst/>
+          </a:prstGeom>
+          <a:noFill/>
+        </p:spPr>
+        <p:txBody>
+          <a:bodyPr wrap="square" anchor="ctr" lIns="0" rIns="0" tIns="0" bIns="0">
+            <a:spAutoFit/>
+          </a:bodyPr>
+          <a:lstStyle/>
+          <a:p>
+            <a:pPr algn="l"/>
+            <a:r>
+              <a:rPr sz="1800" b="1" i="0">
+                <a:solidFill>
+                  <a:srgbClr val="1D2433"/>
+                </a:solidFill>
+                <a:latin typeface="Calibri"/>
+              </a:rPr>
+              <a:t>Compared with an ordinary permanent magnet, an electromagnet's strength is:</a:t>
+            </a:r>
+          </a:p>
+        </p:txBody>
+      </p:sp>
+      <p:sp>
+        <p:nvSpPr>
+          <p:cNvPr id="8" name="Rounded Rectangle 7"/>
+          <p:cNvSpPr/>
+          <p:nvPr/>
+        </p:nvSpPr>
+        <p:spPr>
+          <a:xfrm>
+            <a:off x="640080" y="3337560"/>
+            <a:ext cx="5349240" cy="868680"/>
+          </a:xfrm>
+          <a:prstGeom prst="roundRect">
+            <a:avLst>
+              <a:gd name="adj" fmla="val 12000"/>
+            </a:avLst>
+          </a:prstGeom>
+          <a:solidFill>
+            <a:srgbClr val="EAF1F4"/>
+          </a:solidFill>
+          <a:ln>
+            <a:noFill/>
+          </a:ln>
+          <a:effectLst/>
+        </p:spPr>
+        <p:style>
+          <a:lnRef idx="1">
+            <a:schemeClr val="accent1"/>
+          </a:lnRef>
+          <a:fillRef idx="3">
+            <a:schemeClr val="accent1"/>
+          </a:fillRef>
+          <a:effectRef idx="2">
+            <a:schemeClr val="accent1"/>
+          </a:effectRef>
+          <a:fontRef idx="minor">
+            <a:schemeClr val="lt1"/>
+          </a:fontRef>
+        </p:style>
+        <p:txBody>
+          <a:bodyPr rtlCol="0" anchor="ctr"/>
+          <a:lstStyle/>
+          <a:p>
+            <a:pPr algn="ctr"/>
+          </a:p>
+        </p:txBody>
+      </p:sp>
+      <p:sp>
+        <p:nvSpPr>
+          <p:cNvPr id="9" name="Oval 8"/>
+          <p:cNvSpPr/>
+          <p:nvPr/>
+        </p:nvSpPr>
+        <p:spPr>
+          <a:xfrm>
+            <a:off x="914400" y="3566160"/>
+            <a:ext cx="411480" cy="411480"/>
+          </a:xfrm>
+          <a:prstGeom prst="ellipse">
+            <a:avLst/>
+          </a:prstGeom>
+          <a:solidFill>
+            <a:srgbClr val="B7C2CC"/>
+          </a:solidFill>
+          <a:ln>
+            <a:noFill/>
+          </a:ln>
+          <a:effectLst/>
+        </p:spPr>
+        <p:style>
+          <a:lnRef idx="1">
+            <a:schemeClr val="accent1"/>
+          </a:lnRef>
+          <a:fillRef idx="3">
+            <a:schemeClr val="accent1"/>
+          </a:fillRef>
+          <a:effectRef idx="2">
+            <a:schemeClr val="accent1"/>
+          </a:effectRef>
+          <a:fontRef idx="minor">
+            <a:schemeClr val="lt1"/>
+          </a:fontRef>
+        </p:style>
+        <p:txBody>
+          <a:bodyPr rtlCol="0" anchor="ctr"/>
+          <a:lstStyle/>
+          <a:p>
+            <a:pPr algn="ctr"/>
+          </a:p>
+        </p:txBody>
+      </p:sp>
+      <p:sp>
+        <p:nvSpPr>
+          <p:cNvPr id="10" name="TextBox 9"/>
+          <p:cNvSpPr txBox="1"/>
+          <p:nvPr/>
+        </p:nvSpPr>
+        <p:spPr>
+          <a:xfrm>
+            <a:off x="914400" y="3566160"/>
+            <a:ext cx="411480" cy="411480"/>
+          </a:xfrm>
+          <a:prstGeom prst="rect">
+            <a:avLst/>
+          </a:prstGeom>
+          <a:noFill/>
+        </p:spPr>
+        <p:txBody>
+          <a:bodyPr wrap="square" anchor="ctr" lIns="0" rIns="0" tIns="0" bIns="0">
+            <a:spAutoFit/>
+          </a:bodyPr>
+          <a:lstStyle/>
+          <a:p>
+            <a:pPr algn="ctr"/>
+            <a:r>
+              <a:rPr sz="1400" b="1" i="0">
+                <a:solidFill>
+                  <a:srgbClr val="FFFFFF"/>
+                </a:solidFill>
+                <a:latin typeface="Calibri"/>
+              </a:rPr>
+              <a:t>A</a:t>
+            </a:r>
+          </a:p>
+        </p:txBody>
+      </p:sp>
+      <p:sp>
+        <p:nvSpPr>
+          <p:cNvPr id="11" name="TextBox 10"/>
+          <p:cNvSpPr txBox="1"/>
+          <p:nvPr/>
+        </p:nvSpPr>
+        <p:spPr>
+          <a:xfrm>
+            <a:off x="1508760" y="3337560"/>
+            <a:ext cx="4297680" cy="868680"/>
+          </a:xfrm>
+          <a:prstGeom prst="rect">
+            <a:avLst/>
+          </a:prstGeom>
+          <a:noFill/>
+        </p:spPr>
+        <p:txBody>
+          <a:bodyPr wrap="square" anchor="ctr" lIns="0" rIns="0" tIns="0" bIns="0">
+            <a:spAutoFit/>
+          </a:bodyPr>
+          <a:lstStyle/>
+          <a:p>
+            <a:pPr algn="l"/>
+            <a:r>
+              <a:rPr sz="1450" b="0" i="0">
+                <a:solidFill>
+                  <a:srgbClr val="6B7280"/>
+                </a:solidFill>
+                <a:latin typeface="Calibri"/>
+              </a:rPr>
+              <a:t>Always fixed</a:t>
+            </a:r>
+          </a:p>
+        </p:txBody>
+      </p:sp>
+      <p:sp>
+        <p:nvSpPr>
+          <p:cNvPr id="12" name="Rounded Rectangle 11"/>
+          <p:cNvSpPr/>
+          <p:nvPr/>
+        </p:nvSpPr>
+        <p:spPr>
+          <a:xfrm>
+            <a:off x="6172200" y="3337560"/>
+            <a:ext cx="5349240" cy="868680"/>
+          </a:xfrm>
+          <a:prstGeom prst="roundRect">
+            <a:avLst>
+              <a:gd name="adj" fmla="val 12000"/>
+            </a:avLst>
+          </a:prstGeom>
+          <a:solidFill>
+            <a:srgbClr val="E9F5F0"/>
+          </a:solidFill>
+          <a:ln w="25400">
+            <a:solidFill>
+              <a:srgbClr val="2A9D8F"/>
+            </a:solidFill>
+          </a:ln>
+          <a:effectLst/>
+        </p:spPr>
+        <p:style>
+          <a:lnRef idx="1">
+            <a:schemeClr val="accent1"/>
+          </a:lnRef>
+          <a:fillRef idx="3">
+            <a:schemeClr val="accent1"/>
+          </a:fillRef>
+          <a:effectRef idx="2">
+            <a:schemeClr val="accent1"/>
+          </a:effectRef>
+          <a:fontRef idx="minor">
+            <a:schemeClr val="lt1"/>
+          </a:fontRef>
+        </p:style>
+        <p:txBody>
+          <a:bodyPr rtlCol="0" anchor="ctr"/>
+          <a:lstStyle/>
+          <a:p>
+            <a:pPr algn="ctr"/>
+          </a:p>
+        </p:txBody>
+      </p:sp>
+      <p:sp>
+        <p:nvSpPr>
+          <p:cNvPr id="13" name="Oval 12"/>
+          <p:cNvSpPr/>
+          <p:nvPr/>
+        </p:nvSpPr>
+        <p:spPr>
+          <a:xfrm>
+            <a:off x="6446520" y="3566160"/>
+            <a:ext cx="411480" cy="411480"/>
+          </a:xfrm>
+          <a:prstGeom prst="ellipse">
+            <a:avLst/>
+          </a:prstGeom>
+          <a:solidFill>
+            <a:srgbClr val="2A9D8F"/>
+          </a:solidFill>
+          <a:ln>
+            <a:noFill/>
+          </a:ln>
+          <a:effectLst/>
+        </p:spPr>
+        <p:style>
+          <a:lnRef idx="1">
+            <a:schemeClr val="accent1"/>
+          </a:lnRef>
+          <a:fillRef idx="3">
+            <a:schemeClr val="accent1"/>
+          </a:fillRef>
+          <a:effectRef idx="2">
+            <a:schemeClr val="accent1"/>
+          </a:effectRef>
+          <a:fontRef idx="minor">
+            <a:schemeClr val="lt1"/>
+          </a:fontRef>
+        </p:style>
+        <p:txBody>
+          <a:bodyPr rtlCol="0" anchor="ctr"/>
+          <a:lstStyle/>
+          <a:p>
+            <a:pPr algn="ctr"/>
+          </a:p>
+        </p:txBody>
+      </p:sp>
+      <p:sp>
+        <p:nvSpPr>
+          <p:cNvPr id="14" name="TextBox 13"/>
+          <p:cNvSpPr txBox="1"/>
+          <p:nvPr/>
+        </p:nvSpPr>
+        <p:spPr>
+          <a:xfrm>
+            <a:off x="6446520" y="3566160"/>
+            <a:ext cx="411480" cy="411480"/>
+          </a:xfrm>
+          <a:prstGeom prst="rect">
+            <a:avLst/>
+          </a:prstGeom>
+          <a:noFill/>
+        </p:spPr>
+        <p:txBody>
+          <a:bodyPr wrap="square" anchor="ctr" lIns="0" rIns="0" tIns="0" bIns="0">
+            <a:spAutoFit/>
+          </a:bodyPr>
+          <a:lstStyle/>
+          <a:p>
+            <a:pPr algn="ctr"/>
+            <a:r>
+              <a:rPr sz="1400" b="1" i="0">
+                <a:solidFill>
+                  <a:srgbClr val="FFFFFF"/>
+                </a:solidFill>
+                <a:latin typeface="Calibri"/>
+              </a:rPr>
+              <a:t>✓</a:t>
+            </a:r>
+          </a:p>
+        </p:txBody>
+      </p:sp>
+      <p:sp>
+        <p:nvSpPr>
+          <p:cNvPr id="15" name="TextBox 14"/>
+          <p:cNvSpPr txBox="1"/>
+          <p:nvPr/>
+        </p:nvSpPr>
+        <p:spPr>
+          <a:xfrm>
+            <a:off x="7040880" y="3337560"/>
+            <a:ext cx="4297680" cy="868680"/>
+          </a:xfrm>
+          <a:prstGeom prst="rect">
+            <a:avLst/>
+          </a:prstGeom>
+          <a:noFill/>
+        </p:spPr>
+        <p:txBody>
+          <a:bodyPr wrap="square" anchor="ctr" lIns="0" rIns="0" tIns="0" bIns="0">
+            <a:spAutoFit/>
+          </a:bodyPr>
+          <a:lstStyle/>
+          <a:p>
+            <a:pPr algn="l"/>
+            <a:r>
+              <a:rPr sz="1450" b="1" i="0">
+                <a:solidFill>
+                  <a:srgbClr val="1D2433"/>
+                </a:solidFill>
+                <a:latin typeface="Calibri"/>
+              </a:rPr>
+              <a:t>Adjustable by changing the current</a:t>
+            </a:r>
+          </a:p>
+        </p:txBody>
+      </p:sp>
+      <p:sp>
+        <p:nvSpPr>
+          <p:cNvPr id="16" name="Rounded Rectangle 15"/>
+          <p:cNvSpPr/>
+          <p:nvPr/>
+        </p:nvSpPr>
+        <p:spPr>
+          <a:xfrm>
+            <a:off x="640080" y="4370831"/>
+            <a:ext cx="5349240" cy="868680"/>
+          </a:xfrm>
+          <a:prstGeom prst="roundRect">
+            <a:avLst>
+              <a:gd name="adj" fmla="val 12000"/>
+            </a:avLst>
+          </a:prstGeom>
+          <a:solidFill>
+            <a:srgbClr val="EAF1F4"/>
+          </a:solidFill>
+          <a:ln>
+            <a:noFill/>
+          </a:ln>
+          <a:effectLst/>
+        </p:spPr>
+        <p:style>
+          <a:lnRef idx="1">
+            <a:schemeClr val="accent1"/>
+          </a:lnRef>
+          <a:fillRef idx="3">
+            <a:schemeClr val="accent1"/>
+          </a:fillRef>
+          <a:effectRef idx="2">
+            <a:schemeClr val="accent1"/>
+          </a:effectRef>
+          <a:fontRef idx="minor">
+            <a:schemeClr val="lt1"/>
+          </a:fontRef>
+        </p:style>
+        <p:txBody>
+          <a:bodyPr rtlCol="0" anchor="ctr"/>
+          <a:lstStyle/>
+          <a:p>
+            <a:pPr algn="ctr"/>
+          </a:p>
+        </p:txBody>
+      </p:sp>
+      <p:sp>
+        <p:nvSpPr>
+          <p:cNvPr id="17" name="Oval 16"/>
+          <p:cNvSpPr/>
+          <p:nvPr/>
+        </p:nvSpPr>
+        <p:spPr>
+          <a:xfrm>
+            <a:off x="914400" y="4599431"/>
+            <a:ext cx="411480" cy="411480"/>
+          </a:xfrm>
+          <a:prstGeom prst="ellipse">
+            <a:avLst/>
+          </a:prstGeom>
+          <a:solidFill>
+            <a:srgbClr val="B7C2CC"/>
+          </a:solidFill>
+          <a:ln>
+            <a:noFill/>
+          </a:ln>
+          <a:effectLst/>
+        </p:spPr>
+        <p:style>
+          <a:lnRef idx="1">
+            <a:schemeClr val="accent1"/>
+          </a:lnRef>
+          <a:fillRef idx="3">
+            <a:schemeClr val="accent1"/>
+          </a:fillRef>
+          <a:effectRef idx="2">
+            <a:schemeClr val="accent1"/>
+          </a:effectRef>
+          <a:fontRef idx="minor">
+            <a:schemeClr val="lt1"/>
+          </a:fontRef>
+        </p:style>
+        <p:txBody>
+          <a:bodyPr rtlCol="0" anchor="ctr"/>
+          <a:lstStyle/>
+          <a:p>
+            <a:pPr algn="ctr"/>
+          </a:p>
+        </p:txBody>
+      </p:sp>
+      <p:sp>
+        <p:nvSpPr>
+          <p:cNvPr id="18" name="TextBox 17"/>
+          <p:cNvSpPr txBox="1"/>
+          <p:nvPr/>
+        </p:nvSpPr>
+        <p:spPr>
+          <a:xfrm>
+            <a:off x="914400" y="4599431"/>
+            <a:ext cx="411480" cy="411480"/>
+          </a:xfrm>
+          <a:prstGeom prst="rect">
+            <a:avLst/>
+          </a:prstGeom>
+          <a:noFill/>
+        </p:spPr>
+        <p:txBody>
+          <a:bodyPr wrap="square" anchor="ctr" lIns="0" rIns="0" tIns="0" bIns="0">
+            <a:spAutoFit/>
+          </a:bodyPr>
+          <a:lstStyle/>
+          <a:p>
+            <a:pPr algn="ctr"/>
+            <a:r>
+              <a:rPr sz="1400" b="1" i="0">
+                <a:solidFill>
+                  <a:srgbClr val="FFFFFF"/>
+                </a:solidFill>
+                <a:latin typeface="Calibri"/>
+              </a:rPr>
+              <a:t>C</a:t>
+            </a:r>
+          </a:p>
+        </p:txBody>
+      </p:sp>
+      <p:sp>
+        <p:nvSpPr>
+          <p:cNvPr id="19" name="TextBox 18"/>
+          <p:cNvSpPr txBox="1"/>
+          <p:nvPr/>
+        </p:nvSpPr>
+        <p:spPr>
+          <a:xfrm>
+            <a:off x="1508760" y="4370831"/>
+            <a:ext cx="4297680" cy="868680"/>
+          </a:xfrm>
+          <a:prstGeom prst="rect">
+            <a:avLst/>
+          </a:prstGeom>
+          <a:noFill/>
+        </p:spPr>
+        <p:txBody>
+          <a:bodyPr wrap="square" anchor="ctr" lIns="0" rIns="0" tIns="0" bIns="0">
+            <a:spAutoFit/>
+          </a:bodyPr>
+          <a:lstStyle/>
+          <a:p>
+            <a:pPr algn="l"/>
+            <a:r>
+              <a:rPr sz="1450" b="0" i="0">
+                <a:solidFill>
+                  <a:srgbClr val="6B7280"/>
+                </a:solidFill>
+                <a:latin typeface="Calibri"/>
+              </a:rPr>
+              <a:t>Always weaker</a:t>
+            </a:r>
+          </a:p>
+        </p:txBody>
+      </p:sp>
+      <p:sp>
+        <p:nvSpPr>
+          <p:cNvPr id="20" name="Rounded Rectangle 19"/>
+          <p:cNvSpPr/>
+          <p:nvPr/>
+        </p:nvSpPr>
+        <p:spPr>
+          <a:xfrm>
+            <a:off x="6172200" y="4370831"/>
+            <a:ext cx="5349240" cy="868680"/>
+          </a:xfrm>
+          <a:prstGeom prst="roundRect">
+            <a:avLst>
+              <a:gd name="adj" fmla="val 12000"/>
+            </a:avLst>
+          </a:prstGeom>
+          <a:solidFill>
+            <a:srgbClr val="EAF1F4"/>
+          </a:solidFill>
+          <a:ln>
+            <a:noFill/>
+          </a:ln>
+          <a:effectLst/>
+        </p:spPr>
+        <p:style>
+          <a:lnRef idx="1">
+            <a:schemeClr val="accent1"/>
+          </a:lnRef>
+          <a:fillRef idx="3">
+            <a:schemeClr val="accent1"/>
+          </a:fillRef>
+          <a:effectRef idx="2">
+            <a:schemeClr val="accent1"/>
+          </a:effectRef>
+          <a:fontRef idx="minor">
+            <a:schemeClr val="lt1"/>
+          </a:fontRef>
+        </p:style>
+        <p:txBody>
+          <a:bodyPr rtlCol="0" anchor="ctr"/>
+          <a:lstStyle/>
+          <a:p>
+            <a:pPr algn="ctr"/>
+          </a:p>
+        </p:txBody>
+      </p:sp>
+      <p:sp>
+        <p:nvSpPr>
+          <p:cNvPr id="21" name="Oval 20"/>
+          <p:cNvSpPr/>
+          <p:nvPr/>
+        </p:nvSpPr>
+        <p:spPr>
+          <a:xfrm>
+            <a:off x="6446520" y="4599431"/>
+            <a:ext cx="411480" cy="411480"/>
+          </a:xfrm>
+          <a:prstGeom prst="ellipse">
+            <a:avLst/>
+          </a:prstGeom>
+          <a:solidFill>
+            <a:srgbClr val="B7C2CC"/>
+          </a:solidFill>
+          <a:ln>
+            <a:noFill/>
+          </a:ln>
+          <a:effectLst/>
+        </p:spPr>
+        <p:style>
+          <a:lnRef idx="1">
+            <a:schemeClr val="accent1"/>
+          </a:lnRef>
+          <a:fillRef idx="3">
+            <a:schemeClr val="accent1"/>
+          </a:fillRef>
+          <a:effectRef idx="2">
+            <a:schemeClr val="accent1"/>
+          </a:effectRef>
+          <a:fontRef idx="minor">
+            <a:schemeClr val="lt1"/>
+          </a:fontRef>
+        </p:style>
+        <p:txBody>
+          <a:bodyPr rtlCol="0" anchor="ctr"/>
+          <a:lstStyle/>
+          <a:p>
+            <a:pPr algn="ctr"/>
+          </a:p>
+        </p:txBody>
+      </p:sp>
+      <p:sp>
+        <p:nvSpPr>
+          <p:cNvPr id="22" name="TextBox 21"/>
+          <p:cNvSpPr txBox="1"/>
+          <p:nvPr/>
+        </p:nvSpPr>
+        <p:spPr>
+          <a:xfrm>
+            <a:off x="6446520" y="4599431"/>
+            <a:ext cx="411480" cy="411480"/>
+          </a:xfrm>
+          <a:prstGeom prst="rect">
+            <a:avLst/>
+          </a:prstGeom>
+          <a:noFill/>
+        </p:spPr>
+        <p:txBody>
+          <a:bodyPr wrap="square" anchor="ctr" lIns="0" rIns="0" tIns="0" bIns="0">
+            <a:spAutoFit/>
+          </a:bodyPr>
+          <a:lstStyle/>
+          <a:p>
+            <a:pPr algn="ctr"/>
+            <a:r>
+              <a:rPr sz="1400" b="1" i="0">
+                <a:solidFill>
+                  <a:srgbClr val="FFFFFF"/>
+                </a:solidFill>
+                <a:latin typeface="Calibri"/>
+              </a:rPr>
+              <a:t>D</a:t>
+            </a:r>
+          </a:p>
+        </p:txBody>
+      </p:sp>
+      <p:sp>
+        <p:nvSpPr>
+          <p:cNvPr id="23" name="TextBox 22"/>
+          <p:cNvSpPr txBox="1"/>
+          <p:nvPr/>
+        </p:nvSpPr>
+        <p:spPr>
+          <a:xfrm>
+            <a:off x="7040880" y="4370831"/>
+            <a:ext cx="4297680" cy="868680"/>
+          </a:xfrm>
+          <a:prstGeom prst="rect">
+            <a:avLst/>
+          </a:prstGeom>
+          <a:noFill/>
+        </p:spPr>
+        <p:txBody>
+          <a:bodyPr wrap="square" anchor="ctr" lIns="0" rIns="0" tIns="0" bIns="0">
+            <a:spAutoFit/>
+          </a:bodyPr>
+          <a:lstStyle/>
+          <a:p>
+            <a:pPr algn="l"/>
+            <a:r>
+              <a:rPr sz="1450" b="0" i="0">
+                <a:solidFill>
+                  <a:srgbClr val="6B7280"/>
+                </a:solidFill>
+                <a:latin typeface="Calibri"/>
+              </a:rPr>
+              <a:t>Impossible to change</a:t>
+            </a:r>
+          </a:p>
+        </p:txBody>
+      </p:sp>
+      <p:sp>
+        <p:nvSpPr>
+          <p:cNvPr id="24" name="Rounded Rectangle 23"/>
+          <p:cNvSpPr/>
+          <p:nvPr/>
+        </p:nvSpPr>
+        <p:spPr>
+          <a:xfrm>
+            <a:off x="640080" y="5440680"/>
+            <a:ext cx="10881360" cy="1097280"/>
+          </a:xfrm>
+          <a:prstGeom prst="roundRect">
+            <a:avLst>
+              <a:gd name="adj" fmla="val 5000"/>
+            </a:avLst>
+          </a:prstGeom>
+          <a:solidFill>
+            <a:srgbClr val="FFFFFF"/>
+          </a:solidFill>
+          <a:ln>
+            <a:noFill/>
+          </a:ln>
+          <a:effectLst>
+            <a:outerShdw blurRad="88900" dist="38100" dir="5400000" rotWithShape="0" algn="bl">
+              <a:srgbClr val="000000">
+                <a:alpha val="16000"/>
+              </a:srgbClr>
+            </a:outerShdw>
+          </a:effectLst>
+        </p:spPr>
+        <p:style>
+          <a:lnRef idx="1">
+            <a:schemeClr val="accent1"/>
+          </a:lnRef>
+          <a:fillRef idx="3">
+            <a:schemeClr val="accent1"/>
+          </a:fillRef>
+          <a:effectRef idx="2">
+            <a:schemeClr val="accent1"/>
+          </a:effectRef>
+          <a:fontRef idx="minor">
+            <a:schemeClr val="lt1"/>
+          </a:fontRef>
+        </p:style>
+        <p:txBody>
+          <a:bodyPr rtlCol="0" anchor="ctr"/>
+          <a:lstStyle/>
+          <a:p>
+            <a:pPr algn="ctr"/>
+          </a:p>
+        </p:txBody>
+      </p:sp>
+      <p:sp>
+        <p:nvSpPr>
           <p:cNvPr id="25" name="TextBox 24"/>
           <p:cNvSpPr txBox="1"/>
           <p:nvPr/>
@@ -27549,7 +28572,7 @@
 </p:sld>
 </file>
 
-<file path=ppt/slides/slide35.xml><?xml version="1.0" encoding="utf-8"?>
+<file path=ppt/slides/slide36.xml><?xml version="1.0" encoding="utf-8"?>
 <p:sld xmlns:a="http://schemas.openxmlformats.org/drawingml/2006/main" xmlns:p="http://schemas.openxmlformats.org/presentationml/2006/main" xmlns:r="http://schemas.openxmlformats.org/officeDocument/2006/relationships">
   <p:cSld>
     <p:bg>
